--- a/02_TeoriaCuanticaTemprana/Evaluacion/Evaluacion_1_Presentacion.pptx
+++ b/02_TeoriaCuanticaTemprana/Evaluacion/Evaluacion_1_Presentacion.pptx
@@ -6,12 +6,12 @@
   </p:sldMasterIdLst>
   <p:sldIdLst>
     <p:sldId id="256" r:id="rId7"/>
-    <p:sldId id="257" r:id="rId9"/>
-    <p:sldId id="258" r:id="rId10"/>
-    <p:sldId id="259" r:id="rId11"/>
-    <p:sldId id="260" r:id="rId12"/>
+    <p:sldId id="257" r:id="rId8"/>
+    <p:sldId id="258" r:id="rId9"/>
+    <p:sldId id="259" r:id="rId10"/>
+    <p:sldId id="260" r:id="rId11"/>
   </p:sldIdLst>
-  <p:sldSz cx="12191695" cy="6858000" type="screen4x3"/>
+  <p:sldSz cx="12188952" cy="6858000" type="screen4x3"/>
   <p:notesSz cx="6858000" cy="9144000"/>
   <p:defaultTextStyle>
     <a:defPPr>
@@ -109,791 +109,6 @@
     </a:lvl9pPr>
   </p:defaultTextStyle>
 </p:presentation>
-</file>
-
-<file path=ppt/notesMasters/notesMaster1.xml><?xml version="1.0" encoding="utf-8"?>
-<p:notesMaster xmlns:a="http://schemas.openxmlformats.org/drawingml/2006/main" xmlns:p="http://schemas.openxmlformats.org/presentationml/2006/main" xmlns:r="http://schemas.openxmlformats.org/officeDocument/2006/relationships">
-  <p:cSld>
-    <p:bg>
-      <p:bgRef idx="1001">
-        <a:schemeClr val="bg1"/>
-      </p:bgRef>
-    </p:bg>
-    <p:spTree>
-      <p:nvGrpSpPr>
-        <p:cNvPr id="1" name=""/>
-        <p:cNvGrpSpPr/>
-        <p:nvPr/>
-      </p:nvGrpSpPr>
-      <p:grpSpPr>
-        <a:xfrm>
-          <a:off x="0" y="0"/>
-          <a:ext cx="0" cy="0"/>
-          <a:chOff x="0" y="0"/>
-          <a:chExt cx="0" cy="0"/>
-        </a:xfrm>
-      </p:grpSpPr>
-      <p:sp>
-        <p:nvSpPr>
-          <p:cNvPr id="2" name="Header Placeholder 1"/>
-          <p:cNvSpPr>
-            <a:spLocks noGrp="1"/>
-          </p:cNvSpPr>
-          <p:nvPr>
-            <p:ph type="hdr" sz="quarter"/>
-          </p:nvPr>
-        </p:nvSpPr>
-        <p:spPr>
-          <a:xfrm>
-            <a:off x="0" y="0"/>
-            <a:ext cx="2971800" cy="457200"/>
-          </a:xfrm>
-          <a:prstGeom prst="rect">
-            <a:avLst/>
-          </a:prstGeom>
-        </p:spPr>
-        <p:txBody>
-          <a:bodyPr vert="horz" lIns="91440" tIns="45720" rIns="91440" bIns="45720" rtlCol="0"/>
-          <a:lstStyle>
-            <a:lvl1pPr algn="l">
-              <a:defRPr sz="1200"/>
-            </a:lvl1pPr>
-          </a:lstStyle>
-          <a:p>
-            <a:endParaRPr lang="en-US"/>
-          </a:p>
-        </p:txBody>
-      </p:sp>
-      <p:sp>
-        <p:nvSpPr>
-          <p:cNvPr id="3" name="Date Placeholder 2"/>
-          <p:cNvSpPr>
-            <a:spLocks noGrp="1"/>
-          </p:cNvSpPr>
-          <p:nvPr>
-            <p:ph type="dt" idx="1"/>
-          </p:nvPr>
-        </p:nvSpPr>
-        <p:spPr>
-          <a:xfrm>
-            <a:off x="3884613" y="0"/>
-            <a:ext cx="2971800" cy="457200"/>
-          </a:xfrm>
-          <a:prstGeom prst="rect">
-            <a:avLst/>
-          </a:prstGeom>
-        </p:spPr>
-        <p:txBody>
-          <a:bodyPr vert="horz" lIns="91440" tIns="45720" rIns="91440" bIns="45720" rtlCol="0"/>
-          <a:lstStyle>
-            <a:lvl1pPr algn="r">
-              <a:defRPr sz="1200"/>
-            </a:lvl1pPr>
-          </a:lstStyle>
-          <a:p>
-            <a:fld id="{0F89C1C7-3DCD-1040-A9CF-14679D8B5DDD}" type="datetimeFigureOut">
-              <a:rPr lang="en-US" smtClean="0"/>
-              <a:t>10/17/16</a:t>
-            </a:fld>
-            <a:endParaRPr lang="en-US"/>
-          </a:p>
-        </p:txBody>
-      </p:sp>
-      <p:sp>
-        <p:nvSpPr>
-          <p:cNvPr id="4" name="Slide Image Placeholder 3"/>
-          <p:cNvSpPr>
-            <a:spLocks noGrp="1" noRot="1" noChangeAspect="1"/>
-          </p:cNvSpPr>
-          <p:nvPr>
-            <p:ph type="sldImg" idx="2"/>
-          </p:nvPr>
-        </p:nvSpPr>
-        <p:spPr>
-          <a:xfrm>
-            <a:off x="1143000" y="685800"/>
-            <a:ext cx="4572000" cy="3429000"/>
-          </a:xfrm>
-          <a:prstGeom prst="rect">
-            <a:avLst/>
-          </a:prstGeom>
-          <a:noFill/>
-          <a:ln w="12700">
-            <a:solidFill>
-              <a:prstClr val="black"/>
-            </a:solidFill>
-          </a:ln>
-        </p:spPr>
-        <p:txBody>
-          <a:bodyPr vert="horz" lIns="91440" tIns="45720" rIns="91440" bIns="45720" rtlCol="0" anchor="ctr"/>
-          <a:lstStyle/>
-          <a:p>
-            <a:endParaRPr lang="en-US"/>
-          </a:p>
-        </p:txBody>
-      </p:sp>
-      <p:sp>
-        <p:nvSpPr>
-          <p:cNvPr id="5" name="Notes Placeholder 4"/>
-          <p:cNvSpPr>
-            <a:spLocks noGrp="1"/>
-          </p:cNvSpPr>
-          <p:nvPr>
-            <p:ph type="body" sz="quarter" idx="3"/>
-          </p:nvPr>
-        </p:nvSpPr>
-        <p:spPr>
-          <a:xfrm>
-            <a:off x="685800" y="4343400"/>
-            <a:ext cx="5486400" cy="4114800"/>
-          </a:xfrm>
-          <a:prstGeom prst="rect">
-            <a:avLst/>
-          </a:prstGeom>
-        </p:spPr>
-        <p:txBody>
-          <a:bodyPr vert="horz" lIns="91440" tIns="45720" rIns="91440" bIns="45720" rtlCol="0"/>
-          <a:lstStyle/>
-          <a:p>
-            <a:pPr lvl="0"/>
-            <a:r>
-              <a:rPr lang="en-US" smtClean="0"/>
-              <a:t>Click to edit Master text styles</a:t>
-            </a:r>
-          </a:p>
-          <a:p>
-            <a:pPr lvl="1"/>
-            <a:r>
-              <a:rPr lang="en-US" smtClean="0"/>
-              <a:t>Second level</a:t>
-            </a:r>
-          </a:p>
-          <a:p>
-            <a:pPr lvl="2"/>
-            <a:r>
-              <a:rPr lang="en-US" smtClean="0"/>
-              <a:t>Third level</a:t>
-            </a:r>
-          </a:p>
-          <a:p>
-            <a:pPr lvl="3"/>
-            <a:r>
-              <a:rPr lang="en-US" smtClean="0"/>
-              <a:t>Fourth level</a:t>
-            </a:r>
-          </a:p>
-          <a:p>
-            <a:pPr lvl="4"/>
-            <a:r>
-              <a:rPr lang="en-US" smtClean="0"/>
-              <a:t>Fifth level</a:t>
-            </a:r>
-            <a:endParaRPr lang="en-US"/>
-          </a:p>
-        </p:txBody>
-      </p:sp>
-      <p:sp>
-        <p:nvSpPr>
-          <p:cNvPr id="6" name="Footer Placeholder 5"/>
-          <p:cNvSpPr>
-            <a:spLocks noGrp="1"/>
-          </p:cNvSpPr>
-          <p:nvPr>
-            <p:ph type="ftr" sz="quarter" idx="4"/>
-          </p:nvPr>
-        </p:nvSpPr>
-        <p:spPr>
-          <a:xfrm>
-            <a:off x="0" y="8685213"/>
-            <a:ext cx="2971800" cy="457200"/>
-          </a:xfrm>
-          <a:prstGeom prst="rect">
-            <a:avLst/>
-          </a:prstGeom>
-        </p:spPr>
-        <p:txBody>
-          <a:bodyPr vert="horz" lIns="91440" tIns="45720" rIns="91440" bIns="45720" rtlCol="0" anchor="b"/>
-          <a:lstStyle>
-            <a:lvl1pPr algn="l">
-              <a:defRPr sz="1200"/>
-            </a:lvl1pPr>
-          </a:lstStyle>
-          <a:p>
-            <a:endParaRPr lang="en-US"/>
-          </a:p>
-        </p:txBody>
-      </p:sp>
-      <p:sp>
-        <p:nvSpPr>
-          <p:cNvPr id="7" name="Slide Number Placeholder 6"/>
-          <p:cNvSpPr>
-            <a:spLocks noGrp="1"/>
-          </p:cNvSpPr>
-          <p:nvPr>
-            <p:ph type="sldNum" sz="quarter" idx="5"/>
-          </p:nvPr>
-        </p:nvSpPr>
-        <p:spPr>
-          <a:xfrm>
-            <a:off x="3884613" y="8685213"/>
-            <a:ext cx="2971800" cy="457200"/>
-          </a:xfrm>
-          <a:prstGeom prst="rect">
-            <a:avLst/>
-          </a:prstGeom>
-        </p:spPr>
-        <p:txBody>
-          <a:bodyPr vert="horz" lIns="91440" tIns="45720" rIns="91440" bIns="45720" rtlCol="0" anchor="b"/>
-          <a:lstStyle>
-            <a:lvl1pPr algn="r">
-              <a:defRPr sz="1200"/>
-            </a:lvl1pPr>
-          </a:lstStyle>
-          <a:p>
-            <a:fld id="{BB5E49A5-4136-284D-997B-48E1D791AD67}" type="slidenum">
-              <a:rPr lang="en-US" smtClean="0"/>
-              <a:t>‹#›</a:t>
-            </a:fld>
-            <a:endParaRPr lang="en-US"/>
-          </a:p>
-        </p:txBody>
-      </p:sp>
-    </p:spTree>
-    <p:extLst>
-      <p:ext uri="{BB962C8B-B14F-4D97-AF65-F5344CB8AC3E}">
-        <p14:creationId xmlns:p14="http://schemas.microsoft.com/office/powerpoint/2010/main" val="2623252185"/>
-      </p:ext>
-    </p:extLst>
-  </p:cSld>
-  <p:clrMap bg1="lt1" tx1="dk1" bg2="lt2" tx2="dk2" accent1="accent1" accent2="accent2" accent3="accent3" accent4="accent4" accent5="accent5" accent6="accent6" hlink="hlink" folHlink="folHlink"/>
-  <p:notesStyle>
-    <a:lvl1pPr marL="0" algn="l" defTabSz="457200" rtl="0" eaLnBrk="1" latinLnBrk="0" hangingPunct="1">
-      <a:defRPr sz="1200" kern="1200">
-        <a:solidFill>
-          <a:schemeClr val="tx1"/>
-        </a:solidFill>
-        <a:latin typeface="+mn-lt"/>
-        <a:ea typeface="+mn-ea"/>
-        <a:cs typeface="+mn-cs"/>
-      </a:defRPr>
-    </a:lvl1pPr>
-    <a:lvl2pPr marL="457200" algn="l" defTabSz="457200" rtl="0" eaLnBrk="1" latinLnBrk="0" hangingPunct="1">
-      <a:defRPr sz="1200" kern="1200">
-        <a:solidFill>
-          <a:schemeClr val="tx1"/>
-        </a:solidFill>
-        <a:latin typeface="+mn-lt"/>
-        <a:ea typeface="+mn-ea"/>
-        <a:cs typeface="+mn-cs"/>
-      </a:defRPr>
-    </a:lvl2pPr>
-    <a:lvl3pPr marL="914400" algn="l" defTabSz="457200" rtl="0" eaLnBrk="1" latinLnBrk="0" hangingPunct="1">
-      <a:defRPr sz="1200" kern="1200">
-        <a:solidFill>
-          <a:schemeClr val="tx1"/>
-        </a:solidFill>
-        <a:latin typeface="+mn-lt"/>
-        <a:ea typeface="+mn-ea"/>
-        <a:cs typeface="+mn-cs"/>
-      </a:defRPr>
-    </a:lvl3pPr>
-    <a:lvl4pPr marL="1371600" algn="l" defTabSz="457200" rtl="0" eaLnBrk="1" latinLnBrk="0" hangingPunct="1">
-      <a:defRPr sz="1200" kern="1200">
-        <a:solidFill>
-          <a:schemeClr val="tx1"/>
-        </a:solidFill>
-        <a:latin typeface="+mn-lt"/>
-        <a:ea typeface="+mn-ea"/>
-        <a:cs typeface="+mn-cs"/>
-      </a:defRPr>
-    </a:lvl4pPr>
-    <a:lvl5pPr marL="1828800" algn="l" defTabSz="457200" rtl="0" eaLnBrk="1" latinLnBrk="0" hangingPunct="1">
-      <a:defRPr sz="1200" kern="1200">
-        <a:solidFill>
-          <a:schemeClr val="tx1"/>
-        </a:solidFill>
-        <a:latin typeface="+mn-lt"/>
-        <a:ea typeface="+mn-ea"/>
-        <a:cs typeface="+mn-cs"/>
-      </a:defRPr>
-    </a:lvl5pPr>
-    <a:lvl6pPr marL="2286000" algn="l" defTabSz="457200" rtl="0" eaLnBrk="1" latinLnBrk="0" hangingPunct="1">
-      <a:defRPr sz="1200" kern="1200">
-        <a:solidFill>
-          <a:schemeClr val="tx1"/>
-        </a:solidFill>
-        <a:latin typeface="+mn-lt"/>
-        <a:ea typeface="+mn-ea"/>
-        <a:cs typeface="+mn-cs"/>
-      </a:defRPr>
-    </a:lvl6pPr>
-    <a:lvl7pPr marL="2743200" algn="l" defTabSz="457200" rtl="0" eaLnBrk="1" latinLnBrk="0" hangingPunct="1">
-      <a:defRPr sz="1200" kern="1200">
-        <a:solidFill>
-          <a:schemeClr val="tx1"/>
-        </a:solidFill>
-        <a:latin typeface="+mn-lt"/>
-        <a:ea typeface="+mn-ea"/>
-        <a:cs typeface="+mn-cs"/>
-      </a:defRPr>
-    </a:lvl7pPr>
-    <a:lvl8pPr marL="3200400" algn="l" defTabSz="457200" rtl="0" eaLnBrk="1" latinLnBrk="0" hangingPunct="1">
-      <a:defRPr sz="1200" kern="1200">
-        <a:solidFill>
-          <a:schemeClr val="tx1"/>
-        </a:solidFill>
-        <a:latin typeface="+mn-lt"/>
-        <a:ea typeface="+mn-ea"/>
-        <a:cs typeface="+mn-cs"/>
-      </a:defRPr>
-    </a:lvl8pPr>
-    <a:lvl9pPr marL="3657600" algn="l" defTabSz="457200" rtl="0" eaLnBrk="1" latinLnBrk="0" hangingPunct="1">
-      <a:defRPr sz="1200" kern="1200">
-        <a:solidFill>
-          <a:schemeClr val="tx1"/>
-        </a:solidFill>
-        <a:latin typeface="+mn-lt"/>
-        <a:ea typeface="+mn-ea"/>
-        <a:cs typeface="+mn-cs"/>
-      </a:defRPr>
-    </a:lvl9pPr>
-  </p:notesStyle>
-</p:notesMaster>
-</file>
-
-<file path=ppt/notesSlides/notesSlide1.xml><?xml version="1.0" encoding="utf-8"?>
-<p:notes xmlns:a="http://schemas.openxmlformats.org/drawingml/2006/main" xmlns:p="http://schemas.openxmlformats.org/presentationml/2006/main" xmlns:r="http://schemas.openxmlformats.org/officeDocument/2006/relationships">
-  <p:cSld>
-    <p:spTree>
-      <p:nvGrpSpPr>
-        <p:cNvPr id="1" name=""/>
-        <p:cNvGrpSpPr/>
-        <p:nvPr/>
-      </p:nvGrpSpPr>
-      <p:grpSpPr>
-        <a:xfrm>
-          <a:off x="0" y="0"/>
-          <a:ext cx="0" cy="0"/>
-          <a:chOff x="0" y="0"/>
-          <a:chExt cx="0" cy="0"/>
-        </a:xfrm>
-      </p:grpSpPr>
-      <p:sp>
-        <p:nvSpPr>
-          <p:cNvPr id="2" name="Slide Image Placeholder 1"/>
-          <p:cNvSpPr>
-            <a:spLocks noGrp="1"/>
-          </p:cNvSpPr>
-          <p:nvPr>
-            <p:ph type="sldImg" idx="2"/>
-          </p:nvPr>
-        </p:nvSpPr>
-        <p:spPr/>
-      </p:sp>
-      <p:sp>
-        <p:nvSpPr>
-          <p:cNvPr id="3" name="Notes Placeholder 2"/>
-          <p:cNvSpPr>
-            <a:spLocks noGrp="1"/>
-          </p:cNvSpPr>
-          <p:nvPr>
-            <p:ph type="body" idx="3" sz="quarter"/>
-          </p:nvPr>
-        </p:nvSpPr>
-        <p:spPr/>
-        <p:txBody>
-          <a:bodyPr/>
-          <a:lstStyle/>
-          <a:p>
-            <a:r>
-              <a:t>TIEMPO: 0:00 - 0:20 (20 segundos)</a:t>
-            </a:r>
-          </a:p>
-          <a:p>
-            <a:r>
-              <a:t>GUIÓN DE APERTURA:</a:t>
-            </a:r>
-          </a:p>
-          <a:p>
-            <a:r>
-              <a:t>"A finales del siglo XIX, la física clásica era considerada prácticamente completa. Sin embargo, un problema aparentemente simple — ¿cómo emite luz un objeto caliente? — reveló una contradicción tan grave que destruyó los fundamentos clásicos. Hoy veremos ese problema, por qué la solución clásica fue catastrófica, y cómo Max Planck propuso en 1900 una idea revolucionaria: que la energía no puede tomar cualquier valor continuo."</a:t>
-            </a:r>
-          </a:p>
-        </p:txBody>
-      </p:sp>
-      <p:sp>
-        <p:nvSpPr>
-          <p:cNvPr id="4" name="Slide Number Placeholder 3"/>
-          <p:cNvSpPr>
-            <a:spLocks noGrp="1"/>
-          </p:cNvSpPr>
-          <p:nvPr>
-            <p:ph type="sldNum" idx="5" sz="quarter"/>
-          </p:nvPr>
-        </p:nvSpPr>
-        <p:spPr/>
-      </p:sp>
-    </p:spTree>
-  </p:cSld>
-  <p:clrMapOvr>
-    <a:masterClrMapping/>
-  </p:clrMapOvr>
-</p:notes>
-</file>
-
-<file path=ppt/notesSlides/notesSlide2.xml><?xml version="1.0" encoding="utf-8"?>
-<p:notes xmlns:a="http://schemas.openxmlformats.org/drawingml/2006/main" xmlns:p="http://schemas.openxmlformats.org/presentationml/2006/main" xmlns:r="http://schemas.openxmlformats.org/officeDocument/2006/relationships">
-  <p:cSld>
-    <p:spTree>
-      <p:nvGrpSpPr>
-        <p:cNvPr id="1" name=""/>
-        <p:cNvGrpSpPr/>
-        <p:nvPr/>
-      </p:nvGrpSpPr>
-      <p:grpSpPr>
-        <a:xfrm>
-          <a:off x="0" y="0"/>
-          <a:ext cx="0" cy="0"/>
-          <a:chOff x="0" y="0"/>
-          <a:chExt cx="0" cy="0"/>
-        </a:xfrm>
-      </p:grpSpPr>
-      <p:sp>
-        <p:nvSpPr>
-          <p:cNvPr id="2" name="Slide Image Placeholder 1"/>
-          <p:cNvSpPr>
-            <a:spLocks noGrp="1"/>
-          </p:cNvSpPr>
-          <p:nvPr>
-            <p:ph type="sldImg" idx="2"/>
-          </p:nvPr>
-        </p:nvSpPr>
-        <p:spPr/>
-      </p:sp>
-      <p:sp>
-        <p:nvSpPr>
-          <p:cNvPr id="3" name="Notes Placeholder 2"/>
-          <p:cNvSpPr>
-            <a:spLocks noGrp="1"/>
-          </p:cNvSpPr>
-          <p:nvPr>
-            <p:ph type="body" idx="3" sz="quarter"/>
-          </p:nvPr>
-        </p:nvSpPr>
-        <p:spPr/>
-        <p:txBody>
-          <a:bodyPr/>
-          <a:lstStyle/>
-          <a:p>
-            <a:r>
-              <a:t>TIEMPO: 0:20 - 1:20 (60 segundos)</a:t>
-            </a:r>
-          </a:p>
-          <a:p>
-            <a:r>
-              <a:t>GUIÓN DE EXPOSICIÓN:</a:t>
-            </a:r>
-          </a:p>
-          <a:p>
-            <a:r>
-              <a:t>"Un cuerpo negro ideal es un objeto que absorbe el 100% de la radiación recibida y la re-emite de forma pura según su temperatura. La cavidad con un pequeño orificio es la mejor aproximación experimental.</a:t>
-            </a:r>
-          </a:p>
-          <a:p>
-            <a:r>
-              <a:t>Al calentar el cuerpo, la emisión forma una curva de campana cuyo máximo se desplaza a longitudes de onda más cortas según la Ley de Wien (λ_max·T = b). Un hierro brilla rojo; el Sol a ~5800K emite en el visible.</a:t>
-            </a:r>
-          </a:p>
-          <a:p>
-            <a:r>
-              <a:t>Para entenderlo desde la Teledetección: imagina un radiómetro multiespectral aerotransportado midiendo la radiancia de una superficie. Los sensores reales como Landsat o Sentinel-2 registran que la señal cae en el UV, pero la física clásica no lograba explicar este corte."</a:t>
-            </a:r>
-          </a:p>
-        </p:txBody>
-      </p:sp>
-      <p:sp>
-        <p:nvSpPr>
-          <p:cNvPr id="4" name="Slide Number Placeholder 3"/>
-          <p:cNvSpPr>
-            <a:spLocks noGrp="1"/>
-          </p:cNvSpPr>
-          <p:nvPr>
-            <p:ph type="sldNum" idx="5" sz="quarter"/>
-          </p:nvPr>
-        </p:nvSpPr>
-        <p:spPr/>
-      </p:sp>
-    </p:spTree>
-  </p:cSld>
-  <p:clrMapOvr>
-    <a:masterClrMapping/>
-  </p:clrMapOvr>
-</p:notes>
-</file>
-
-<file path=ppt/notesSlides/notesSlide3.xml><?xml version="1.0" encoding="utf-8"?>
-<p:notes xmlns:a="http://schemas.openxmlformats.org/drawingml/2006/main" xmlns:p="http://schemas.openxmlformats.org/presentationml/2006/main" xmlns:r="http://schemas.openxmlformats.org/officeDocument/2006/relationships">
-  <p:cSld>
-    <p:spTree>
-      <p:nvGrpSpPr>
-        <p:cNvPr id="1" name=""/>
-        <p:cNvGrpSpPr/>
-        <p:nvPr/>
-      </p:nvGrpSpPr>
-      <p:grpSpPr>
-        <a:xfrm>
-          <a:off x="0" y="0"/>
-          <a:ext cx="0" cy="0"/>
-          <a:chOff x="0" y="0"/>
-          <a:chExt cx="0" cy="0"/>
-        </a:xfrm>
-      </p:grpSpPr>
-      <p:sp>
-        <p:nvSpPr>
-          <p:cNvPr id="2" name="Slide Image Placeholder 1"/>
-          <p:cNvSpPr>
-            <a:spLocks noGrp="1"/>
-          </p:cNvSpPr>
-          <p:nvPr>
-            <p:ph type="sldImg" idx="2"/>
-          </p:nvPr>
-        </p:nvSpPr>
-        <p:spPr/>
-      </p:sp>
-      <p:sp>
-        <p:nvSpPr>
-          <p:cNvPr id="3" name="Notes Placeholder 2"/>
-          <p:cNvSpPr>
-            <a:spLocks noGrp="1"/>
-          </p:cNvSpPr>
-          <p:nvPr>
-            <p:ph type="body" idx="3" sz="quarter"/>
-          </p:nvPr>
-        </p:nvSpPr>
-        <p:spPr/>
-        <p:txBody>
-          <a:bodyPr/>
-          <a:lstStyle/>
-          <a:p>
-            <a:r>
-              <a:t>TIEMPO: 1:20 - 2:35 (75 segundos)</a:t>
-            </a:r>
-          </a:p>
-          <a:p>
-            <a:r>
-              <a:t>GUIÓN DE EXPOSICIÓN:</a:t>
-            </a:r>
-          </a:p>
-          <a:p>
-            <a:r>
-              <a:t>"Lord Rayleigh y James Jeans aplicaron el teorema de equipartición: cada modo oscilatorio tiene energía promedio k_B·T. Como el número de modos crece proporcionalmente a f², la densidad de energía resulta W(f) = (8πf²/c³)·k_B·T.</a:t>
-            </a:r>
-          </a:p>
-          <a:p>
-            <a:r>
-              <a:t>Esta fórmula funciona en frecuencias bajas (infrarrojo), pero en el ultravioleta predice que la energía se dispara al infinito.</a:t>
-            </a:r>
-          </a:p>
-          <a:p>
-            <a:r>
-              <a:t>Esto fue bautizado por Paul Ehrenfest en 1911 como la Catástrofe del Ultravioleta. No era un error numérico, sino una consecuencia directa e inevitable de la física clásica: predecía que un simple horno encendido emitiría energía infinita en el UV. La física clásica había entrado en una crisis insostenible."</a:t>
-            </a:r>
-          </a:p>
-        </p:txBody>
-      </p:sp>
-      <p:sp>
-        <p:nvSpPr>
-          <p:cNvPr id="4" name="Slide Number Placeholder 3"/>
-          <p:cNvSpPr>
-            <a:spLocks noGrp="1"/>
-          </p:cNvSpPr>
-          <p:nvPr>
-            <p:ph type="sldNum" idx="5" sz="quarter"/>
-          </p:nvPr>
-        </p:nvSpPr>
-        <p:spPr/>
-      </p:sp>
-    </p:spTree>
-  </p:cSld>
-  <p:clrMapOvr>
-    <a:masterClrMapping/>
-  </p:clrMapOvr>
-</p:notes>
-</file>
-
-<file path=ppt/notesSlides/notesSlide4.xml><?xml version="1.0" encoding="utf-8"?>
-<p:notes xmlns:a="http://schemas.openxmlformats.org/drawingml/2006/main" xmlns:p="http://schemas.openxmlformats.org/presentationml/2006/main" xmlns:r="http://schemas.openxmlformats.org/officeDocument/2006/relationships">
-  <p:cSld>
-    <p:spTree>
-      <p:nvGrpSpPr>
-        <p:cNvPr id="1" name=""/>
-        <p:cNvGrpSpPr/>
-        <p:nvPr/>
-      </p:nvGrpSpPr>
-      <p:grpSpPr>
-        <a:xfrm>
-          <a:off x="0" y="0"/>
-          <a:ext cx="0" cy="0"/>
-          <a:chOff x="0" y="0"/>
-          <a:chExt cx="0" cy="0"/>
-        </a:xfrm>
-      </p:grpSpPr>
-      <p:sp>
-        <p:nvSpPr>
-          <p:cNvPr id="2" name="Slide Image Placeholder 1"/>
-          <p:cNvSpPr>
-            <a:spLocks noGrp="1"/>
-          </p:cNvSpPr>
-          <p:nvPr>
-            <p:ph type="sldImg" idx="2"/>
-          </p:nvPr>
-        </p:nvSpPr>
-        <p:spPr/>
-      </p:sp>
-      <p:sp>
-        <p:nvSpPr>
-          <p:cNvPr id="3" name="Notes Placeholder 2"/>
-          <p:cNvSpPr>
-            <a:spLocks noGrp="1"/>
-          </p:cNvSpPr>
-          <p:nvPr>
-            <p:ph type="body" idx="3" sz="quarter"/>
-          </p:nvPr>
-        </p:nvSpPr>
-        <p:spPr/>
-        <p:txBody>
-          <a:bodyPr/>
-          <a:lstStyle/>
-          <a:p>
-            <a:r>
-              <a:t>TIEMPO: 2:35 - 4:05 (90 segundos)</a:t>
-            </a:r>
-          </a:p>
-          <a:p>
-            <a:r>
-              <a:t>GUIÓN DE EXPOSICIÓN:</a:t>
-            </a:r>
-          </a:p>
-          <a:p>
-            <a:r>
-              <a:t>"En diciembre de 1900, Max Planck propuso una solución radical: los osciladores no pueden intercambiar energía de forma continua, sino únicamente en paquetes discretos E = n·h·f, donde h es la constante de Planck (6.626×10⁻³⁴ J·s).</a:t>
-            </a:r>
-          </a:p>
-          <a:p>
-            <a:r>
-              <a:t>La energía promedio cuántica resulta ⟨E⟩ = hf / (e^(hf/k_BT) - 1). A altas frecuencias, cuando hf &gt;&gt; k_B·T, el denominador exponencial crece tan rápido que la emisión cae a cero. La catástrofe se elimina naturalmente porque la temperatura disponible no alcanza para activar los cuantos UV.</a:t>
-            </a:r>
-          </a:p>
-          <a:p>
-            <a:r>
-              <a:t>Para entenderlo desde la Teledetección: es como la digitalización radiométrica en un sensor (DN en Sentinel-2). La señal continua se convierte en valores discretos: no hay DN 127.5. A alta frecuencia, el peldaño hf es tan grande que equivale a intentar registrar 0.001 DN en un sensor de 8 bits: la resolución no alcanza y la señal se corta."</a:t>
-            </a:r>
-          </a:p>
-        </p:txBody>
-      </p:sp>
-      <p:sp>
-        <p:nvSpPr>
-          <p:cNvPr id="4" name="Slide Number Placeholder 3"/>
-          <p:cNvSpPr>
-            <a:spLocks noGrp="1"/>
-          </p:cNvSpPr>
-          <p:nvPr>
-            <p:ph type="sldNum" idx="5" sz="quarter"/>
-          </p:nvPr>
-        </p:nvSpPr>
-        <p:spPr/>
-      </p:sp>
-    </p:spTree>
-  </p:cSld>
-  <p:clrMapOvr>
-    <a:masterClrMapping/>
-  </p:clrMapOvr>
-</p:notes>
-</file>
-
-<file path=ppt/notesSlides/notesSlide5.xml><?xml version="1.0" encoding="utf-8"?>
-<p:notes xmlns:a="http://schemas.openxmlformats.org/drawingml/2006/main" xmlns:p="http://schemas.openxmlformats.org/presentationml/2006/main" xmlns:r="http://schemas.openxmlformats.org/officeDocument/2006/relationships">
-  <p:cSld>
-    <p:spTree>
-      <p:nvGrpSpPr>
-        <p:cNvPr id="1" name=""/>
-        <p:cNvGrpSpPr/>
-        <p:nvPr/>
-      </p:nvGrpSpPr>
-      <p:grpSpPr>
-        <a:xfrm>
-          <a:off x="0" y="0"/>
-          <a:ext cx="0" cy="0"/>
-          <a:chOff x="0" y="0"/>
-          <a:chExt cx="0" cy="0"/>
-        </a:xfrm>
-      </p:grpSpPr>
-      <p:sp>
-        <p:nvSpPr>
-          <p:cNvPr id="2" name="Slide Image Placeholder 1"/>
-          <p:cNvSpPr>
-            <a:spLocks noGrp="1"/>
-          </p:cNvSpPr>
-          <p:nvPr>
-            <p:ph type="sldImg" idx="2"/>
-          </p:nvPr>
-        </p:nvSpPr>
-        <p:spPr/>
-      </p:sp>
-      <p:sp>
-        <p:nvSpPr>
-          <p:cNvPr id="3" name="Notes Placeholder 2"/>
-          <p:cNvSpPr>
-            <a:spLocks noGrp="1"/>
-          </p:cNvSpPr>
-          <p:nvPr>
-            <p:ph type="body" idx="3" sz="quarter"/>
-          </p:nvPr>
-        </p:nvSpPr>
-        <p:spPr/>
-        <p:txBody>
-          <a:bodyPr/>
-          <a:lstStyle/>
-          <a:p>
-            <a:r>
-              <a:t>TIEMPO: 4:05 - 4:40 (35 segundos)</a:t>
-            </a:r>
-          </a:p>
-          <a:p>
-            <a:r>
-              <a:t>GUIÓN DE CIERRE:</a:t>
-            </a:r>
-          </a:p>
-          <a:p>
-            <a:r>
-              <a:t>"Planck no buscaba revolucionar la física: él mismo describió su hipótesis como 'un acto de desesperación'. Sin embargo, al postular que la energía se intercambia en paquetes discretos E = n·h·f, abrió la puerta a un cambio de paradigma que hoy sustenta desde los semiconductores hasta los láseres y los sensores multiespectrales satelitales.</a:t>
-            </a:r>
-          </a:p>
-          <a:p>
-            <a:r>
-              <a:t>La catástrofe ultravioleta no fue una falla menor — fue la grieta por donde entró toda la física cuántica contemporánea."</a:t>
-            </a:r>
-          </a:p>
-        </p:txBody>
-      </p:sp>
-      <p:sp>
-        <p:nvSpPr>
-          <p:cNvPr id="4" name="Slide Number Placeholder 3"/>
-          <p:cNvSpPr>
-            <a:spLocks noGrp="1"/>
-          </p:cNvSpPr>
-          <p:nvPr>
-            <p:ph type="sldNum" idx="5" sz="quarter"/>
-          </p:nvPr>
-        </p:nvSpPr>
-        <p:spPr/>
-      </p:sp>
-    </p:spTree>
-  </p:cSld>
-  <p:clrMapOvr>
-    <a:masterClrMapping/>
-  </p:clrMapOvr>
-</p:notes>
 </file>
 
 <file path=ppt/slideLayouts/slideLayout1.xml><?xml version="1.0" encoding="utf-8"?>
@@ -3873,7 +3088,7 @@
     <p:bg>
       <p:bgPr>
         <a:solidFill>
-          <a:srgbClr val="0F172A"/>
+          <a:srgbClr val="0D1B2A"/>
         </a:solidFill>
         <a:effectLst/>
       </p:bgPr>
@@ -3887,25 +3102,23 @@
       <p:grpSpPr/>
       <p:sp>
         <p:nvSpPr>
-          <p:cNvPr id="2" name="Rounded Rectangle 1"/>
+          <p:cNvPr id="2" name="Rectangle 1"/>
           <p:cNvSpPr/>
           <p:nvPr/>
         </p:nvSpPr>
         <p:spPr>
           <a:xfrm>
-            <a:off x="1371600" y="1097280"/>
-            <a:ext cx="9448495" cy="4663440"/>
-          </a:xfrm>
-          <a:prstGeom prst="roundRect">
+            <a:off x="0" y="0"/>
+            <a:ext cx="12188952" cy="73152"/>
+          </a:xfrm>
+          <a:prstGeom prst="rect">
             <a:avLst/>
           </a:prstGeom>
           <a:solidFill>
-            <a:srgbClr val="1E293B"/>
+            <a:srgbClr val="00C8FF"/>
           </a:solidFill>
-          <a:ln w="25400">
-            <a:solidFill>
-              <a:srgbClr val="38BDF8"/>
-            </a:solidFill>
+          <a:ln>
+            <a:noFill/>
           </a:ln>
         </p:spPr>
         <p:style>
@@ -3930,16 +3143,40 @@
           </a:p>
         </p:txBody>
       </p:sp>
-      <p:sp>
-        <p:nvSpPr>
-          <p:cNvPr id="3" name="TextBox 2"/>
+      <p:pic>
+        <p:nvPicPr>
+          <p:cNvPr id="3" name="Picture 2" descr="chart_blackbody.png"/>
+          <p:cNvPicPr>
+            <a:picLocks noChangeAspect="1"/>
+          </p:cNvPicPr>
+          <p:nvPr/>
+        </p:nvPicPr>
+        <p:blipFill>
+          <a:blip r:embed="rId2"/>
+          <a:stretch>
+            <a:fillRect/>
+          </a:stretch>
+        </p:blipFill>
+        <p:spPr>
+          <a:xfrm>
+            <a:off x="6217920" y="914400"/>
+            <a:ext cx="5669280" cy="3291840"/>
+          </a:xfrm>
+          <a:prstGeom prst="rect">
+            <a:avLst/>
+          </a:prstGeom>
+        </p:spPr>
+      </p:pic>
+      <p:sp>
+        <p:nvSpPr>
+          <p:cNvPr id="4" name="TextBox 3"/>
           <p:cNvSpPr txBox="1"/>
           <p:nvPr/>
         </p:nvSpPr>
         <p:spPr>
           <a:xfrm>
-            <a:off x="1645920" y="1463040"/>
-            <a:ext cx="8899855" cy="3931920"/>
+            <a:off x="457200" y="914400"/>
+            <a:ext cx="5669280" cy="1097280"/>
           </a:xfrm>
           <a:prstGeom prst="rect">
             <a:avLst/>
@@ -3951,73 +3188,329 @@
             <a:spAutoFit/>
           </a:bodyPr>
           <a:lstStyle/>
-          <a:p>
-            <a:pPr>
-              <a:spcAft>
-                <a:spcPts val="1400"/>
-              </a:spcAft>
-              <a:defRPr sz="1200" b="1">
-                <a:solidFill>
-                  <a:srgbClr val="38BDF8"/>
-                </a:solidFill>
-              </a:defRPr>
-            </a:pPr>
-            <a:r>
-              <a:t>DIPLOMADO EN FÍSICA MODERNA — EVALUACIÓN 1</a:t>
-            </a:r>
-          </a:p>
-          <a:p>
-            <a:pPr>
-              <a:spcAft>
-                <a:spcPts val="1000"/>
-              </a:spcAft>
-              <a:defRPr sz="3200" b="1">
-                <a:solidFill>
-                  <a:srgbClr val="F8FAFC"/>
-                </a:solidFill>
-              </a:defRPr>
-            </a:pPr>
-            <a:r>
-              <a:t>El Cuerpo Negro y la Revolución de Planck</a:t>
-            </a:r>
-          </a:p>
-          <a:p>
-            <a:pPr>
-              <a:spcAft>
-                <a:spcPts val="2800"/>
-              </a:spcAft>
-              <a:defRPr sz="1800">
-                <a:solidFill>
-                  <a:srgbClr val="CBD5E1"/>
-                </a:solidFill>
-              </a:defRPr>
-            </a:pPr>
-            <a:r>
-              <a:t>De la crisis del paradigma clásico al nacimiento de la Física Cuántica</a:t>
-            </a:r>
-          </a:p>
-          <a:p>
-            <a:pPr>
-              <a:lnSpc>
-                <a:spcPct val="130000"/>
-              </a:lnSpc>
-              <a:defRPr sz="1300">
-                <a:solidFill>
-                  <a:srgbClr val="CBD5E1"/>
-                </a:solidFill>
-              </a:defRPr>
-            </a:pPr>
-            <a:r>
+          <a:p/>
+          <a:p>
+            <a:pPr algn="l"/>
+            <a:r>
+              <a:rPr sz="3800" b="1" i="0">
+                <a:solidFill>
+                  <a:srgbClr val="00C8FF"/>
+                </a:solidFill>
+              </a:rPr>
+              <a:t>El Cuerpo Negro</a:t>
+            </a:r>
+          </a:p>
+        </p:txBody>
+      </p:sp>
+      <p:sp>
+        <p:nvSpPr>
+          <p:cNvPr id="5" name="TextBox 4"/>
+          <p:cNvSpPr txBox="1"/>
+          <p:nvPr/>
+        </p:nvSpPr>
+        <p:spPr>
+          <a:xfrm>
+            <a:off x="457200" y="1965960"/>
+            <a:ext cx="5669280" cy="731520"/>
+          </a:xfrm>
+          <a:prstGeom prst="rect">
+            <a:avLst/>
+          </a:prstGeom>
+          <a:noFill/>
+        </p:spPr>
+        <p:txBody>
+          <a:bodyPr wrap="square">
+            <a:spAutoFit/>
+          </a:bodyPr>
+          <a:lstStyle/>
+          <a:p/>
+          <a:p>
+            <a:pPr algn="l"/>
+            <a:r>
+              <a:rPr sz="2800" b="1" i="0">
+                <a:solidFill>
+                  <a:srgbClr val="FFFFFF"/>
+                </a:solidFill>
+              </a:rPr>
+              <a:t>y la Revolución de Planck</a:t>
+            </a:r>
+          </a:p>
+        </p:txBody>
+      </p:sp>
+      <p:sp>
+        <p:nvSpPr>
+          <p:cNvPr id="6" name="TextBox 5"/>
+          <p:cNvSpPr txBox="1"/>
+          <p:nvPr/>
+        </p:nvSpPr>
+        <p:spPr>
+          <a:xfrm>
+            <a:off x="457200" y="2834640"/>
+            <a:ext cx="5669280" cy="640080"/>
+          </a:xfrm>
+          <a:prstGeom prst="rect">
+            <a:avLst/>
+          </a:prstGeom>
+          <a:noFill/>
+        </p:spPr>
+        <p:txBody>
+          <a:bodyPr wrap="square">
+            <a:spAutoFit/>
+          </a:bodyPr>
+          <a:lstStyle/>
+          <a:p/>
+          <a:p>
+            <a:pPr algn="l"/>
+            <a:r>
+              <a:rPr sz="1400" b="0" i="1">
+                <a:solidFill>
+                  <a:srgbClr val="AAAABB"/>
+                </a:solidFill>
+              </a:rPr>
+              <a:t>De la crisis del paradigma clásico
+al nacimiento de la Física Cuántica</a:t>
+            </a:r>
+          </a:p>
+        </p:txBody>
+      </p:sp>
+      <p:sp>
+        <p:nvSpPr>
+          <p:cNvPr id="7" name="Rectangle 6"/>
+          <p:cNvSpPr/>
+          <p:nvPr/>
+        </p:nvSpPr>
+        <p:spPr>
+          <a:xfrm>
+            <a:off x="457200" y="3657600"/>
+            <a:ext cx="4114800" cy="27432"/>
+          </a:xfrm>
+          <a:prstGeom prst="rect">
+            <a:avLst/>
+          </a:prstGeom>
+          <a:solidFill>
+            <a:srgbClr val="00C8FF"/>
+          </a:solidFill>
+          <a:ln>
+            <a:noFill/>
+          </a:ln>
+        </p:spPr>
+        <p:style>
+          <a:lnRef idx="1">
+            <a:schemeClr val="accent1"/>
+          </a:lnRef>
+          <a:fillRef idx="3">
+            <a:schemeClr val="accent1"/>
+          </a:fillRef>
+          <a:effectRef idx="2">
+            <a:schemeClr val="accent1"/>
+          </a:effectRef>
+          <a:fontRef idx="minor">
+            <a:schemeClr val="lt1"/>
+          </a:fontRef>
+        </p:style>
+        <p:txBody>
+          <a:bodyPr rtlCol="0" anchor="ctr"/>
+          <a:lstStyle/>
+          <a:p>
+            <a:pPr algn="ctr"/>
+          </a:p>
+        </p:txBody>
+      </p:sp>
+      <p:sp>
+        <p:nvSpPr>
+          <p:cNvPr id="8" name="Rectangle 7"/>
+          <p:cNvSpPr/>
+          <p:nvPr/>
+        </p:nvSpPr>
+        <p:spPr>
+          <a:xfrm>
+            <a:off x="457200" y="3886200"/>
+            <a:ext cx="5029200" cy="1828800"/>
+          </a:xfrm>
+          <a:prstGeom prst="rect">
+            <a:avLst/>
+          </a:prstGeom>
+          <a:solidFill>
+            <a:srgbClr val="122033"/>
+          </a:solidFill>
+          <a:ln>
+            <a:noFill/>
+          </a:ln>
+        </p:spPr>
+        <p:style>
+          <a:lnRef idx="1">
+            <a:schemeClr val="accent1"/>
+          </a:lnRef>
+          <a:fillRef idx="3">
+            <a:schemeClr val="accent1"/>
+          </a:fillRef>
+          <a:effectRef idx="2">
+            <a:schemeClr val="accent1"/>
+          </a:effectRef>
+          <a:fontRef idx="minor">
+            <a:schemeClr val="lt1"/>
+          </a:fontRef>
+        </p:style>
+        <p:txBody>
+          <a:bodyPr rtlCol="0" anchor="ctr"/>
+          <a:lstStyle/>
+          <a:p>
+            <a:pPr algn="ctr"/>
+          </a:p>
+        </p:txBody>
+      </p:sp>
+      <p:sp>
+        <p:nvSpPr>
+          <p:cNvPr id="9" name="TextBox 8"/>
+          <p:cNvSpPr txBox="1"/>
+          <p:nvPr/>
+        </p:nvSpPr>
+        <p:spPr>
+          <a:xfrm>
+            <a:off x="640080" y="3977639"/>
+            <a:ext cx="4663440" cy="1645920"/>
+          </a:xfrm>
+          <a:prstGeom prst="rect">
+            <a:avLst/>
+          </a:prstGeom>
+          <a:noFill/>
+        </p:spPr>
+        <p:txBody>
+          <a:bodyPr wrap="square">
+            <a:spAutoFit/>
+          </a:bodyPr>
+          <a:lstStyle/>
+          <a:p/>
+          <a:p>
+            <a:pPr algn="l"/>
+            <a:r>
+              <a:rPr sz="1100" b="0" i="0">
+                <a:solidFill>
+                  <a:srgbClr val="FFFFFF"/>
+                </a:solidFill>
+              </a:rPr>
               <a:t>• Formato: Exposición oral en video (5 minutos max.)</a:t>
             </a:r>
-            <a:br/>
-            <a:r>
-              <a:t>• Enfoque pedagógico: Aplicaciones y analogías en Geomática y Teledetección</a:t>
-            </a:r>
-            <a:br/>
-            <a:r>
-              <a:t>• Tópicos: Radiación Térmica | Catástrofe Ultravioleta | Cuantización de Planck</a:t>
-            </a:r>
+          </a:p>
+          <a:p>
+            <a:pPr algn="l"/>
+            <a:r>
+              <a:rPr sz="1100" b="0" i="0">
+                <a:solidFill>
+                  <a:srgbClr val="FFFFFF"/>
+                </a:solidFill>
+              </a:rPr>
+              <a:t>• Enfoque pedagógico: Analogías en Geomática</a:t>
+            </a:r>
+          </a:p>
+          <a:p>
+            <a:pPr algn="l"/>
+            <a:r>
+              <a:rPr sz="1100" b="0" i="0">
+                <a:solidFill>
+                  <a:srgbClr val="7BFFC4"/>
+                </a:solidFill>
+              </a:rPr>
+              <a:t>  y Teledetección</a:t>
+            </a:r>
+          </a:p>
+          <a:p>
+            <a:pPr algn="l"/>
+            <a:r>
+              <a:rPr sz="1100" b="0" i="0">
+                <a:solidFill>
+                  <a:srgbClr val="FFFFFF"/>
+                </a:solidFill>
+              </a:rPr>
+              <a:t>• Tópicos: Radiación Térmica | Catástrofe UV</a:t>
+            </a:r>
+          </a:p>
+          <a:p>
+            <a:pPr algn="l"/>
+            <a:r>
+              <a:rPr sz="1100" b="0" i="0">
+                <a:solidFill>
+                  <a:srgbClr val="FFFFFF"/>
+                </a:solidFill>
+              </a:rPr>
+              <a:t>  | Cuantización de Planck</a:t>
+            </a:r>
+          </a:p>
+          <a:p>
+            <a:pPr algn="l"/>
+            <a:r>
+              <a:rPr sz="400" b="0" i="0">
+                <a:solidFill>
+                  <a:srgbClr val="FFFFFF"/>
+                </a:solidFill>
+              </a:rPr>
+              <a:t/>
+            </a:r>
+          </a:p>
+          <a:p>
+            <a:pPr algn="l"/>
+            <a:r>
+              <a:rPr sz="1000" b="0" i="0">
+                <a:solidFill>
+                  <a:srgbClr val="AAAABB"/>
+                </a:solidFill>
+              </a:rPr>
+              <a:t>Evaluación 1 — Teoría Cuántica Temprana</a:t>
+            </a:r>
+          </a:p>
+          <a:p>
+            <a:pPr algn="l"/>
+            <a:r>
+              <a:rPr sz="1000" b="0" i="0">
+                <a:solidFill>
+                  <a:srgbClr val="AAAABB"/>
+                </a:solidFill>
+              </a:rPr>
+              <a:t>Docentes: Pablo Solano · Paulraj Manidurai · 2026</a:t>
+            </a:r>
+          </a:p>
+        </p:txBody>
+      </p:sp>
+      <p:sp>
+        <p:nvSpPr>
+          <p:cNvPr id="10" name="Rectangle 9"/>
+          <p:cNvSpPr/>
+          <p:nvPr/>
+        </p:nvSpPr>
+        <p:spPr>
+          <a:xfrm>
+            <a:off x="0" y="6693408"/>
+            <a:ext cx="12188952" cy="164592"/>
+          </a:xfrm>
+          <a:prstGeom prst="rect">
+            <a:avLst/>
+          </a:prstGeom>
+          <a:solidFill>
+            <a:srgbClr val="00C8FF"/>
+          </a:solidFill>
+          <a:ln>
+            <a:noFill/>
+          </a:ln>
+        </p:spPr>
+        <p:style>
+          <a:lnRef idx="1">
+            <a:schemeClr val="accent1"/>
+          </a:lnRef>
+          <a:fillRef idx="3">
+            <a:schemeClr val="accent1"/>
+          </a:fillRef>
+          <a:effectRef idx="2">
+            <a:schemeClr val="accent1"/>
+          </a:effectRef>
+          <a:fontRef idx="minor">
+            <a:schemeClr val="lt1"/>
+          </a:fontRef>
+        </p:style>
+        <p:txBody>
+          <a:bodyPr rtlCol="0" anchor="ctr"/>
+          <a:lstStyle/>
+          <a:p>
+            <a:pPr algn="ctr"/>
           </a:p>
         </p:txBody>
       </p:sp>
@@ -4035,7 +3528,7 @@
     <p:bg>
       <p:bgPr>
         <a:solidFill>
-          <a:srgbClr val="0F172A"/>
+          <a:srgbClr val="0D1B2A"/>
         </a:solidFill>
         <a:effectLst/>
       </p:bgPr>
@@ -4049,95 +3542,23 @@
       <p:grpSpPr/>
       <p:sp>
         <p:nvSpPr>
-          <p:cNvPr id="2" name="TextBox 1"/>
-          <p:cNvSpPr txBox="1"/>
-          <p:nvPr/>
-        </p:nvSpPr>
-        <p:spPr>
-          <a:xfrm>
-            <a:off x="731520" y="365760"/>
-            <a:ext cx="10698480" cy="365760"/>
-          </a:xfrm>
-          <a:prstGeom prst="rect">
-            <a:avLst/>
-          </a:prstGeom>
-          <a:noFill/>
-        </p:spPr>
-        <p:txBody>
-          <a:bodyPr wrap="square">
-            <a:spAutoFit/>
-          </a:bodyPr>
-          <a:lstStyle/>
-          <a:p>
-            <a:pPr>
-              <a:defRPr sz="1000" b="1">
-                <a:solidFill>
-                  <a:srgbClr val="38BDF8"/>
-                </a:solidFill>
-              </a:defRPr>
-            </a:pPr>
-            <a:r>
-              <a:t>DIPLOMADO EN FÍSICA MODERNA — EVALUACIÓN 1</a:t>
-            </a:r>
-          </a:p>
-        </p:txBody>
-      </p:sp>
-      <p:sp>
-        <p:nvSpPr>
-          <p:cNvPr id="3" name="TextBox 2"/>
-          <p:cNvSpPr txBox="1"/>
-          <p:nvPr/>
-        </p:nvSpPr>
-        <p:spPr>
-          <a:xfrm>
-            <a:off x="731520" y="640080"/>
-            <a:ext cx="10698480" cy="731520"/>
-          </a:xfrm>
-          <a:prstGeom prst="rect">
-            <a:avLst/>
-          </a:prstGeom>
-          <a:noFill/>
-        </p:spPr>
-        <p:txBody>
-          <a:bodyPr wrap="square">
-            <a:spAutoFit/>
-          </a:bodyPr>
-          <a:lstStyle/>
-          <a:p>
-            <a:pPr>
-              <a:defRPr sz="2400" b="1">
-                <a:solidFill>
-                  <a:srgbClr val="F8FAFC"/>
-                </a:solidFill>
-              </a:defRPr>
-            </a:pPr>
-            <a:r>
-              <a:t>1. La Radiación del Cuerpo Negro e Incapacidad Clásica</a:t>
-            </a:r>
-          </a:p>
-        </p:txBody>
-      </p:sp>
-      <p:sp>
-        <p:nvSpPr>
-          <p:cNvPr id="4" name="Rounded Rectangle 3"/>
+          <p:cNvPr id="2" name="Rectangle 1"/>
           <p:cNvSpPr/>
           <p:nvPr/>
         </p:nvSpPr>
         <p:spPr>
           <a:xfrm>
-            <a:off x="731520" y="1463040"/>
-            <a:ext cx="5486400" cy="4846320"/>
-          </a:xfrm>
-          <a:prstGeom prst="roundRect">
+            <a:off x="0" y="0"/>
+            <a:ext cx="12188952" cy="73152"/>
+          </a:xfrm>
+          <a:prstGeom prst="rect">
             <a:avLst/>
           </a:prstGeom>
           <a:solidFill>
-            <a:srgbClr val="1E293B"/>
+            <a:srgbClr val="00C8FF"/>
           </a:solidFill>
           <a:ln>
-            <a:solidFill>
-              <a:srgbClr val="475569"/>
-            </a:solidFill>
+            <a:noFill/>
           </a:ln>
         </p:spPr>
         <p:style>
@@ -4164,14 +3585,14 @@
       </p:sp>
       <p:sp>
         <p:nvSpPr>
-          <p:cNvPr id="5" name="TextBox 4"/>
+          <p:cNvPr id="3" name="TextBox 2"/>
           <p:cNvSpPr txBox="1"/>
           <p:nvPr/>
         </p:nvSpPr>
         <p:spPr>
           <a:xfrm>
-            <a:off x="914400" y="1645920"/>
-            <a:ext cx="5120640" cy="4480560"/>
+            <a:off x="365760" y="137160"/>
+            <a:ext cx="10972800" cy="320040"/>
           </a:xfrm>
           <a:prstGeom prst="rect">
             <a:avLst/>
@@ -4179,98 +3600,148 @@
           <a:noFill/>
         </p:spPr>
         <p:txBody>
-          <a:bodyPr wrap="square">
+          <a:bodyPr wrap="none">
             <a:spAutoFit/>
           </a:bodyPr>
           <a:lstStyle/>
-          <a:p>
-            <a:pPr>
-              <a:spcAft>
-                <a:spcPts val="800"/>
-              </a:spcAft>
-              <a:defRPr sz="1600" b="1">
-                <a:solidFill>
-                  <a:srgbClr val="F59E0B"/>
-                </a:solidFill>
-              </a:defRPr>
-            </a:pPr>
-            <a:r>
-              <a:t>Concepto y Propiedades Físicas</a:t>
-            </a:r>
-          </a:p>
-          <a:p>
-            <a:pPr>
-              <a:lnSpc>
-                <a:spcPct val="120000"/>
-              </a:lnSpc>
-              <a:defRPr sz="1300">
-                <a:solidFill>
-                  <a:srgbClr val="CBD5E1"/>
-                </a:solidFill>
-              </a:defRPr>
-            </a:pPr>
-            <a:r>
-              <a:t>• Cuerpo Negro Ideal: Absorbe el 100% de la radiación incidente y emite únicamente en función de su temperatura T (emisividad = 1).</a:t>
-            </a:r>
-            <a:br/>
-            <a:r>
-              <a:t>• Modelo Experimental: Cavidad cerrada con un pequeño orificio de salida.</a:t>
-            </a:r>
-            <a:br/>
-            <a:r>
-              <a:t>• Ley de Desplazamiento de Wien:</a:t>
-            </a:r>
-          </a:p>
-          <a:p>
-            <a:pPr>
-              <a:spcBef>
-                <a:spcPts val="400"/>
-              </a:spcBef>
-              <a:spcAft>
-                <a:spcPts val="1200"/>
-              </a:spcAft>
-              <a:defRPr sz="1400" b="1">
-                <a:solidFill>
-                  <a:srgbClr val="38BDF8"/>
-                </a:solidFill>
-              </a:defRPr>
-            </a:pPr>
-            <a:r>
-              <a:t>   λ_max · T = b = 2.898 × 10⁻³ m·K</a:t>
-            </a:r>
-          </a:p>
-          <a:p>
-            <a:pPr>
-              <a:defRPr sz="1400" b="1">
-                <a:solidFill>
-                  <a:srgbClr val="38BDF8"/>
-                </a:solidFill>
-              </a:defRPr>
-            </a:pPr>
-            <a:r>
-              <a:t>Analogía en Teledetección / Radiometría:</a:t>
-            </a:r>
-          </a:p>
-          <a:p>
-            <a:pPr>
-              <a:lnSpc>
-                <a:spcPct val="120000"/>
-              </a:lnSpc>
-              <a:defRPr sz="1200" i="1">
-                <a:solidFill>
-                  <a:srgbClr val="F8FAFC"/>
-                </a:solidFill>
-              </a:defRPr>
-            </a:pPr>
-            <a:r>
-              <a:t>"Un sensor multiespectral (Landsat / Sentinel-2) mide la radiancia espectral. Si la teoría clásica fuera cierta, cada banda hacia el UV sumaría energía infinita. Sin embargo, los sensores muestran que la radiancia decae en el UV, tal como mide un radiómetro de campo."</a:t>
-            </a:r>
+          <a:p/>
+          <a:p>
+            <a:pPr algn="l"/>
+            <a:r>
+              <a:rPr sz="900" b="1" i="0">
+                <a:solidFill>
+                  <a:srgbClr val="AAAABB"/>
+                </a:solidFill>
+              </a:rPr>
+              <a:t>DIPLOMADO EN FÍSICA MODERNA — EVALUACIÓN 1</a:t>
+            </a:r>
+          </a:p>
+        </p:txBody>
+      </p:sp>
+      <p:sp>
+        <p:nvSpPr>
+          <p:cNvPr id="4" name="TextBox 3"/>
+          <p:cNvSpPr txBox="1"/>
+          <p:nvPr/>
+        </p:nvSpPr>
+        <p:spPr>
+          <a:xfrm>
+            <a:off x="365760" y="384048"/>
+            <a:ext cx="10972800" cy="640080"/>
+          </a:xfrm>
+          <a:prstGeom prst="rect">
+            <a:avLst/>
+          </a:prstGeom>
+          <a:noFill/>
+        </p:spPr>
+        <p:txBody>
+          <a:bodyPr wrap="none">
+            <a:spAutoFit/>
+          </a:bodyPr>
+          <a:lstStyle/>
+          <a:p/>
+          <a:p>
+            <a:pPr algn="l"/>
+            <a:r>
+              <a:rPr sz="2400" b="1" i="0">
+                <a:solidFill>
+                  <a:srgbClr val="00C8FF"/>
+                </a:solidFill>
+              </a:rPr>
+              <a:t>1. La Radiación del Cuerpo Negro e Incapacidad Clásica</a:t>
+            </a:r>
+          </a:p>
+        </p:txBody>
+      </p:sp>
+      <p:sp>
+        <p:nvSpPr>
+          <p:cNvPr id="5" name="Rectangle 4"/>
+          <p:cNvSpPr/>
+          <p:nvPr/>
+        </p:nvSpPr>
+        <p:spPr>
+          <a:xfrm>
+            <a:off x="365760" y="960120"/>
+            <a:ext cx="11430000" cy="27432"/>
+          </a:xfrm>
+          <a:prstGeom prst="rect">
+            <a:avLst/>
+          </a:prstGeom>
+          <a:solidFill>
+            <a:srgbClr val="00C8FF"/>
+          </a:solidFill>
+          <a:ln>
+            <a:noFill/>
+          </a:ln>
+        </p:spPr>
+        <p:style>
+          <a:lnRef idx="1">
+            <a:schemeClr val="accent1"/>
+          </a:lnRef>
+          <a:fillRef idx="3">
+            <a:schemeClr val="accent1"/>
+          </a:fillRef>
+          <a:effectRef idx="2">
+            <a:schemeClr val="accent1"/>
+          </a:effectRef>
+          <a:fontRef idx="minor">
+            <a:schemeClr val="lt1"/>
+          </a:fontRef>
+        </p:style>
+        <p:txBody>
+          <a:bodyPr rtlCol="0" anchor="ctr"/>
+          <a:lstStyle/>
+          <a:p>
+            <a:pPr algn="ctr"/>
+          </a:p>
+        </p:txBody>
+      </p:sp>
+      <p:sp>
+        <p:nvSpPr>
+          <p:cNvPr id="6" name="Rectangle 5"/>
+          <p:cNvSpPr/>
+          <p:nvPr/>
+        </p:nvSpPr>
+        <p:spPr>
+          <a:xfrm>
+            <a:off x="0" y="6693408"/>
+            <a:ext cx="12188952" cy="164592"/>
+          </a:xfrm>
+          <a:prstGeom prst="rect">
+            <a:avLst/>
+          </a:prstGeom>
+          <a:solidFill>
+            <a:srgbClr val="00C8FF"/>
+          </a:solidFill>
+          <a:ln>
+            <a:noFill/>
+          </a:ln>
+        </p:spPr>
+        <p:style>
+          <a:lnRef idx="1">
+            <a:schemeClr val="accent1"/>
+          </a:lnRef>
+          <a:fillRef idx="3">
+            <a:schemeClr val="accent1"/>
+          </a:fillRef>
+          <a:effectRef idx="2">
+            <a:schemeClr val="accent1"/>
+          </a:effectRef>
+          <a:fontRef idx="minor">
+            <a:schemeClr val="lt1"/>
+          </a:fontRef>
+        </p:style>
+        <p:txBody>
+          <a:bodyPr rtlCol="0" anchor="ctr"/>
+          <a:lstStyle/>
+          <a:p>
+            <a:pPr algn="ctr"/>
           </a:p>
         </p:txBody>
       </p:sp>
       <p:pic>
         <p:nvPicPr>
-          <p:cNvPr id="6" name="Picture 5" descr="grafica_cuerpo_negro.png"/>
+          <p:cNvPr id="7" name="Picture 6" descr="chart_blackbody.png"/>
           <p:cNvPicPr>
             <a:picLocks noChangeAspect="1"/>
           </p:cNvPicPr>
@@ -4284,14 +3755,346 @@
         </p:blipFill>
         <p:spPr>
           <a:xfrm>
-            <a:off x="6400800" y="1463040"/>
-            <a:ext cx="5029200" cy="3233057"/>
+            <a:off x="6035040" y="1051560"/>
+            <a:ext cx="5852160" cy="3291840"/>
           </a:xfrm>
           <a:prstGeom prst="rect">
             <a:avLst/>
           </a:prstGeom>
         </p:spPr>
       </p:pic>
+      <p:sp>
+        <p:nvSpPr>
+          <p:cNvPr id="8" name="TextBox 7"/>
+          <p:cNvSpPr txBox="1"/>
+          <p:nvPr/>
+        </p:nvSpPr>
+        <p:spPr>
+          <a:xfrm>
+            <a:off x="365760" y="1051560"/>
+            <a:ext cx="5486400" cy="2926080"/>
+          </a:xfrm>
+          <a:prstGeom prst="rect">
+            <a:avLst/>
+          </a:prstGeom>
+          <a:noFill/>
+        </p:spPr>
+        <p:txBody>
+          <a:bodyPr wrap="square">
+            <a:spAutoFit/>
+          </a:bodyPr>
+          <a:lstStyle/>
+          <a:p/>
+          <a:p>
+            <a:pPr algn="l"/>
+            <a:r>
+              <a:rPr sz="1400" b="1" i="0">
+                <a:solidFill>
+                  <a:srgbClr val="7BFFC4"/>
+                </a:solidFill>
+              </a:rPr>
+              <a:t>Concepto y Propiedades Físicas</a:t>
+            </a:r>
+          </a:p>
+          <a:p>
+            <a:pPr algn="l"/>
+            <a:r>
+              <a:rPr sz="1200" b="0" i="0">
+                <a:solidFill>
+                  <a:srgbClr val="FFFFFF"/>
+                </a:solidFill>
+              </a:rPr>
+              <a:t>• Cuerpo Negro Ideal: Absorbe el 100% de la radiación</a:t>
+            </a:r>
+          </a:p>
+          <a:p>
+            <a:pPr algn="l"/>
+            <a:r>
+              <a:rPr sz="1200" b="0" i="0">
+                <a:solidFill>
+                  <a:srgbClr val="FFFFFF"/>
+                </a:solidFill>
+              </a:rPr>
+              <a:t>  incidente y emite únicamente en función de T (ε = 1).</a:t>
+            </a:r>
+          </a:p>
+          <a:p>
+            <a:pPr algn="l"/>
+            <a:r>
+              <a:rPr sz="1200" b="0" i="0">
+                <a:solidFill>
+                  <a:srgbClr val="FFFFFF"/>
+                </a:solidFill>
+              </a:rPr>
+              <a:t>• Modelo Experimental: Cavidad con orificio de salida.</a:t>
+            </a:r>
+          </a:p>
+          <a:p>
+            <a:pPr algn="l"/>
+            <a:r>
+              <a:rPr sz="400" b="0" i="0">
+                <a:solidFill>
+                  <a:srgbClr val="FFFFFF"/>
+                </a:solidFill>
+              </a:rPr>
+              <a:t/>
+            </a:r>
+          </a:p>
+          <a:p>
+            <a:pPr algn="l"/>
+            <a:r>
+              <a:rPr sz="1400" b="1" i="0">
+                <a:solidFill>
+                  <a:srgbClr val="7BFFC4"/>
+                </a:solidFill>
+              </a:rPr>
+              <a:t>Leyes empíricas establecidas</a:t>
+            </a:r>
+          </a:p>
+          <a:p>
+            <a:pPr algn="l"/>
+            <a:r>
+              <a:rPr sz="1300" b="1" i="0">
+                <a:solidFill>
+                  <a:srgbClr val="FFE066"/>
+                </a:solidFill>
+              </a:rPr>
+              <a:t>  Stefan-Boltzmann (1879):   R = σT⁴</a:t>
+            </a:r>
+          </a:p>
+          <a:p>
+            <a:pPr algn="l"/>
+            <a:r>
+              <a:rPr sz="1100" b="0" i="0">
+                <a:solidFill>
+                  <a:srgbClr val="AAAABB"/>
+                </a:solidFill>
+              </a:rPr>
+              <a:t>  σ = 5.67×10⁻⁸ W m⁻² K⁻⁴</a:t>
+            </a:r>
+          </a:p>
+          <a:p>
+            <a:pPr algn="l"/>
+            <a:r>
+              <a:rPr sz="1300" b="1" i="0">
+                <a:solidFill>
+                  <a:srgbClr val="FFE066"/>
+                </a:solidFill>
+              </a:rPr>
+              <a:t>  Wien (1893):   λ_max · T = 2.898×10⁻³ m·K</a:t>
+            </a:r>
+          </a:p>
+          <a:p>
+            <a:pPr algn="l"/>
+            <a:r>
+              <a:rPr sz="400" b="0" i="0">
+                <a:solidFill>
+                  <a:srgbClr val="FFFFFF"/>
+                </a:solidFill>
+              </a:rPr>
+              <a:t/>
+            </a:r>
+          </a:p>
+          <a:p>
+            <a:pPr algn="l"/>
+            <a:r>
+              <a:rPr sz="1400" b="1" i="0">
+                <a:solidFill>
+                  <a:srgbClr val="7BFFC4"/>
+                </a:solidFill>
+              </a:rPr>
+              <a:t>El desafío</a:t>
+            </a:r>
+          </a:p>
+          <a:p>
+            <a:pPr algn="l"/>
+            <a:r>
+              <a:rPr sz="1200" b="0" i="0">
+                <a:solidFill>
+                  <a:srgbClr val="FFFFFF"/>
+                </a:solidFill>
+              </a:rPr>
+              <a:t>La curva experimental era precisa y medible.</a:t>
+            </a:r>
+          </a:p>
+          <a:p>
+            <a:pPr algn="l"/>
+            <a:r>
+              <a:rPr sz="1200" b="1" i="0">
+                <a:solidFill>
+                  <a:srgbClr val="FF6B35"/>
+                </a:solidFill>
+              </a:rPr>
+              <a:t>La energía total es finita — nunca infinita.</a:t>
+            </a:r>
+          </a:p>
+        </p:txBody>
+      </p:sp>
+      <p:sp>
+        <p:nvSpPr>
+          <p:cNvPr id="9" name="Rectangle 8"/>
+          <p:cNvSpPr/>
+          <p:nvPr/>
+        </p:nvSpPr>
+        <p:spPr>
+          <a:xfrm>
+            <a:off x="365760" y="4572000"/>
+            <a:ext cx="11430000" cy="27432"/>
+          </a:xfrm>
+          <a:prstGeom prst="rect">
+            <a:avLst/>
+          </a:prstGeom>
+          <a:solidFill>
+            <a:srgbClr val="7BFFC4"/>
+          </a:solidFill>
+          <a:ln>
+            <a:noFill/>
+          </a:ln>
+        </p:spPr>
+        <p:style>
+          <a:lnRef idx="1">
+            <a:schemeClr val="accent1"/>
+          </a:lnRef>
+          <a:fillRef idx="3">
+            <a:schemeClr val="accent1"/>
+          </a:fillRef>
+          <a:effectRef idx="2">
+            <a:schemeClr val="accent1"/>
+          </a:effectRef>
+          <a:fontRef idx="minor">
+            <a:schemeClr val="lt1"/>
+          </a:fontRef>
+        </p:style>
+        <p:txBody>
+          <a:bodyPr rtlCol="0" anchor="ctr"/>
+          <a:lstStyle/>
+          <a:p>
+            <a:pPr algn="ctr"/>
+          </a:p>
+        </p:txBody>
+      </p:sp>
+      <p:sp>
+        <p:nvSpPr>
+          <p:cNvPr id="10" name="Rectangle 9"/>
+          <p:cNvSpPr/>
+          <p:nvPr/>
+        </p:nvSpPr>
+        <p:spPr>
+          <a:xfrm>
+            <a:off x="365760" y="4709160"/>
+            <a:ext cx="11430000" cy="1828800"/>
+          </a:xfrm>
+          <a:prstGeom prst="rect">
+            <a:avLst/>
+          </a:prstGeom>
+          <a:solidFill>
+            <a:srgbClr val="122033"/>
+          </a:solidFill>
+          <a:ln>
+            <a:noFill/>
+          </a:ln>
+        </p:spPr>
+        <p:style>
+          <a:lnRef idx="1">
+            <a:schemeClr val="accent1"/>
+          </a:lnRef>
+          <a:fillRef idx="3">
+            <a:schemeClr val="accent1"/>
+          </a:fillRef>
+          <a:effectRef idx="2">
+            <a:schemeClr val="accent1"/>
+          </a:effectRef>
+          <a:fontRef idx="minor">
+            <a:schemeClr val="lt1"/>
+          </a:fontRef>
+        </p:style>
+        <p:txBody>
+          <a:bodyPr rtlCol="0" anchor="ctr"/>
+          <a:lstStyle/>
+          <a:p>
+            <a:pPr algn="ctr"/>
+          </a:p>
+        </p:txBody>
+      </p:sp>
+      <p:sp>
+        <p:nvSpPr>
+          <p:cNvPr id="11" name="TextBox 10"/>
+          <p:cNvSpPr txBox="1"/>
+          <p:nvPr/>
+        </p:nvSpPr>
+        <p:spPr>
+          <a:xfrm>
+            <a:off x="502920" y="4754880"/>
+            <a:ext cx="11155680" cy="1737360"/>
+          </a:xfrm>
+          <a:prstGeom prst="rect">
+            <a:avLst/>
+          </a:prstGeom>
+          <a:noFill/>
+        </p:spPr>
+        <p:txBody>
+          <a:bodyPr wrap="square">
+            <a:spAutoFit/>
+          </a:bodyPr>
+          <a:lstStyle/>
+          <a:p/>
+          <a:p>
+            <a:pPr algn="l"/>
+            <a:r>
+              <a:rPr sz="1300" b="1" i="0">
+                <a:solidFill>
+                  <a:srgbClr val="7BFFC4"/>
+                </a:solidFill>
+              </a:rPr>
+              <a:t>🌍 Analogía en Teledetección / Radiometría</a:t>
+            </a:r>
+          </a:p>
+          <a:p>
+            <a:pPr algn="l"/>
+            <a:r>
+              <a:rPr sz="1100" b="0" i="1">
+                <a:solidFill>
+                  <a:srgbClr val="FFFFFF"/>
+                </a:solidFill>
+              </a:rPr>
+              <a:t>"Un sensor multiespectral (Landsat / Sentinel-2) mide la radiancia espectral.</a:t>
+            </a:r>
+          </a:p>
+          <a:p>
+            <a:pPr algn="l"/>
+            <a:r>
+              <a:rPr sz="1100" b="0" i="1">
+                <a:solidFill>
+                  <a:srgbClr val="FFFFFF"/>
+                </a:solidFill>
+              </a:rPr>
+              <a:t>Si la teoría clásica fuera cierta, cada banda hacia el UV sumaría energía infinita.</a:t>
+            </a:r>
+          </a:p>
+          <a:p>
+            <a:pPr algn="l"/>
+            <a:r>
+              <a:rPr sz="1100" b="0" i="1">
+                <a:solidFill>
+                  <a:srgbClr val="FFFFFF"/>
+                </a:solidFill>
+              </a:rPr>
+              <a:t>Sin embargo, los sensores muestran que la radiancia decae en el UV,</a:t>
+            </a:r>
+          </a:p>
+          <a:p>
+            <a:pPr algn="l"/>
+            <a:r>
+              <a:rPr sz="1100" b="0" i="1">
+                <a:solidFill>
+                  <a:srgbClr val="FFFFFF"/>
+                </a:solidFill>
+              </a:rPr>
+              <a:t>tal como mide un radiómetro de campo."</a:t>
+            </a:r>
+          </a:p>
+        </p:txBody>
+      </p:sp>
     </p:spTree>
   </p:cSld>
   <p:clrMapOvr>
@@ -4306,7 +4109,7 @@
     <p:bg>
       <p:bgPr>
         <a:solidFill>
-          <a:srgbClr val="0F172A"/>
+          <a:srgbClr val="0D1B2A"/>
         </a:solidFill>
         <a:effectLst/>
       </p:bgPr>
@@ -4320,95 +4123,23 @@
       <p:grpSpPr/>
       <p:sp>
         <p:nvSpPr>
-          <p:cNvPr id="2" name="TextBox 1"/>
-          <p:cNvSpPr txBox="1"/>
-          <p:nvPr/>
-        </p:nvSpPr>
-        <p:spPr>
-          <a:xfrm>
-            <a:off x="731520" y="365760"/>
-            <a:ext cx="10698480" cy="365760"/>
-          </a:xfrm>
-          <a:prstGeom prst="rect">
-            <a:avLst/>
-          </a:prstGeom>
-          <a:noFill/>
-        </p:spPr>
-        <p:txBody>
-          <a:bodyPr wrap="square">
-            <a:spAutoFit/>
-          </a:bodyPr>
-          <a:lstStyle/>
-          <a:p>
-            <a:pPr>
-              <a:defRPr sz="1000" b="1">
-                <a:solidFill>
-                  <a:srgbClr val="38BDF8"/>
-                </a:solidFill>
-              </a:defRPr>
-            </a:pPr>
-            <a:r>
-              <a:t>DIPLOMADO EN FÍSICA MODERNA — EVALUACIÓN 1</a:t>
-            </a:r>
-          </a:p>
-        </p:txBody>
-      </p:sp>
-      <p:sp>
-        <p:nvSpPr>
-          <p:cNvPr id="3" name="TextBox 2"/>
-          <p:cNvSpPr txBox="1"/>
-          <p:nvPr/>
-        </p:nvSpPr>
-        <p:spPr>
-          <a:xfrm>
-            <a:off x="731520" y="640080"/>
-            <a:ext cx="10698480" cy="731520"/>
-          </a:xfrm>
-          <a:prstGeom prst="rect">
-            <a:avLst/>
-          </a:prstGeom>
-          <a:noFill/>
-        </p:spPr>
-        <p:txBody>
-          <a:bodyPr wrap="square">
-            <a:spAutoFit/>
-          </a:bodyPr>
-          <a:lstStyle/>
-          <a:p>
-            <a:pPr>
-              <a:defRPr sz="2400" b="1">
-                <a:solidFill>
-                  <a:srgbClr val="F8FAFC"/>
-                </a:solidFill>
-              </a:defRPr>
-            </a:pPr>
-            <a:r>
-              <a:t>2. La Catástrofe del Ultravioleta: El Colapso Clásico</a:t>
-            </a:r>
-          </a:p>
-        </p:txBody>
-      </p:sp>
-      <p:sp>
-        <p:nvSpPr>
-          <p:cNvPr id="4" name="Rounded Rectangle 3"/>
+          <p:cNvPr id="2" name="Rectangle 1"/>
           <p:cNvSpPr/>
           <p:nvPr/>
         </p:nvSpPr>
         <p:spPr>
           <a:xfrm>
-            <a:off x="731520" y="1463040"/>
-            <a:ext cx="5486400" cy="4846320"/>
-          </a:xfrm>
-          <a:prstGeom prst="roundRect">
+            <a:off x="0" y="0"/>
+            <a:ext cx="12188952" cy="73152"/>
+          </a:xfrm>
+          <a:prstGeom prst="rect">
             <a:avLst/>
           </a:prstGeom>
           <a:solidFill>
-            <a:srgbClr val="1E293B"/>
+            <a:srgbClr val="FF6B35"/>
           </a:solidFill>
           <a:ln>
-            <a:solidFill>
-              <a:srgbClr val="F43F5E"/>
-            </a:solidFill>
+            <a:noFill/>
           </a:ln>
         </p:spPr>
         <p:style>
@@ -4435,14 +4166,14 @@
       </p:sp>
       <p:sp>
         <p:nvSpPr>
-          <p:cNvPr id="5" name="TextBox 4"/>
+          <p:cNvPr id="3" name="TextBox 2"/>
           <p:cNvSpPr txBox="1"/>
           <p:nvPr/>
         </p:nvSpPr>
         <p:spPr>
           <a:xfrm>
-            <a:off x="914400" y="1645920"/>
-            <a:ext cx="5120640" cy="4480560"/>
+            <a:off x="365760" y="137160"/>
+            <a:ext cx="10972800" cy="320040"/>
           </a:xfrm>
           <a:prstGeom prst="rect">
             <a:avLst/>
@@ -4450,98 +4181,148 @@
           <a:noFill/>
         </p:spPr>
         <p:txBody>
-          <a:bodyPr wrap="square">
+          <a:bodyPr wrap="none">
             <a:spAutoFit/>
           </a:bodyPr>
           <a:lstStyle/>
-          <a:p>
-            <a:pPr>
-              <a:spcAft>
-                <a:spcPts val="800"/>
-              </a:spcAft>
-              <a:defRPr sz="1600" b="1">
-                <a:solidFill>
-                  <a:srgbClr val="F43F5E"/>
-                </a:solidFill>
-              </a:defRPr>
-            </a:pPr>
-            <a:r>
-              <a:t>La Ley de Rayleigh-Jeans y la Crisis</a:t>
-            </a:r>
-          </a:p>
-          <a:p>
-            <a:pPr>
-              <a:lnSpc>
-                <a:spcPct val="120000"/>
-              </a:lnSpc>
-              <a:defRPr sz="1300">
-                <a:solidFill>
-                  <a:srgbClr val="CBD5E1"/>
-                </a:solidFill>
-              </a:defRPr>
-            </a:pPr>
-            <a:r>
-              <a:t>• Teorema de Equipartición: Asigna una energía media constante ⟨E⟩ = k_B·T a cada modo de oscilación electromagnética en la cavidad.</a:t>
-            </a:r>
-            <a:br/>
-            <a:r>
-              <a:t>• Densidad de Modos: Crece cuadráticamente con la frecuencia (g(f) = 8πf²/c³).</a:t>
-            </a:r>
-            <a:br/>
-            <a:r>
-              <a:t>• Ecuación Clásica de Rayleigh-Jeans:</a:t>
-            </a:r>
-          </a:p>
-          <a:p>
-            <a:pPr>
-              <a:spcBef>
-                <a:spcPts val="400"/>
-              </a:spcBef>
-              <a:spcAft>
-                <a:spcPts val="1200"/>
-              </a:spcAft>
-              <a:defRPr sz="1500" b="1">
-                <a:solidFill>
-                  <a:srgbClr val="38BDF8"/>
-                </a:solidFill>
-              </a:defRPr>
-            </a:pPr>
-            <a:r>
-              <a:t>   W(f, T) = (8π f² / c³) · k_B T</a:t>
-            </a:r>
-          </a:p>
-          <a:p>
-            <a:pPr>
-              <a:defRPr sz="1400" b="1">
-                <a:solidFill>
-                  <a:srgbClr val="F43F5E"/>
-                </a:solidFill>
-              </a:defRPr>
-            </a:pPr>
-            <a:r>
-              <a:t>La Crisis Implícita (Paul Ehrenfest, 1911):</a:t>
-            </a:r>
-          </a:p>
-          <a:p>
-            <a:pPr>
-              <a:lnSpc>
-                <a:spcPct val="120000"/>
-              </a:lnSpc>
-              <a:defRPr sz="1200">
-                <a:solidFill>
-                  <a:srgbClr val="F8FAFC"/>
-                </a:solidFill>
-              </a:defRPr>
-            </a:pPr>
-            <a:r>
-              <a:t>Cuando λ → 0 (f → ∞), la integral de energía diverge a INFINITO. La física clásica predecía que cualquier cuerpo a temperatura ambiente debería emitir una radiación ultravioleta y de rayos X destructiva e infinita. ¡Una falla insostenible de la termodinámica clásica!</a:t>
-            </a:r>
+          <a:p/>
+          <a:p>
+            <a:pPr algn="l"/>
+            <a:r>
+              <a:rPr sz="900" b="1" i="0">
+                <a:solidFill>
+                  <a:srgbClr val="AAAABB"/>
+                </a:solidFill>
+              </a:rPr>
+              <a:t>DIPLOMADO EN FÍSICA MODERNA — EVALUACIÓN 1</a:t>
+            </a:r>
+          </a:p>
+        </p:txBody>
+      </p:sp>
+      <p:sp>
+        <p:nvSpPr>
+          <p:cNvPr id="4" name="TextBox 3"/>
+          <p:cNvSpPr txBox="1"/>
+          <p:nvPr/>
+        </p:nvSpPr>
+        <p:spPr>
+          <a:xfrm>
+            <a:off x="365760" y="384048"/>
+            <a:ext cx="10972800" cy="640080"/>
+          </a:xfrm>
+          <a:prstGeom prst="rect">
+            <a:avLst/>
+          </a:prstGeom>
+          <a:noFill/>
+        </p:spPr>
+        <p:txBody>
+          <a:bodyPr wrap="none">
+            <a:spAutoFit/>
+          </a:bodyPr>
+          <a:lstStyle/>
+          <a:p/>
+          <a:p>
+            <a:pPr algn="l"/>
+            <a:r>
+              <a:rPr sz="2400" b="1" i="0">
+                <a:solidFill>
+                  <a:srgbClr val="FF6B35"/>
+                </a:solidFill>
+              </a:rPr>
+              <a:t>2. La Catástrofe del Ultravioleta: El Colapso Clásico</a:t>
+            </a:r>
+          </a:p>
+        </p:txBody>
+      </p:sp>
+      <p:sp>
+        <p:nvSpPr>
+          <p:cNvPr id="5" name="Rectangle 4"/>
+          <p:cNvSpPr/>
+          <p:nvPr/>
+        </p:nvSpPr>
+        <p:spPr>
+          <a:xfrm>
+            <a:off x="365760" y="960120"/>
+            <a:ext cx="11430000" cy="27432"/>
+          </a:xfrm>
+          <a:prstGeom prst="rect">
+            <a:avLst/>
+          </a:prstGeom>
+          <a:solidFill>
+            <a:srgbClr val="FF6B35"/>
+          </a:solidFill>
+          <a:ln>
+            <a:noFill/>
+          </a:ln>
+        </p:spPr>
+        <p:style>
+          <a:lnRef idx="1">
+            <a:schemeClr val="accent1"/>
+          </a:lnRef>
+          <a:fillRef idx="3">
+            <a:schemeClr val="accent1"/>
+          </a:fillRef>
+          <a:effectRef idx="2">
+            <a:schemeClr val="accent1"/>
+          </a:effectRef>
+          <a:fontRef idx="minor">
+            <a:schemeClr val="lt1"/>
+          </a:fontRef>
+        </p:style>
+        <p:txBody>
+          <a:bodyPr rtlCol="0" anchor="ctr"/>
+          <a:lstStyle/>
+          <a:p>
+            <a:pPr algn="ctr"/>
+          </a:p>
+        </p:txBody>
+      </p:sp>
+      <p:sp>
+        <p:nvSpPr>
+          <p:cNvPr id="6" name="Rectangle 5"/>
+          <p:cNvSpPr/>
+          <p:nvPr/>
+        </p:nvSpPr>
+        <p:spPr>
+          <a:xfrm>
+            <a:off x="0" y="6693408"/>
+            <a:ext cx="12188952" cy="164592"/>
+          </a:xfrm>
+          <a:prstGeom prst="rect">
+            <a:avLst/>
+          </a:prstGeom>
+          <a:solidFill>
+            <a:srgbClr val="FF6B35"/>
+          </a:solidFill>
+          <a:ln>
+            <a:noFill/>
+          </a:ln>
+        </p:spPr>
+        <p:style>
+          <a:lnRef idx="1">
+            <a:schemeClr val="accent1"/>
+          </a:lnRef>
+          <a:fillRef idx="3">
+            <a:schemeClr val="accent1"/>
+          </a:fillRef>
+          <a:effectRef idx="2">
+            <a:schemeClr val="accent1"/>
+          </a:effectRef>
+          <a:fontRef idx="minor">
+            <a:schemeClr val="lt1"/>
+          </a:fontRef>
+        </p:style>
+        <p:txBody>
+          <a:bodyPr rtlCol="0" anchor="ctr"/>
+          <a:lstStyle/>
+          <a:p>
+            <a:pPr algn="ctr"/>
           </a:p>
         </p:txBody>
       </p:sp>
       <p:pic>
         <p:nvPicPr>
-          <p:cNvPr id="6" name="Picture 5" descr="grafica_catastrofe_uv.png"/>
+          <p:cNvPr id="7" name="Picture 6" descr="chart_rj_planck.png"/>
           <p:cNvPicPr>
             <a:picLocks noChangeAspect="1"/>
           </p:cNvPicPr>
@@ -4555,14 +4336,236 @@
         </p:blipFill>
         <p:spPr>
           <a:xfrm>
-            <a:off x="6400800" y="1463040"/>
-            <a:ext cx="5029200" cy="3233057"/>
+            <a:off x="6035040" y="1051560"/>
+            <a:ext cx="5852160" cy="3291840"/>
           </a:xfrm>
           <a:prstGeom prst="rect">
             <a:avLst/>
           </a:prstGeom>
         </p:spPr>
       </p:pic>
+      <p:sp>
+        <p:nvSpPr>
+          <p:cNvPr id="8" name="TextBox 7"/>
+          <p:cNvSpPr txBox="1"/>
+          <p:nvPr/>
+        </p:nvSpPr>
+        <p:spPr>
+          <a:xfrm>
+            <a:off x="365760" y="1051560"/>
+            <a:ext cx="5486400" cy="4389120"/>
+          </a:xfrm>
+          <a:prstGeom prst="rect">
+            <a:avLst/>
+          </a:prstGeom>
+          <a:noFill/>
+        </p:spPr>
+        <p:txBody>
+          <a:bodyPr wrap="square">
+            <a:spAutoFit/>
+          </a:bodyPr>
+          <a:lstStyle/>
+          <a:p/>
+          <a:p>
+            <a:pPr algn="l"/>
+            <a:r>
+              <a:rPr sz="1400" b="1" i="0">
+                <a:solidFill>
+                  <a:srgbClr val="FF6B35"/>
+                </a:solidFill>
+              </a:rPr>
+              <a:t>La Ley de Rayleigh-Jeans y la Crisis</a:t>
+            </a:r>
+          </a:p>
+          <a:p>
+            <a:pPr algn="l"/>
+            <a:r>
+              <a:rPr sz="1200" b="0" i="0">
+                <a:solidFill>
+                  <a:srgbClr val="FFFFFF"/>
+                </a:solidFill>
+              </a:rPr>
+              <a:t>• Teorema de Equipartición: Asigna ⟨E⟩ = k_B·T</a:t>
+            </a:r>
+          </a:p>
+          <a:p>
+            <a:pPr algn="l"/>
+            <a:r>
+              <a:rPr sz="1200" b="0" i="0">
+                <a:solidFill>
+                  <a:srgbClr val="FFFFFF"/>
+                </a:solidFill>
+              </a:rPr>
+              <a:t>  a cada modo de oscilación EM en la cavidad.</a:t>
+            </a:r>
+          </a:p>
+          <a:p>
+            <a:pPr algn="l"/>
+            <a:r>
+              <a:rPr sz="1200" b="0" i="0">
+                <a:solidFill>
+                  <a:srgbClr val="FFFFFF"/>
+                </a:solidFill>
+              </a:rPr>
+              <a:t>• Densidad de Modos: Crece cuadráticamente</a:t>
+            </a:r>
+          </a:p>
+          <a:p>
+            <a:pPr algn="l"/>
+            <a:r>
+              <a:rPr sz="1200" b="0" i="0">
+                <a:solidFill>
+                  <a:srgbClr val="FFFFFF"/>
+                </a:solidFill>
+              </a:rPr>
+              <a:t>  con la frecuencia:  g(f) = 8πf²/c³</a:t>
+            </a:r>
+          </a:p>
+          <a:p>
+            <a:pPr algn="l"/>
+            <a:r>
+              <a:rPr sz="400" b="0" i="0">
+                <a:solidFill>
+                  <a:srgbClr val="FFFFFF"/>
+                </a:solidFill>
+              </a:rPr>
+              <a:t/>
+            </a:r>
+          </a:p>
+          <a:p>
+            <a:pPr algn="l"/>
+            <a:r>
+              <a:rPr sz="1300" b="1" i="0">
+                <a:solidFill>
+                  <a:srgbClr val="FF6B35"/>
+                </a:solidFill>
+              </a:rPr>
+              <a:t>Ecuación Clásica de Rayleigh-Jeans:</a:t>
+            </a:r>
+          </a:p>
+          <a:p>
+            <a:pPr algn="l"/>
+            <a:r>
+              <a:rPr sz="1400" b="1" i="0">
+                <a:solidFill>
+                  <a:srgbClr val="FFE066"/>
+                </a:solidFill>
+              </a:rPr>
+              <a:t>  W(f, T) = (8π f² / c³) · k_B T</a:t>
+            </a:r>
+          </a:p>
+          <a:p>
+            <a:pPr algn="l"/>
+            <a:r>
+              <a:rPr sz="400" b="0" i="0">
+                <a:solidFill>
+                  <a:srgbClr val="FFFFFF"/>
+                </a:solidFill>
+              </a:rPr>
+              <a:t/>
+            </a:r>
+          </a:p>
+          <a:p>
+            <a:pPr algn="l"/>
+            <a:r>
+              <a:rPr sz="1300" b="1" i="0">
+                <a:solidFill>
+                  <a:srgbClr val="FF6B35"/>
+                </a:solidFill>
+              </a:rPr>
+              <a:t>La Crisis (Paul Ehrenfest, 1911):</a:t>
+            </a:r>
+          </a:p>
+          <a:p>
+            <a:pPr algn="l"/>
+            <a:r>
+              <a:rPr sz="1200" b="0" i="0">
+                <a:solidFill>
+                  <a:srgbClr val="FFFFFF"/>
+                </a:solidFill>
+              </a:rPr>
+              <a:t>Cuando λ → 0 (f → ∞), la integral de energía</a:t>
+            </a:r>
+          </a:p>
+          <a:p>
+            <a:pPr algn="l"/>
+            <a:r>
+              <a:rPr sz="1200" b="1" i="0">
+                <a:solidFill>
+                  <a:srgbClr val="FF6B35"/>
+                </a:solidFill>
+              </a:rPr>
+              <a:t>diverge a INFINITO.</a:t>
+            </a:r>
+          </a:p>
+          <a:p>
+            <a:pPr algn="l"/>
+            <a:r>
+              <a:rPr sz="300" b="0" i="0">
+                <a:solidFill>
+                  <a:srgbClr val="FFFFFF"/>
+                </a:solidFill>
+              </a:rPr>
+              <a:t/>
+            </a:r>
+          </a:p>
+          <a:p>
+            <a:pPr algn="l"/>
+            <a:r>
+              <a:rPr sz="1200" b="0" i="0">
+                <a:solidFill>
+                  <a:srgbClr val="FFFFFF"/>
+                </a:solidFill>
+              </a:rPr>
+              <a:t>No es un error de cálculo.</a:t>
+            </a:r>
+          </a:p>
+          <a:p>
+            <a:pPr algn="l"/>
+            <a:r>
+              <a:rPr sz="1200" b="0" i="0">
+                <a:solidFill>
+                  <a:srgbClr val="FFFFFF"/>
+                </a:solidFill>
+              </a:rPr>
+              <a:t>Es consecuencia inevitable de combinar</a:t>
+            </a:r>
+          </a:p>
+          <a:p>
+            <a:pPr algn="l"/>
+            <a:r>
+              <a:rPr sz="1200" b="0" i="0">
+                <a:solidFill>
+                  <a:srgbClr val="FFFFFF"/>
+                </a:solidFill>
+              </a:rPr>
+              <a:t>termodinámica + electromagnetismo clásicos.</a:t>
+            </a:r>
+          </a:p>
+          <a:p>
+            <a:pPr algn="l"/>
+            <a:r>
+              <a:rPr sz="300" b="0" i="0">
+                <a:solidFill>
+                  <a:srgbClr val="FFFFFF"/>
+                </a:solidFill>
+              </a:rPr>
+              <a:t/>
+            </a:r>
+          </a:p>
+          <a:p>
+            <a:pPr algn="l"/>
+            <a:r>
+              <a:rPr sz="1300" b="1" i="0">
+                <a:solidFill>
+                  <a:srgbClr val="FF6B35"/>
+                </a:solidFill>
+              </a:rPr>
+              <a:t>Infinitos modos × energía fija = ∞</a:t>
+            </a:r>
+          </a:p>
+        </p:txBody>
+      </p:sp>
     </p:spTree>
   </p:cSld>
   <p:clrMapOvr>
@@ -4577,7 +4580,7 @@
     <p:bg>
       <p:bgPr>
         <a:solidFill>
-          <a:srgbClr val="0F172A"/>
+          <a:srgbClr val="0D1B2A"/>
         </a:solidFill>
         <a:effectLst/>
       </p:bgPr>
@@ -4591,95 +4594,23 @@
       <p:grpSpPr/>
       <p:sp>
         <p:nvSpPr>
-          <p:cNvPr id="2" name="TextBox 1"/>
-          <p:cNvSpPr txBox="1"/>
-          <p:nvPr/>
-        </p:nvSpPr>
-        <p:spPr>
-          <a:xfrm>
-            <a:off x="731520" y="365760"/>
-            <a:ext cx="10698480" cy="365760"/>
-          </a:xfrm>
-          <a:prstGeom prst="rect">
-            <a:avLst/>
-          </a:prstGeom>
-          <a:noFill/>
-        </p:spPr>
-        <p:txBody>
-          <a:bodyPr wrap="square">
-            <a:spAutoFit/>
-          </a:bodyPr>
-          <a:lstStyle/>
-          <a:p>
-            <a:pPr>
-              <a:defRPr sz="1000" b="1">
-                <a:solidFill>
-                  <a:srgbClr val="38BDF8"/>
-                </a:solidFill>
-              </a:defRPr>
-            </a:pPr>
-            <a:r>
-              <a:t>DIPLOMADO EN FÍSICA MODERNA — EVALUACIÓN 1</a:t>
-            </a:r>
-          </a:p>
-        </p:txBody>
-      </p:sp>
-      <p:sp>
-        <p:nvSpPr>
-          <p:cNvPr id="3" name="TextBox 2"/>
-          <p:cNvSpPr txBox="1"/>
-          <p:nvPr/>
-        </p:nvSpPr>
-        <p:spPr>
-          <a:xfrm>
-            <a:off x="731520" y="640080"/>
-            <a:ext cx="10698480" cy="731520"/>
-          </a:xfrm>
-          <a:prstGeom prst="rect">
-            <a:avLst/>
-          </a:prstGeom>
-          <a:noFill/>
-        </p:spPr>
-        <p:txBody>
-          <a:bodyPr wrap="square">
-            <a:spAutoFit/>
-          </a:bodyPr>
-          <a:lstStyle/>
-          <a:p>
-            <a:pPr>
-              <a:defRPr sz="2400" b="1">
-                <a:solidFill>
-                  <a:srgbClr val="F8FAFC"/>
-                </a:solidFill>
-              </a:defRPr>
-            </a:pPr>
-            <a:r>
-              <a:t>3. La Hipótesis de Planck y la Cuantización de la Energía</a:t>
-            </a:r>
-          </a:p>
-        </p:txBody>
-      </p:sp>
-      <p:sp>
-        <p:nvSpPr>
-          <p:cNvPr id="4" name="Rounded Rectangle 3"/>
+          <p:cNvPr id="2" name="Rectangle 1"/>
           <p:cNvSpPr/>
           <p:nvPr/>
         </p:nvSpPr>
         <p:spPr>
           <a:xfrm>
-            <a:off x="731520" y="1463040"/>
-            <a:ext cx="5303520" cy="4846320"/>
-          </a:xfrm>
-          <a:prstGeom prst="roundRect">
+            <a:off x="0" y="0"/>
+            <a:ext cx="12188952" cy="73152"/>
+          </a:xfrm>
+          <a:prstGeom prst="rect">
             <a:avLst/>
           </a:prstGeom>
           <a:solidFill>
-            <a:srgbClr val="1E293B"/>
+            <a:srgbClr val="7BFFC4"/>
           </a:solidFill>
           <a:ln>
-            <a:solidFill>
-              <a:srgbClr val="10B981"/>
-            </a:solidFill>
+            <a:noFill/>
           </a:ln>
         </p:spPr>
         <p:style>
@@ -4706,14 +4637,14 @@
       </p:sp>
       <p:sp>
         <p:nvSpPr>
-          <p:cNvPr id="5" name="TextBox 4"/>
+          <p:cNvPr id="3" name="TextBox 2"/>
           <p:cNvSpPr txBox="1"/>
           <p:nvPr/>
         </p:nvSpPr>
         <p:spPr>
           <a:xfrm>
-            <a:off x="914400" y="1645920"/>
-            <a:ext cx="4937760" cy="4480560"/>
+            <a:off x="365760" y="137160"/>
+            <a:ext cx="10972800" cy="320040"/>
           </a:xfrm>
           <a:prstGeom prst="rect">
             <a:avLst/>
@@ -4721,124 +4652,78 @@
           <a:noFill/>
         </p:spPr>
         <p:txBody>
-          <a:bodyPr wrap="square">
+          <a:bodyPr wrap="none">
             <a:spAutoFit/>
           </a:bodyPr>
           <a:lstStyle/>
-          <a:p>
-            <a:pPr>
-              <a:spcAft>
-                <a:spcPts val="800"/>
-              </a:spcAft>
-              <a:defRPr sz="1600" b="1">
-                <a:solidFill>
-                  <a:srgbClr val="10B981"/>
-                </a:solidFill>
-              </a:defRPr>
-            </a:pPr>
-            <a:r>
-              <a:t>El Postulado de Cuantización (1900)</a:t>
-            </a:r>
-          </a:p>
-          <a:p>
-            <a:pPr>
-              <a:defRPr sz="1200">
-                <a:solidFill>
-                  <a:srgbClr val="CBD5E1"/>
-                </a:solidFill>
-              </a:defRPr>
-            </a:pPr>
-            <a:r>
-              <a:t>• Hipótesis de Planck: Los osciladores en las paredes de la cavidad intercambian energía únicamente en Paquetes Discretos (cuantos):</a:t>
-            </a:r>
-          </a:p>
-          <a:p>
-            <a:pPr>
-              <a:spcBef>
-                <a:spcPts val="400"/>
-              </a:spcBef>
-              <a:spcAft>
-                <a:spcPts val="600"/>
-              </a:spcAft>
-              <a:defRPr sz="1500" b="1">
-                <a:solidFill>
-                  <a:srgbClr val="38BDF8"/>
-                </a:solidFill>
-              </a:defRPr>
-            </a:pPr>
-            <a:r>
-              <a:t>   E_n = n · h f  (n = 0, 1, 2, 3...)</a:t>
-            </a:r>
-          </a:p>
-          <a:p>
-            <a:pPr>
-              <a:defRPr sz="1200">
-                <a:solidFill>
-                  <a:srgbClr val="CBD5E1"/>
-                </a:solidFill>
-              </a:defRPr>
-            </a:pPr>
-            <a:r>
-              <a:t>• Constante de Planck: h = 6.626 × 10⁻³⁴ J·s</a:t>
-            </a:r>
-            <a:br/>
-            <a:r>
-              <a:t>• Distribución Cuántica de Planck:</a:t>
-            </a:r>
-          </a:p>
-          <a:p>
-            <a:pPr>
-              <a:spcBef>
-                <a:spcPts val="400"/>
-              </a:spcBef>
-              <a:spcAft>
-                <a:spcPts val="1000"/>
-              </a:spcAft>
-              <a:defRPr sz="1300" b="1">
-                <a:solidFill>
-                  <a:srgbClr val="F59E0B"/>
-                </a:solidFill>
-              </a:defRPr>
-            </a:pPr>
-            <a:r>
-              <a:t>   W(f, T) = (8π h f³ / c³) · [1 / (e^(hf/k_BT) - 1)]</a:t>
-            </a:r>
-          </a:p>
-          <a:p>
-            <a:pPr>
-              <a:defRPr sz="1200">
-                <a:solidFill>
-                  <a:srgbClr val="F8FAFC"/>
-                </a:solidFill>
-              </a:defRPr>
-            </a:pPr>
-            <a:r>
-              <a:t>• Supresión Exponencial: A alta frecuencia (hf &gt;&gt; k_B T), el término exponencial e^(hf/k_BT) tiende a ∞, haciendo que W(f) → 0. ¡La catástrofe desaparece de forma natural!</a:t>
-            </a:r>
-          </a:p>
-        </p:txBody>
-      </p:sp>
-      <p:sp>
-        <p:nvSpPr>
-          <p:cNvPr id="6" name="Rounded Rectangle 5"/>
+          <a:p/>
+          <a:p>
+            <a:pPr algn="l"/>
+            <a:r>
+              <a:rPr sz="900" b="1" i="0">
+                <a:solidFill>
+                  <a:srgbClr val="AAAABB"/>
+                </a:solidFill>
+              </a:rPr>
+              <a:t>DIPLOMADO EN FÍSICA MODERNA — EVALUACIÓN 1</a:t>
+            </a:r>
+          </a:p>
+        </p:txBody>
+      </p:sp>
+      <p:sp>
+        <p:nvSpPr>
+          <p:cNvPr id="4" name="TextBox 3"/>
+          <p:cNvSpPr txBox="1"/>
+          <p:nvPr/>
+        </p:nvSpPr>
+        <p:spPr>
+          <a:xfrm>
+            <a:off x="365760" y="384048"/>
+            <a:ext cx="10972800" cy="640080"/>
+          </a:xfrm>
+          <a:prstGeom prst="rect">
+            <a:avLst/>
+          </a:prstGeom>
+          <a:noFill/>
+        </p:spPr>
+        <p:txBody>
+          <a:bodyPr wrap="none">
+            <a:spAutoFit/>
+          </a:bodyPr>
+          <a:lstStyle/>
+          <a:p/>
+          <a:p>
+            <a:pPr algn="l"/>
+            <a:r>
+              <a:rPr sz="2400" b="1" i="0">
+                <a:solidFill>
+                  <a:srgbClr val="7BFFC4"/>
+                </a:solidFill>
+              </a:rPr>
+              <a:t>3. La Hipótesis de Planck y la Cuantización de la Energía</a:t>
+            </a:r>
+          </a:p>
+        </p:txBody>
+      </p:sp>
+      <p:sp>
+        <p:nvSpPr>
+          <p:cNvPr id="5" name="Rectangle 4"/>
           <p:cNvSpPr/>
           <p:nvPr/>
         </p:nvSpPr>
         <p:spPr>
           <a:xfrm>
-            <a:off x="6217920" y="1463040"/>
-            <a:ext cx="5212080" cy="4846320"/>
-          </a:xfrm>
-          <a:prstGeom prst="roundRect">
+            <a:off x="365760" y="960120"/>
+            <a:ext cx="11430000" cy="27432"/>
+          </a:xfrm>
+          <a:prstGeom prst="rect">
             <a:avLst/>
           </a:prstGeom>
           <a:solidFill>
-            <a:srgbClr val="1E293B"/>
+            <a:srgbClr val="7BFFC4"/>
           </a:solidFill>
           <a:ln>
-            <a:solidFill>
-              <a:srgbClr val="38BDF8"/>
-            </a:solidFill>
+            <a:noFill/>
           </a:ln>
         </p:spPr>
         <p:style>
@@ -4865,14 +4750,57 @@
       </p:sp>
       <p:sp>
         <p:nvSpPr>
+          <p:cNvPr id="6" name="Rectangle 5"/>
+          <p:cNvSpPr/>
+          <p:nvPr/>
+        </p:nvSpPr>
+        <p:spPr>
+          <a:xfrm>
+            <a:off x="0" y="6693408"/>
+            <a:ext cx="12188952" cy="164592"/>
+          </a:xfrm>
+          <a:prstGeom prst="rect">
+            <a:avLst/>
+          </a:prstGeom>
+          <a:solidFill>
+            <a:srgbClr val="7BFFC4"/>
+          </a:solidFill>
+          <a:ln>
+            <a:noFill/>
+          </a:ln>
+        </p:spPr>
+        <p:style>
+          <a:lnRef idx="1">
+            <a:schemeClr val="accent1"/>
+          </a:lnRef>
+          <a:fillRef idx="3">
+            <a:schemeClr val="accent1"/>
+          </a:fillRef>
+          <a:effectRef idx="2">
+            <a:schemeClr val="accent1"/>
+          </a:effectRef>
+          <a:fontRef idx="minor">
+            <a:schemeClr val="lt1"/>
+          </a:fontRef>
+        </p:style>
+        <p:txBody>
+          <a:bodyPr rtlCol="0" anchor="ctr"/>
+          <a:lstStyle/>
+          <a:p>
+            <a:pPr algn="ctr"/>
+          </a:p>
+        </p:txBody>
+      </p:sp>
+      <p:sp>
+        <p:nvSpPr>
           <p:cNvPr id="7" name="TextBox 6"/>
           <p:cNvSpPr txBox="1"/>
           <p:nvPr/>
         </p:nvSpPr>
         <p:spPr>
           <a:xfrm>
-            <a:off x="6400800" y="1645920"/>
-            <a:ext cx="4846320" cy="4480560"/>
+            <a:off x="365760" y="1051560"/>
+            <a:ext cx="5577840" cy="3200400"/>
           </a:xfrm>
           <a:prstGeom prst="rect">
             <a:avLst/>
@@ -4884,44 +4812,394 @@
             <a:spAutoFit/>
           </a:bodyPr>
           <a:lstStyle/>
-          <a:p>
-            <a:pPr>
-              <a:spcAft>
-                <a:spcPts val="1000"/>
-              </a:spcAft>
-              <a:defRPr sz="1600" b="1">
-                <a:solidFill>
-                  <a:srgbClr val="38BDF8"/>
-                </a:solidFill>
-              </a:defRPr>
-            </a:pPr>
-            <a:r>
-              <a:t>Analogía: Digitalización Radiométrica (DN)</a:t>
-            </a:r>
-          </a:p>
-          <a:p>
-            <a:pPr>
-              <a:lnSpc>
-                <a:spcPct val="130000"/>
-              </a:lnSpc>
-              <a:defRPr sz="1200">
-                <a:solidFill>
-                  <a:srgbClr val="CBD5E1"/>
-                </a:solidFill>
-              </a:defRPr>
-            </a:pPr>
-            <a:r>
-              <a:t>En sensores de Teledetección (Sentinel-2, LiDAR), la radiancia analógica continua se muestrea en Valores Digitales Discretos (Digital Numbers - DN). No existe el DN 127.5, solo 127 o 128.</a:t>
-            </a:r>
-            <a:br/>
-            <a:br/>
-            <a:r>
-              <a:t>Planck aplicó exactamente esta discretización a la energía: la energía no fluye como rampa continua, sino en escalones de tamaño hf.</a:t>
-            </a:r>
-            <a:br/>
-            <a:br/>
-            <a:r>
-              <a:t>A altas frecuencias, el escalón hf es tan grande que la energía térmica k_BT no alcanza para subir al primer peldaño (como intentar medir 0.001 DN en un sensor de 8 bits). Por eso los modos UV quedan desiertos.</a:t>
+          <a:p/>
+          <a:p>
+            <a:pPr algn="l"/>
+            <a:r>
+              <a:rPr sz="1400" b="1" i="0">
+                <a:solidFill>
+                  <a:srgbClr val="7BFFC4"/>
+                </a:solidFill>
+              </a:rPr>
+              <a:t>El Postulado de Cuantización (1900)</a:t>
+            </a:r>
+          </a:p>
+          <a:p>
+            <a:pPr algn="l"/>
+            <a:r>
+              <a:rPr sz="1200" b="0" i="0">
+                <a:solidFill>
+                  <a:srgbClr val="FFFFFF"/>
+                </a:solidFill>
+              </a:rPr>
+              <a:t>Los osciladores intercambian energía</a:t>
+            </a:r>
+          </a:p>
+          <a:p>
+            <a:pPr algn="l"/>
+            <a:r>
+              <a:rPr sz="1200" b="0" i="0">
+                <a:solidFill>
+                  <a:srgbClr val="FFFFFF"/>
+                </a:solidFill>
+              </a:rPr>
+              <a:t>únicamente en Paquetes Discretos (cuantos):</a:t>
+            </a:r>
+          </a:p>
+          <a:p>
+            <a:pPr algn="l"/>
+            <a:r>
+              <a:rPr sz="1500" b="1" i="0">
+                <a:solidFill>
+                  <a:srgbClr val="FFE066"/>
+                </a:solidFill>
+              </a:rPr>
+              <a:t>  E_n = n · h f    (n = 0, 1, 2, 3...)</a:t>
+            </a:r>
+          </a:p>
+          <a:p>
+            <a:pPr algn="l"/>
+            <a:r>
+              <a:rPr sz="1200" b="0" i="0">
+                <a:solidFill>
+                  <a:srgbClr val="AAAABB"/>
+                </a:solidFill>
+              </a:rPr>
+              <a:t>  h = 6.626 × 10⁻³⁴ J·s</a:t>
+            </a:r>
+          </a:p>
+          <a:p>
+            <a:pPr algn="l"/>
+            <a:r>
+              <a:rPr sz="400" b="0" i="0">
+                <a:solidFill>
+                  <a:srgbClr val="FFFFFF"/>
+                </a:solidFill>
+              </a:rPr>
+              <a:t/>
+            </a:r>
+          </a:p>
+          <a:p>
+            <a:pPr algn="l"/>
+            <a:r>
+              <a:rPr sz="1300" b="1" i="0">
+                <a:solidFill>
+                  <a:srgbClr val="7BFFC4"/>
+                </a:solidFill>
+              </a:rPr>
+              <a:t>Distribución Cuántica de Planck:</a:t>
+            </a:r>
+          </a:p>
+          <a:p>
+            <a:pPr algn="l"/>
+            <a:r>
+              <a:rPr sz="1300" b="1" i="0">
+                <a:solidFill>
+                  <a:srgbClr val="FFE066"/>
+                </a:solidFill>
+              </a:rPr>
+              <a:t>  W(f,T) = (8πhf³/c³) · 1/(e^(hf/k_BT) - 1)</a:t>
+            </a:r>
+          </a:p>
+          <a:p>
+            <a:pPr algn="l"/>
+            <a:r>
+              <a:rPr sz="400" b="0" i="0">
+                <a:solidFill>
+                  <a:srgbClr val="FFFFFF"/>
+                </a:solidFill>
+              </a:rPr>
+              <a:t/>
+            </a:r>
+          </a:p>
+          <a:p>
+            <a:pPr algn="l"/>
+            <a:r>
+              <a:rPr sz="1300" b="1" i="0">
+                <a:solidFill>
+                  <a:srgbClr val="7BFFC4"/>
+                </a:solidFill>
+              </a:rPr>
+              <a:t>Supresión Exponencial:</a:t>
+            </a:r>
+          </a:p>
+          <a:p>
+            <a:pPr algn="l"/>
+            <a:r>
+              <a:rPr sz="1200" b="0" i="0">
+                <a:solidFill>
+                  <a:srgbClr val="FFFFFF"/>
+                </a:solidFill>
+              </a:rPr>
+              <a:t>A alta frecuencia: hf &gt;&gt; k_BT</a:t>
+            </a:r>
+          </a:p>
+          <a:p>
+            <a:pPr algn="l"/>
+            <a:r>
+              <a:rPr sz="1200" b="0" i="0">
+                <a:solidFill>
+                  <a:srgbClr val="FFFFFF"/>
+                </a:solidFill>
+              </a:rPr>
+              <a:t>→ El "precio de entrada" mínimo (hf) supera</a:t>
+            </a:r>
+          </a:p>
+          <a:p>
+            <a:pPr algn="l"/>
+            <a:r>
+              <a:rPr sz="1200" b="0" i="0">
+                <a:solidFill>
+                  <a:srgbClr val="FFFFFF"/>
+                </a:solidFill>
+              </a:rPr>
+              <a:t>  la energía térmica disponible (k_BT).</a:t>
+            </a:r>
+          </a:p>
+          <a:p>
+            <a:pPr algn="l"/>
+            <a:r>
+              <a:rPr sz="1200" b="1" i="0">
+                <a:solidFill>
+                  <a:srgbClr val="7BFFC4"/>
+                </a:solidFill>
+              </a:rPr>
+              <a:t>→ Los modos UV quedan "congelados".</a:t>
+            </a:r>
+          </a:p>
+          <a:p>
+            <a:pPr algn="l"/>
+            <a:r>
+              <a:rPr sz="1200" b="1" i="0">
+                <a:solidFill>
+                  <a:srgbClr val="7BFFC4"/>
+                </a:solidFill>
+              </a:rPr>
+              <a:t>→ W(f) → 0 naturalmente. ¡Sin catástrofe!</a:t>
+            </a:r>
+          </a:p>
+        </p:txBody>
+      </p:sp>
+      <p:pic>
+        <p:nvPicPr>
+          <p:cNvPr id="8" name="Picture 7" descr="chart_rj_planck.png"/>
+          <p:cNvPicPr>
+            <a:picLocks noChangeAspect="1"/>
+          </p:cNvPicPr>
+          <p:nvPr/>
+        </p:nvPicPr>
+        <p:blipFill>
+          <a:blip r:embed="rId2"/>
+          <a:stretch>
+            <a:fillRect/>
+          </a:stretch>
+        </p:blipFill>
+        <p:spPr>
+          <a:xfrm>
+            <a:off x="6035040" y="1051560"/>
+            <a:ext cx="5852160" cy="2743200"/>
+          </a:xfrm>
+          <a:prstGeom prst="rect">
+            <a:avLst/>
+          </a:prstGeom>
+        </p:spPr>
+      </p:pic>
+      <p:sp>
+        <p:nvSpPr>
+          <p:cNvPr id="9" name="TextBox 8"/>
+          <p:cNvSpPr txBox="1"/>
+          <p:nvPr/>
+        </p:nvSpPr>
+        <p:spPr>
+          <a:xfrm>
+            <a:off x="6035040" y="3886200"/>
+            <a:ext cx="5760720" cy="548640"/>
+          </a:xfrm>
+          <a:prstGeom prst="rect">
+            <a:avLst/>
+          </a:prstGeom>
+          <a:noFill/>
+        </p:spPr>
+        <p:txBody>
+          <a:bodyPr wrap="square">
+            <a:spAutoFit/>
+          </a:bodyPr>
+          <a:lstStyle/>
+          <a:p/>
+          <a:p>
+            <a:pPr algn="ctr"/>
+            <a:r>
+              <a:rPr sz="1200" b="0" i="1">
+                <a:solidFill>
+                  <a:srgbClr val="AAAABB"/>
+                </a:solidFill>
+              </a:rPr>
+              <a:t>"Un acto de desesperación" — Max Planck</a:t>
+            </a:r>
+          </a:p>
+        </p:txBody>
+      </p:sp>
+      <p:sp>
+        <p:nvSpPr>
+          <p:cNvPr id="10" name="Rectangle 9"/>
+          <p:cNvSpPr/>
+          <p:nvPr/>
+        </p:nvSpPr>
+        <p:spPr>
+          <a:xfrm>
+            <a:off x="365760" y="4572000"/>
+            <a:ext cx="11430000" cy="27432"/>
+          </a:xfrm>
+          <a:prstGeom prst="rect">
+            <a:avLst/>
+          </a:prstGeom>
+          <a:solidFill>
+            <a:srgbClr val="7BFFC4"/>
+          </a:solidFill>
+          <a:ln>
+            <a:noFill/>
+          </a:ln>
+        </p:spPr>
+        <p:style>
+          <a:lnRef idx="1">
+            <a:schemeClr val="accent1"/>
+          </a:lnRef>
+          <a:fillRef idx="3">
+            <a:schemeClr val="accent1"/>
+          </a:fillRef>
+          <a:effectRef idx="2">
+            <a:schemeClr val="accent1"/>
+          </a:effectRef>
+          <a:fontRef idx="minor">
+            <a:schemeClr val="lt1"/>
+          </a:fontRef>
+        </p:style>
+        <p:txBody>
+          <a:bodyPr rtlCol="0" anchor="ctr"/>
+          <a:lstStyle/>
+          <a:p>
+            <a:pPr algn="ctr"/>
+          </a:p>
+        </p:txBody>
+      </p:sp>
+      <p:sp>
+        <p:nvSpPr>
+          <p:cNvPr id="11" name="Rectangle 10"/>
+          <p:cNvSpPr/>
+          <p:nvPr/>
+        </p:nvSpPr>
+        <p:spPr>
+          <a:xfrm>
+            <a:off x="365760" y="4709160"/>
+            <a:ext cx="11430000" cy="1828800"/>
+          </a:xfrm>
+          <a:prstGeom prst="rect">
+            <a:avLst/>
+          </a:prstGeom>
+          <a:solidFill>
+            <a:srgbClr val="122033"/>
+          </a:solidFill>
+          <a:ln>
+            <a:noFill/>
+          </a:ln>
+        </p:spPr>
+        <p:style>
+          <a:lnRef idx="1">
+            <a:schemeClr val="accent1"/>
+          </a:lnRef>
+          <a:fillRef idx="3">
+            <a:schemeClr val="accent1"/>
+          </a:fillRef>
+          <a:effectRef idx="2">
+            <a:schemeClr val="accent1"/>
+          </a:effectRef>
+          <a:fontRef idx="minor">
+            <a:schemeClr val="lt1"/>
+          </a:fontRef>
+        </p:style>
+        <p:txBody>
+          <a:bodyPr rtlCol="0" anchor="ctr"/>
+          <a:lstStyle/>
+          <a:p>
+            <a:pPr algn="ctr"/>
+          </a:p>
+        </p:txBody>
+      </p:sp>
+      <p:sp>
+        <p:nvSpPr>
+          <p:cNvPr id="12" name="TextBox 11"/>
+          <p:cNvSpPr txBox="1"/>
+          <p:nvPr/>
+        </p:nvSpPr>
+        <p:spPr>
+          <a:xfrm>
+            <a:off x="502920" y="4754880"/>
+            <a:ext cx="11155680" cy="1737360"/>
+          </a:xfrm>
+          <a:prstGeom prst="rect">
+            <a:avLst/>
+          </a:prstGeom>
+          <a:noFill/>
+        </p:spPr>
+        <p:txBody>
+          <a:bodyPr wrap="square">
+            <a:spAutoFit/>
+          </a:bodyPr>
+          <a:lstStyle/>
+          <a:p/>
+          <a:p>
+            <a:pPr algn="l"/>
+            <a:r>
+              <a:rPr sz="1300" b="1" i="0">
+                <a:solidFill>
+                  <a:srgbClr val="7BFFC4"/>
+                </a:solidFill>
+              </a:rPr>
+              <a:t>📡 Analogía: Digitalización Radiométrica (DN)</a:t>
+            </a:r>
+          </a:p>
+          <a:p>
+            <a:pPr algn="l"/>
+            <a:r>
+              <a:rPr sz="1100" b="0" i="0">
+                <a:solidFill>
+                  <a:srgbClr val="FFFFFF"/>
+                </a:solidFill>
+              </a:rPr>
+              <a:t>En sensores de Teledetección (Sentinel-2, LiDAR), la radiancia analógica</a:t>
+            </a:r>
+          </a:p>
+          <a:p>
+            <a:pPr algn="l"/>
+            <a:r>
+              <a:rPr sz="1100" b="0" i="0">
+                <a:solidFill>
+                  <a:srgbClr val="FFFFFF"/>
+                </a:solidFill>
+              </a:rPr>
+              <a:t>se muestrea en Valores Digitales Discretos (DN). No existe el DN 127.5,</a:t>
+            </a:r>
+          </a:p>
+          <a:p>
+            <a:pPr algn="l"/>
+            <a:r>
+              <a:rPr sz="1100" b="0" i="0">
+                <a:solidFill>
+                  <a:srgbClr val="FFFFFF"/>
+                </a:solidFill>
+              </a:rPr>
+              <a:t>solo 127 o 128. Planck aplicó exactamente esta discretización a la energía:</a:t>
+            </a:r>
+          </a:p>
+          <a:p>
+            <a:pPr algn="l"/>
+            <a:r>
+              <a:rPr sz="1100" b="1" i="0">
+                <a:solidFill>
+                  <a:srgbClr val="7BFFC4"/>
+                </a:solidFill>
+              </a:rPr>
+              <a:t>si k_BT no alcanza para subir al primer peldaño (hf), el modo queda desierto.</a:t>
             </a:r>
           </a:p>
         </p:txBody>
@@ -4940,7 +5218,7 @@
     <p:bg>
       <p:bgPr>
         <a:solidFill>
-          <a:srgbClr val="0F172A"/>
+          <a:srgbClr val="0D1B2A"/>
         </a:solidFill>
         <a:effectLst/>
       </p:bgPr>
@@ -4954,95 +5232,23 @@
       <p:grpSpPr/>
       <p:sp>
         <p:nvSpPr>
-          <p:cNvPr id="2" name="TextBox 1"/>
-          <p:cNvSpPr txBox="1"/>
-          <p:nvPr/>
-        </p:nvSpPr>
-        <p:spPr>
-          <a:xfrm>
-            <a:off x="731520" y="365760"/>
-            <a:ext cx="10698480" cy="365760"/>
-          </a:xfrm>
-          <a:prstGeom prst="rect">
-            <a:avLst/>
-          </a:prstGeom>
-          <a:noFill/>
-        </p:spPr>
-        <p:txBody>
-          <a:bodyPr wrap="square">
-            <a:spAutoFit/>
-          </a:bodyPr>
-          <a:lstStyle/>
-          <a:p>
-            <a:pPr>
-              <a:defRPr sz="1000" b="1">
-                <a:solidFill>
-                  <a:srgbClr val="38BDF8"/>
-                </a:solidFill>
-              </a:defRPr>
-            </a:pPr>
-            <a:r>
-              <a:t>DIPLOMADO EN FÍSICA MODERNA — EVALUACIÓN 1</a:t>
-            </a:r>
-          </a:p>
-        </p:txBody>
-      </p:sp>
-      <p:sp>
-        <p:nvSpPr>
-          <p:cNvPr id="3" name="TextBox 2"/>
-          <p:cNvSpPr txBox="1"/>
-          <p:nvPr/>
-        </p:nvSpPr>
-        <p:spPr>
-          <a:xfrm>
-            <a:off x="731520" y="640080"/>
-            <a:ext cx="10698480" cy="731520"/>
-          </a:xfrm>
-          <a:prstGeom prst="rect">
-            <a:avLst/>
-          </a:prstGeom>
-          <a:noFill/>
-        </p:spPr>
-        <p:txBody>
-          <a:bodyPr wrap="square">
-            <a:spAutoFit/>
-          </a:bodyPr>
-          <a:lstStyle/>
-          <a:p>
-            <a:pPr>
-              <a:defRPr sz="2400" b="1">
-                <a:solidFill>
-                  <a:srgbClr val="F8FAFC"/>
-                </a:solidFill>
-              </a:defRPr>
-            </a:pPr>
-            <a:r>
-              <a:t>Conclusión: El Cambio de Paradigma en la Física</a:t>
-            </a:r>
-          </a:p>
-        </p:txBody>
-      </p:sp>
-      <p:sp>
-        <p:nvSpPr>
-          <p:cNvPr id="4" name="Rounded Rectangle 3"/>
+          <p:cNvPr id="2" name="Rectangle 1"/>
           <p:cNvSpPr/>
           <p:nvPr/>
         </p:nvSpPr>
         <p:spPr>
           <a:xfrm>
-            <a:off x="731520" y="1463040"/>
-            <a:ext cx="2468880" cy="2286000"/>
-          </a:xfrm>
-          <a:prstGeom prst="roundRect">
+            <a:off x="0" y="0"/>
+            <a:ext cx="12188952" cy="73152"/>
+          </a:xfrm>
+          <a:prstGeom prst="rect">
             <a:avLst/>
           </a:prstGeom>
           <a:solidFill>
-            <a:srgbClr val="1E293B"/>
+            <a:srgbClr val="FFE066"/>
           </a:solidFill>
-          <a:ln w="25400">
-            <a:solidFill>
-              <a:srgbClr val="F59E0B"/>
-            </a:solidFill>
+          <a:ln>
+            <a:noFill/>
           </a:ln>
         </p:spPr>
         <p:style>
@@ -5069,14 +5275,14 @@
       </p:sp>
       <p:sp>
         <p:nvSpPr>
-          <p:cNvPr id="5" name="TextBox 4"/>
+          <p:cNvPr id="3" name="TextBox 2"/>
           <p:cNvSpPr txBox="1"/>
           <p:nvPr/>
         </p:nvSpPr>
         <p:spPr>
           <a:xfrm>
-            <a:off x="868680" y="1600200"/>
-            <a:ext cx="2194560" cy="2011680"/>
+            <a:off x="365760" y="137160"/>
+            <a:ext cx="10972800" cy="320040"/>
           </a:xfrm>
           <a:prstGeom prst="rect">
             <a:avLst/>
@@ -5084,63 +5290,78 @@
           <a:noFill/>
         </p:spPr>
         <p:txBody>
-          <a:bodyPr wrap="square">
+          <a:bodyPr wrap="none">
             <a:spAutoFit/>
           </a:bodyPr>
           <a:lstStyle/>
-          <a:p>
-            <a:pPr>
-              <a:spcAft>
-                <a:spcPts val="800"/>
-              </a:spcAft>
-              <a:defRPr sz="1300" b="1">
-                <a:solidFill>
-                  <a:srgbClr val="F59E0B"/>
-                </a:solidFill>
-              </a:defRPr>
-            </a:pPr>
-            <a:r>
-              <a:t>1900 — Planck</a:t>
-            </a:r>
-          </a:p>
-          <a:p>
-            <a:pPr>
-              <a:lnSpc>
-                <a:spcPct val="120000"/>
-              </a:lnSpc>
-              <a:defRPr sz="1100">
-                <a:solidFill>
-                  <a:srgbClr val="CBD5E1"/>
-                </a:solidFill>
-              </a:defRPr>
-            </a:pPr>
-            <a:r>
-              <a:t>Hipótesis del cuanto E = hf para resolver el cuerpo negro.</a:t>
-            </a:r>
-          </a:p>
-        </p:txBody>
-      </p:sp>
-      <p:sp>
-        <p:nvSpPr>
-          <p:cNvPr id="6" name="Rounded Rectangle 5"/>
+          <a:p/>
+          <a:p>
+            <a:pPr algn="l"/>
+            <a:r>
+              <a:rPr sz="900" b="1" i="0">
+                <a:solidFill>
+                  <a:srgbClr val="AAAABB"/>
+                </a:solidFill>
+              </a:rPr>
+              <a:t>DIPLOMADO EN FÍSICA MODERNA — EVALUACIÓN 1</a:t>
+            </a:r>
+          </a:p>
+        </p:txBody>
+      </p:sp>
+      <p:sp>
+        <p:nvSpPr>
+          <p:cNvPr id="4" name="TextBox 3"/>
+          <p:cNvSpPr txBox="1"/>
+          <p:nvPr/>
+        </p:nvSpPr>
+        <p:spPr>
+          <a:xfrm>
+            <a:off x="365760" y="384048"/>
+            <a:ext cx="10972800" cy="640080"/>
+          </a:xfrm>
+          <a:prstGeom prst="rect">
+            <a:avLst/>
+          </a:prstGeom>
+          <a:noFill/>
+        </p:spPr>
+        <p:txBody>
+          <a:bodyPr wrap="none">
+            <a:spAutoFit/>
+          </a:bodyPr>
+          <a:lstStyle/>
+          <a:p/>
+          <a:p>
+            <a:pPr algn="l"/>
+            <a:r>
+              <a:rPr sz="2400" b="1" i="0">
+                <a:solidFill>
+                  <a:srgbClr val="FFE066"/>
+                </a:solidFill>
+              </a:rPr>
+              <a:t>Conclusión: El Cambio de Paradigma en la Física</a:t>
+            </a:r>
+          </a:p>
+        </p:txBody>
+      </p:sp>
+      <p:sp>
+        <p:nvSpPr>
+          <p:cNvPr id="5" name="Rectangle 4"/>
           <p:cNvSpPr/>
           <p:nvPr/>
         </p:nvSpPr>
         <p:spPr>
           <a:xfrm>
-            <a:off x="3429000" y="1463040"/>
-            <a:ext cx="2468880" cy="2286000"/>
-          </a:xfrm>
-          <a:prstGeom prst="roundRect">
+            <a:off x="365760" y="960120"/>
+            <a:ext cx="11430000" cy="27432"/>
+          </a:xfrm>
+          <a:prstGeom prst="rect">
             <a:avLst/>
           </a:prstGeom>
           <a:solidFill>
-            <a:srgbClr val="1E293B"/>
+            <a:srgbClr val="FFE066"/>
           </a:solidFill>
-          <a:ln w="25400">
-            <a:solidFill>
-              <a:srgbClr val="38BDF8"/>
-            </a:solidFill>
+          <a:ln>
+            <a:noFill/>
           </a:ln>
         </p:spPr>
         <p:style>
@@ -5167,78 +5388,23 @@
       </p:sp>
       <p:sp>
         <p:nvSpPr>
-          <p:cNvPr id="7" name="TextBox 6"/>
-          <p:cNvSpPr txBox="1"/>
-          <p:nvPr/>
-        </p:nvSpPr>
-        <p:spPr>
-          <a:xfrm>
-            <a:off x="3566160" y="1600200"/>
-            <a:ext cx="2194560" cy="2011680"/>
-          </a:xfrm>
-          <a:prstGeom prst="rect">
-            <a:avLst/>
-          </a:prstGeom>
-          <a:noFill/>
-        </p:spPr>
-        <p:txBody>
-          <a:bodyPr wrap="square">
-            <a:spAutoFit/>
-          </a:bodyPr>
-          <a:lstStyle/>
-          <a:p>
-            <a:pPr>
-              <a:spcAft>
-                <a:spcPts val="800"/>
-              </a:spcAft>
-              <a:defRPr sz="1300" b="1">
-                <a:solidFill>
-                  <a:srgbClr val="38BDF8"/>
-                </a:solidFill>
-              </a:defRPr>
-            </a:pPr>
-            <a:r>
-              <a:t>1905 — Einstein</a:t>
-            </a:r>
-          </a:p>
-          <a:p>
-            <a:pPr>
-              <a:lnSpc>
-                <a:spcPct val="120000"/>
-              </a:lnSpc>
-              <a:defRPr sz="1100">
-                <a:solidFill>
-                  <a:srgbClr val="CBD5E1"/>
-                </a:solidFill>
-              </a:defRPr>
-            </a:pPr>
-            <a:r>
-              <a:t>Cuantos de luz (fotones) y explicación del Efecto Fotoeléctrico.</a:t>
-            </a:r>
-          </a:p>
-        </p:txBody>
-      </p:sp>
-      <p:sp>
-        <p:nvSpPr>
-          <p:cNvPr id="8" name="Rounded Rectangle 7"/>
+          <p:cNvPr id="6" name="Rectangle 5"/>
           <p:cNvSpPr/>
           <p:nvPr/>
         </p:nvSpPr>
         <p:spPr>
           <a:xfrm>
-            <a:off x="6126480" y="1463040"/>
-            <a:ext cx="2468880" cy="2286000"/>
-          </a:xfrm>
-          <a:prstGeom prst="roundRect">
+            <a:off x="0" y="6693408"/>
+            <a:ext cx="12188952" cy="164592"/>
+          </a:xfrm>
+          <a:prstGeom prst="rect">
             <a:avLst/>
           </a:prstGeom>
           <a:solidFill>
-            <a:srgbClr val="1E293B"/>
+            <a:srgbClr val="FFE066"/>
           </a:solidFill>
-          <a:ln w="25400">
-            <a:solidFill>
-              <a:srgbClr val="10B981"/>
-            </a:solidFill>
+          <a:ln>
+            <a:noFill/>
           </a:ln>
         </p:spPr>
         <p:style>
@@ -5265,78 +5431,23 @@
       </p:sp>
       <p:sp>
         <p:nvSpPr>
-          <p:cNvPr id="9" name="TextBox 8"/>
-          <p:cNvSpPr txBox="1"/>
-          <p:nvPr/>
-        </p:nvSpPr>
-        <p:spPr>
-          <a:xfrm>
-            <a:off x="6263640" y="1600200"/>
-            <a:ext cx="2194560" cy="2011680"/>
-          </a:xfrm>
-          <a:prstGeom prst="rect">
-            <a:avLst/>
-          </a:prstGeom>
-          <a:noFill/>
-        </p:spPr>
-        <p:txBody>
-          <a:bodyPr wrap="square">
-            <a:spAutoFit/>
-          </a:bodyPr>
-          <a:lstStyle/>
-          <a:p>
-            <a:pPr>
-              <a:spcAft>
-                <a:spcPts val="800"/>
-              </a:spcAft>
-              <a:defRPr sz="1300" b="1">
-                <a:solidFill>
-                  <a:srgbClr val="10B981"/>
-                </a:solidFill>
-              </a:defRPr>
-            </a:pPr>
-            <a:r>
-              <a:t>1913 — Bohr</a:t>
-            </a:r>
-          </a:p>
-          <a:p>
-            <a:pPr>
-              <a:lnSpc>
-                <a:spcPct val="120000"/>
-              </a:lnSpc>
-              <a:defRPr sz="1100">
-                <a:solidFill>
-                  <a:srgbClr val="CBD5E1"/>
-                </a:solidFill>
-              </a:defRPr>
-            </a:pPr>
-            <a:r>
-              <a:t>Cuantización de órbitas atómicas y espectro del Hidrógeno.</a:t>
-            </a:r>
-          </a:p>
-        </p:txBody>
-      </p:sp>
-      <p:sp>
-        <p:nvSpPr>
-          <p:cNvPr id="10" name="Rounded Rectangle 9"/>
+          <p:cNvPr id="7" name="Rectangle 6"/>
           <p:cNvSpPr/>
           <p:nvPr/>
         </p:nvSpPr>
         <p:spPr>
           <a:xfrm>
-            <a:off x="8823960" y="1463040"/>
-            <a:ext cx="2468880" cy="2286000"/>
-          </a:xfrm>
-          <a:prstGeom prst="roundRect">
+            <a:off x="274320" y="2606040"/>
+            <a:ext cx="11430000" cy="36576"/>
+          </a:xfrm>
+          <a:prstGeom prst="rect">
             <a:avLst/>
           </a:prstGeom>
           <a:solidFill>
-            <a:srgbClr val="1E293B"/>
+            <a:srgbClr val="AAAABB"/>
           </a:solidFill>
-          <a:ln w="25400">
-            <a:solidFill>
-              <a:srgbClr val="F43F5E"/>
-            </a:solidFill>
+          <a:ln>
+            <a:noFill/>
           </a:ln>
         </p:spPr>
         <p:style>
@@ -5363,78 +5474,23 @@
       </p:sp>
       <p:sp>
         <p:nvSpPr>
-          <p:cNvPr id="11" name="TextBox 10"/>
-          <p:cNvSpPr txBox="1"/>
-          <p:nvPr/>
-        </p:nvSpPr>
-        <p:spPr>
-          <a:xfrm>
-            <a:off x="8961120" y="1600200"/>
-            <a:ext cx="2194560" cy="2011680"/>
-          </a:xfrm>
-          <a:prstGeom prst="rect">
-            <a:avLst/>
-          </a:prstGeom>
-          <a:noFill/>
-        </p:spPr>
-        <p:txBody>
-          <a:bodyPr wrap="square">
-            <a:spAutoFit/>
-          </a:bodyPr>
-          <a:lstStyle/>
-          <a:p>
-            <a:pPr>
-              <a:spcAft>
-                <a:spcPts val="800"/>
-              </a:spcAft>
-              <a:defRPr sz="1300" b="1">
-                <a:solidFill>
-                  <a:srgbClr val="F43F5E"/>
-                </a:solidFill>
-              </a:defRPr>
-            </a:pPr>
-            <a:r>
-              <a:t>1925 — Schrödinger</a:t>
-            </a:r>
-          </a:p>
-          <a:p>
-            <a:pPr>
-              <a:lnSpc>
-                <a:spcPct val="120000"/>
-              </a:lnSpc>
-              <a:defRPr sz="1100">
-                <a:solidFill>
-                  <a:srgbClr val="CBD5E1"/>
-                </a:solidFill>
-              </a:defRPr>
-            </a:pPr>
-            <a:r>
-              <a:t>Ecuación de onda y consolidación de la Mecánica Cuántica.</a:t>
-            </a:r>
-          </a:p>
-        </p:txBody>
-      </p:sp>
-      <p:sp>
-        <p:nvSpPr>
-          <p:cNvPr id="12" name="Rounded Rectangle 11"/>
+          <p:cNvPr id="8" name="Rectangle 7"/>
           <p:cNvSpPr/>
           <p:nvPr/>
         </p:nvSpPr>
         <p:spPr>
           <a:xfrm>
-            <a:off x="731520" y="3931920"/>
-            <a:ext cx="10698480" cy="2377440"/>
-          </a:xfrm>
-          <a:prstGeom prst="roundRect">
+            <a:off x="274320" y="2496312"/>
+            <a:ext cx="201168" cy="256032"/>
+          </a:xfrm>
+          <a:prstGeom prst="rect">
             <a:avLst/>
           </a:prstGeom>
           <a:solidFill>
-            <a:srgbClr val="1E293B"/>
+            <a:srgbClr val="00C8FF"/>
           </a:solidFill>
           <a:ln>
-            <a:solidFill>
-              <a:srgbClr val="38BDF8"/>
-            </a:solidFill>
+            <a:noFill/>
           </a:ln>
         </p:spPr>
         <p:style>
@@ -5461,14 +5517,1132 @@
       </p:sp>
       <p:sp>
         <p:nvSpPr>
+          <p:cNvPr id="9" name="TextBox 8"/>
+          <p:cNvSpPr txBox="1"/>
+          <p:nvPr/>
+        </p:nvSpPr>
+        <p:spPr>
+          <a:xfrm>
+            <a:off x="91439" y="1965960"/>
+            <a:ext cx="1371600" cy="457200"/>
+          </a:xfrm>
+          <a:prstGeom prst="rect">
+            <a:avLst/>
+          </a:prstGeom>
+          <a:noFill/>
+        </p:spPr>
+        <p:txBody>
+          <a:bodyPr wrap="none">
+            <a:spAutoFit/>
+          </a:bodyPr>
+          <a:lstStyle/>
+          <a:p/>
+          <a:p>
+            <a:pPr algn="ctr"/>
+            <a:r>
+              <a:rPr sz="1200" b="1" i="0">
+                <a:solidFill>
+                  <a:srgbClr val="00C8FF"/>
+                </a:solidFill>
+              </a:rPr>
+              <a:t>1879</a:t>
+            </a:r>
+          </a:p>
+        </p:txBody>
+      </p:sp>
+      <p:sp>
+        <p:nvSpPr>
+          <p:cNvPr id="10" name="TextBox 9"/>
+          <p:cNvSpPr txBox="1"/>
+          <p:nvPr/>
+        </p:nvSpPr>
+        <p:spPr>
+          <a:xfrm>
+            <a:off x="0" y="2880360"/>
+            <a:ext cx="1463040" cy="502920"/>
+          </a:xfrm>
+          <a:prstGeom prst="rect">
+            <a:avLst/>
+          </a:prstGeom>
+          <a:noFill/>
+        </p:spPr>
+        <p:txBody>
+          <a:bodyPr wrap="none">
+            <a:spAutoFit/>
+          </a:bodyPr>
+          <a:lstStyle/>
+          <a:p/>
+          <a:p>
+            <a:pPr algn="ctr"/>
+            <a:r>
+              <a:rPr sz="1000" b="1" i="0">
+                <a:solidFill>
+                  <a:srgbClr val="FFFFFF"/>
+                </a:solidFill>
+              </a:rPr>
+              <a:t>Stefan</a:t>
+            </a:r>
+          </a:p>
+        </p:txBody>
+      </p:sp>
+      <p:sp>
+        <p:nvSpPr>
+          <p:cNvPr id="11" name="TextBox 10"/>
+          <p:cNvSpPr txBox="1"/>
+          <p:nvPr/>
+        </p:nvSpPr>
+        <p:spPr>
+          <a:xfrm>
+            <a:off x="-45719" y="3383280"/>
+            <a:ext cx="1554480" cy="640080"/>
+          </a:xfrm>
+          <a:prstGeom prst="rect">
+            <a:avLst/>
+          </a:prstGeom>
+          <a:noFill/>
+        </p:spPr>
+        <p:txBody>
+          <a:bodyPr wrap="none">
+            <a:spAutoFit/>
+          </a:bodyPr>
+          <a:lstStyle/>
+          <a:p/>
+          <a:p>
+            <a:pPr algn="ctr"/>
+            <a:r>
+              <a:rPr sz="900" b="0" i="0">
+                <a:solidFill>
+                  <a:srgbClr val="AAAABB"/>
+                </a:solidFill>
+              </a:rPr>
+              <a:t>R = σT⁴</a:t>
+            </a:r>
+          </a:p>
+        </p:txBody>
+      </p:sp>
+      <p:sp>
+        <p:nvSpPr>
+          <p:cNvPr id="12" name="Rectangle 11"/>
+          <p:cNvSpPr/>
+          <p:nvPr/>
+        </p:nvSpPr>
+        <p:spPr>
+          <a:xfrm>
+            <a:off x="1920240" y="2496312"/>
+            <a:ext cx="201168" cy="256032"/>
+          </a:xfrm>
+          <a:prstGeom prst="rect">
+            <a:avLst/>
+          </a:prstGeom>
+          <a:solidFill>
+            <a:srgbClr val="00C8FF"/>
+          </a:solidFill>
+          <a:ln>
+            <a:noFill/>
+          </a:ln>
+        </p:spPr>
+        <p:style>
+          <a:lnRef idx="1">
+            <a:schemeClr val="accent1"/>
+          </a:lnRef>
+          <a:fillRef idx="3">
+            <a:schemeClr val="accent1"/>
+          </a:fillRef>
+          <a:effectRef idx="2">
+            <a:schemeClr val="accent1"/>
+          </a:effectRef>
+          <a:fontRef idx="minor">
+            <a:schemeClr val="lt1"/>
+          </a:fontRef>
+        </p:style>
+        <p:txBody>
+          <a:bodyPr rtlCol="0" anchor="ctr"/>
+          <a:lstStyle/>
+          <a:p>
+            <a:pPr algn="ctr"/>
+          </a:p>
+        </p:txBody>
+      </p:sp>
+      <p:sp>
+        <p:nvSpPr>
           <p:cNvPr id="13" name="TextBox 12"/>
           <p:cNvSpPr txBox="1"/>
           <p:nvPr/>
         </p:nvSpPr>
         <p:spPr>
           <a:xfrm>
-            <a:off x="914400" y="4114800"/>
-            <a:ext cx="10332720" cy="2011680"/>
+            <a:off x="1737360" y="1965960"/>
+            <a:ext cx="1371600" cy="457200"/>
+          </a:xfrm>
+          <a:prstGeom prst="rect">
+            <a:avLst/>
+          </a:prstGeom>
+          <a:noFill/>
+        </p:spPr>
+        <p:txBody>
+          <a:bodyPr wrap="none">
+            <a:spAutoFit/>
+          </a:bodyPr>
+          <a:lstStyle/>
+          <a:p/>
+          <a:p>
+            <a:pPr algn="ctr"/>
+            <a:r>
+              <a:rPr sz="1200" b="1" i="0">
+                <a:solidFill>
+                  <a:srgbClr val="00C8FF"/>
+                </a:solidFill>
+              </a:rPr>
+              <a:t>1893</a:t>
+            </a:r>
+          </a:p>
+        </p:txBody>
+      </p:sp>
+      <p:sp>
+        <p:nvSpPr>
+          <p:cNvPr id="14" name="TextBox 13"/>
+          <p:cNvSpPr txBox="1"/>
+          <p:nvPr/>
+        </p:nvSpPr>
+        <p:spPr>
+          <a:xfrm>
+            <a:off x="1645920" y="2880360"/>
+            <a:ext cx="1463040" cy="502920"/>
+          </a:xfrm>
+          <a:prstGeom prst="rect">
+            <a:avLst/>
+          </a:prstGeom>
+          <a:noFill/>
+        </p:spPr>
+        <p:txBody>
+          <a:bodyPr wrap="none">
+            <a:spAutoFit/>
+          </a:bodyPr>
+          <a:lstStyle/>
+          <a:p/>
+          <a:p>
+            <a:pPr algn="ctr"/>
+            <a:r>
+              <a:rPr sz="1000" b="1" i="0">
+                <a:solidFill>
+                  <a:srgbClr val="FFFFFF"/>
+                </a:solidFill>
+              </a:rPr>
+              <a:t>Wien</a:t>
+            </a:r>
+          </a:p>
+        </p:txBody>
+      </p:sp>
+      <p:sp>
+        <p:nvSpPr>
+          <p:cNvPr id="15" name="TextBox 14"/>
+          <p:cNvSpPr txBox="1"/>
+          <p:nvPr/>
+        </p:nvSpPr>
+        <p:spPr>
+          <a:xfrm>
+            <a:off x="1600200" y="3383280"/>
+            <a:ext cx="1554480" cy="640080"/>
+          </a:xfrm>
+          <a:prstGeom prst="rect">
+            <a:avLst/>
+          </a:prstGeom>
+          <a:noFill/>
+        </p:spPr>
+        <p:txBody>
+          <a:bodyPr wrap="none">
+            <a:spAutoFit/>
+          </a:bodyPr>
+          <a:lstStyle/>
+          <a:p/>
+          <a:p>
+            <a:pPr algn="ctr"/>
+            <a:r>
+              <a:rPr sz="900" b="0" i="0">
+                <a:solidFill>
+                  <a:srgbClr val="AAAABB"/>
+                </a:solidFill>
+              </a:rPr>
+              <a:t>λ_max·T = b</a:t>
+            </a:r>
+          </a:p>
+        </p:txBody>
+      </p:sp>
+      <p:sp>
+        <p:nvSpPr>
+          <p:cNvPr id="16" name="Rectangle 15"/>
+          <p:cNvSpPr/>
+          <p:nvPr/>
+        </p:nvSpPr>
+        <p:spPr>
+          <a:xfrm>
+            <a:off x="3566160" y="2496312"/>
+            <a:ext cx="201168" cy="256032"/>
+          </a:xfrm>
+          <a:prstGeom prst="rect">
+            <a:avLst/>
+          </a:prstGeom>
+          <a:solidFill>
+            <a:srgbClr val="FF6B35"/>
+          </a:solidFill>
+          <a:ln>
+            <a:noFill/>
+          </a:ln>
+        </p:spPr>
+        <p:style>
+          <a:lnRef idx="1">
+            <a:schemeClr val="accent1"/>
+          </a:lnRef>
+          <a:fillRef idx="3">
+            <a:schemeClr val="accent1"/>
+          </a:fillRef>
+          <a:effectRef idx="2">
+            <a:schemeClr val="accent1"/>
+          </a:effectRef>
+          <a:fontRef idx="minor">
+            <a:schemeClr val="lt1"/>
+          </a:fontRef>
+        </p:style>
+        <p:txBody>
+          <a:bodyPr rtlCol="0" anchor="ctr"/>
+          <a:lstStyle/>
+          <a:p>
+            <a:pPr algn="ctr"/>
+          </a:p>
+        </p:txBody>
+      </p:sp>
+      <p:sp>
+        <p:nvSpPr>
+          <p:cNvPr id="17" name="TextBox 16"/>
+          <p:cNvSpPr txBox="1"/>
+          <p:nvPr/>
+        </p:nvSpPr>
+        <p:spPr>
+          <a:xfrm>
+            <a:off x="3383279" y="1965960"/>
+            <a:ext cx="1371600" cy="457200"/>
+          </a:xfrm>
+          <a:prstGeom prst="rect">
+            <a:avLst/>
+          </a:prstGeom>
+          <a:noFill/>
+        </p:spPr>
+        <p:txBody>
+          <a:bodyPr wrap="none">
+            <a:spAutoFit/>
+          </a:bodyPr>
+          <a:lstStyle/>
+          <a:p/>
+          <a:p>
+            <a:pPr algn="ctr"/>
+            <a:r>
+              <a:rPr sz="1200" b="1" i="0">
+                <a:solidFill>
+                  <a:srgbClr val="FF6B35"/>
+                </a:solidFill>
+              </a:rPr>
+              <a:t>1900-05</a:t>
+            </a:r>
+          </a:p>
+        </p:txBody>
+      </p:sp>
+      <p:sp>
+        <p:nvSpPr>
+          <p:cNvPr id="18" name="TextBox 17"/>
+          <p:cNvSpPr txBox="1"/>
+          <p:nvPr/>
+        </p:nvSpPr>
+        <p:spPr>
+          <a:xfrm>
+            <a:off x="3291840" y="2880360"/>
+            <a:ext cx="1463040" cy="502920"/>
+          </a:xfrm>
+          <a:prstGeom prst="rect">
+            <a:avLst/>
+          </a:prstGeom>
+          <a:noFill/>
+        </p:spPr>
+        <p:txBody>
+          <a:bodyPr wrap="none">
+            <a:spAutoFit/>
+          </a:bodyPr>
+          <a:lstStyle/>
+          <a:p/>
+          <a:p>
+            <a:pPr algn="ctr"/>
+            <a:r>
+              <a:rPr sz="1000" b="1" i="0">
+                <a:solidFill>
+                  <a:srgbClr val="FFFFFF"/>
+                </a:solidFill>
+              </a:rPr>
+              <a:t>Rayleigh-
+Jeans</a:t>
+            </a:r>
+          </a:p>
+        </p:txBody>
+      </p:sp>
+      <p:sp>
+        <p:nvSpPr>
+          <p:cNvPr id="19" name="TextBox 18"/>
+          <p:cNvSpPr txBox="1"/>
+          <p:nvPr/>
+        </p:nvSpPr>
+        <p:spPr>
+          <a:xfrm>
+            <a:off x="3246120" y="3383280"/>
+            <a:ext cx="1554480" cy="640080"/>
+          </a:xfrm>
+          <a:prstGeom prst="rect">
+            <a:avLst/>
+          </a:prstGeom>
+          <a:noFill/>
+        </p:spPr>
+        <p:txBody>
+          <a:bodyPr wrap="none">
+            <a:spAutoFit/>
+          </a:bodyPr>
+          <a:lstStyle/>
+          <a:p/>
+          <a:p>
+            <a:pPr algn="ctr"/>
+            <a:r>
+              <a:rPr sz="900" b="0" i="0">
+                <a:solidFill>
+                  <a:srgbClr val="AAAABB"/>
+                </a:solidFill>
+              </a:rPr>
+              <a:t>Catástrofe UV</a:t>
+            </a:r>
+          </a:p>
+        </p:txBody>
+      </p:sp>
+      <p:sp>
+        <p:nvSpPr>
+          <p:cNvPr id="20" name="Rectangle 19"/>
+          <p:cNvSpPr/>
+          <p:nvPr/>
+        </p:nvSpPr>
+        <p:spPr>
+          <a:xfrm>
+            <a:off x="5212080" y="2496312"/>
+            <a:ext cx="201168" cy="256032"/>
+          </a:xfrm>
+          <a:prstGeom prst="rect">
+            <a:avLst/>
+          </a:prstGeom>
+          <a:solidFill>
+            <a:srgbClr val="7BFFC4"/>
+          </a:solidFill>
+          <a:ln>
+            <a:noFill/>
+          </a:ln>
+        </p:spPr>
+        <p:style>
+          <a:lnRef idx="1">
+            <a:schemeClr val="accent1"/>
+          </a:lnRef>
+          <a:fillRef idx="3">
+            <a:schemeClr val="accent1"/>
+          </a:fillRef>
+          <a:effectRef idx="2">
+            <a:schemeClr val="accent1"/>
+          </a:effectRef>
+          <a:fontRef idx="minor">
+            <a:schemeClr val="lt1"/>
+          </a:fontRef>
+        </p:style>
+        <p:txBody>
+          <a:bodyPr rtlCol="0" anchor="ctr"/>
+          <a:lstStyle/>
+          <a:p>
+            <a:pPr algn="ctr"/>
+          </a:p>
+        </p:txBody>
+      </p:sp>
+      <p:sp>
+        <p:nvSpPr>
+          <p:cNvPr id="21" name="TextBox 20"/>
+          <p:cNvSpPr txBox="1"/>
+          <p:nvPr/>
+        </p:nvSpPr>
+        <p:spPr>
+          <a:xfrm>
+            <a:off x="5029200" y="1965960"/>
+            <a:ext cx="1371600" cy="457200"/>
+          </a:xfrm>
+          <a:prstGeom prst="rect">
+            <a:avLst/>
+          </a:prstGeom>
+          <a:noFill/>
+        </p:spPr>
+        <p:txBody>
+          <a:bodyPr wrap="none">
+            <a:spAutoFit/>
+          </a:bodyPr>
+          <a:lstStyle/>
+          <a:p/>
+          <a:p>
+            <a:pPr algn="ctr"/>
+            <a:r>
+              <a:rPr sz="1200" b="1" i="0">
+                <a:solidFill>
+                  <a:srgbClr val="7BFFC4"/>
+                </a:solidFill>
+              </a:rPr>
+              <a:t>1900 ★</a:t>
+            </a:r>
+          </a:p>
+        </p:txBody>
+      </p:sp>
+      <p:sp>
+        <p:nvSpPr>
+          <p:cNvPr id="22" name="TextBox 21"/>
+          <p:cNvSpPr txBox="1"/>
+          <p:nvPr/>
+        </p:nvSpPr>
+        <p:spPr>
+          <a:xfrm>
+            <a:off x="4937760" y="2880360"/>
+            <a:ext cx="1463040" cy="502920"/>
+          </a:xfrm>
+          <a:prstGeom prst="rect">
+            <a:avLst/>
+          </a:prstGeom>
+          <a:noFill/>
+        </p:spPr>
+        <p:txBody>
+          <a:bodyPr wrap="none">
+            <a:spAutoFit/>
+          </a:bodyPr>
+          <a:lstStyle/>
+          <a:p/>
+          <a:p>
+            <a:pPr algn="ctr"/>
+            <a:r>
+              <a:rPr sz="1000" b="1" i="0">
+                <a:solidFill>
+                  <a:srgbClr val="FFFFFF"/>
+                </a:solidFill>
+              </a:rPr>
+              <a:t>Planck</a:t>
+            </a:r>
+          </a:p>
+        </p:txBody>
+      </p:sp>
+      <p:sp>
+        <p:nvSpPr>
+          <p:cNvPr id="23" name="TextBox 22"/>
+          <p:cNvSpPr txBox="1"/>
+          <p:nvPr/>
+        </p:nvSpPr>
+        <p:spPr>
+          <a:xfrm>
+            <a:off x="4892040" y="3383280"/>
+            <a:ext cx="1554480" cy="640080"/>
+          </a:xfrm>
+          <a:prstGeom prst="rect">
+            <a:avLst/>
+          </a:prstGeom>
+          <a:noFill/>
+        </p:spPr>
+        <p:txBody>
+          <a:bodyPr wrap="none">
+            <a:spAutoFit/>
+          </a:bodyPr>
+          <a:lstStyle/>
+          <a:p/>
+          <a:p>
+            <a:pPr algn="ctr"/>
+            <a:r>
+              <a:rPr sz="900" b="0" i="0">
+                <a:solidFill>
+                  <a:srgbClr val="AAAABB"/>
+                </a:solidFill>
+              </a:rPr>
+              <a:t>E = nhf</a:t>
+            </a:r>
+          </a:p>
+        </p:txBody>
+      </p:sp>
+      <p:sp>
+        <p:nvSpPr>
+          <p:cNvPr id="24" name="Rectangle 23"/>
+          <p:cNvSpPr/>
+          <p:nvPr/>
+        </p:nvSpPr>
+        <p:spPr>
+          <a:xfrm>
+            <a:off x="6858000" y="2496312"/>
+            <a:ext cx="201168" cy="256032"/>
+          </a:xfrm>
+          <a:prstGeom prst="rect">
+            <a:avLst/>
+          </a:prstGeom>
+          <a:solidFill>
+            <a:srgbClr val="FFE066"/>
+          </a:solidFill>
+          <a:ln>
+            <a:noFill/>
+          </a:ln>
+        </p:spPr>
+        <p:style>
+          <a:lnRef idx="1">
+            <a:schemeClr val="accent1"/>
+          </a:lnRef>
+          <a:fillRef idx="3">
+            <a:schemeClr val="accent1"/>
+          </a:fillRef>
+          <a:effectRef idx="2">
+            <a:schemeClr val="accent1"/>
+          </a:effectRef>
+          <a:fontRef idx="minor">
+            <a:schemeClr val="lt1"/>
+          </a:fontRef>
+        </p:style>
+        <p:txBody>
+          <a:bodyPr rtlCol="0" anchor="ctr"/>
+          <a:lstStyle/>
+          <a:p>
+            <a:pPr algn="ctr"/>
+          </a:p>
+        </p:txBody>
+      </p:sp>
+      <p:sp>
+        <p:nvSpPr>
+          <p:cNvPr id="25" name="TextBox 24"/>
+          <p:cNvSpPr txBox="1"/>
+          <p:nvPr/>
+        </p:nvSpPr>
+        <p:spPr>
+          <a:xfrm>
+            <a:off x="6675120" y="1965960"/>
+            <a:ext cx="1371600" cy="457200"/>
+          </a:xfrm>
+          <a:prstGeom prst="rect">
+            <a:avLst/>
+          </a:prstGeom>
+          <a:noFill/>
+        </p:spPr>
+        <p:txBody>
+          <a:bodyPr wrap="none">
+            <a:spAutoFit/>
+          </a:bodyPr>
+          <a:lstStyle/>
+          <a:p/>
+          <a:p>
+            <a:pPr algn="ctr"/>
+            <a:r>
+              <a:rPr sz="1200" b="1" i="0">
+                <a:solidFill>
+                  <a:srgbClr val="FFE066"/>
+                </a:solidFill>
+              </a:rPr>
+              <a:t>1905</a:t>
+            </a:r>
+          </a:p>
+        </p:txBody>
+      </p:sp>
+      <p:sp>
+        <p:nvSpPr>
+          <p:cNvPr id="26" name="TextBox 25"/>
+          <p:cNvSpPr txBox="1"/>
+          <p:nvPr/>
+        </p:nvSpPr>
+        <p:spPr>
+          <a:xfrm>
+            <a:off x="6583680" y="2880360"/>
+            <a:ext cx="1463040" cy="502920"/>
+          </a:xfrm>
+          <a:prstGeom prst="rect">
+            <a:avLst/>
+          </a:prstGeom>
+          <a:noFill/>
+        </p:spPr>
+        <p:txBody>
+          <a:bodyPr wrap="none">
+            <a:spAutoFit/>
+          </a:bodyPr>
+          <a:lstStyle/>
+          <a:p/>
+          <a:p>
+            <a:pPr algn="ctr"/>
+            <a:r>
+              <a:rPr sz="1000" b="1" i="0">
+                <a:solidFill>
+                  <a:srgbClr val="FFFFFF"/>
+                </a:solidFill>
+              </a:rPr>
+              <a:t>Einstein</a:t>
+            </a:r>
+          </a:p>
+        </p:txBody>
+      </p:sp>
+      <p:sp>
+        <p:nvSpPr>
+          <p:cNvPr id="27" name="TextBox 26"/>
+          <p:cNvSpPr txBox="1"/>
+          <p:nvPr/>
+        </p:nvSpPr>
+        <p:spPr>
+          <a:xfrm>
+            <a:off x="6537960" y="3383280"/>
+            <a:ext cx="1554480" cy="640080"/>
+          </a:xfrm>
+          <a:prstGeom prst="rect">
+            <a:avLst/>
+          </a:prstGeom>
+          <a:noFill/>
+        </p:spPr>
+        <p:txBody>
+          <a:bodyPr wrap="none">
+            <a:spAutoFit/>
+          </a:bodyPr>
+          <a:lstStyle/>
+          <a:p/>
+          <a:p>
+            <a:pPr algn="ctr"/>
+            <a:r>
+              <a:rPr sz="900" b="0" i="0">
+                <a:solidFill>
+                  <a:srgbClr val="AAAABB"/>
+                </a:solidFill>
+              </a:rPr>
+              <a:t>Fotones
+E = hf</a:t>
+            </a:r>
+          </a:p>
+        </p:txBody>
+      </p:sp>
+      <p:sp>
+        <p:nvSpPr>
+          <p:cNvPr id="28" name="Rectangle 27"/>
+          <p:cNvSpPr/>
+          <p:nvPr/>
+        </p:nvSpPr>
+        <p:spPr>
+          <a:xfrm>
+            <a:off x="8503920" y="2496312"/>
+            <a:ext cx="201168" cy="256032"/>
+          </a:xfrm>
+          <a:prstGeom prst="rect">
+            <a:avLst/>
+          </a:prstGeom>
+          <a:solidFill>
+            <a:srgbClr val="00C8FF"/>
+          </a:solidFill>
+          <a:ln>
+            <a:noFill/>
+          </a:ln>
+        </p:spPr>
+        <p:style>
+          <a:lnRef idx="1">
+            <a:schemeClr val="accent1"/>
+          </a:lnRef>
+          <a:fillRef idx="3">
+            <a:schemeClr val="accent1"/>
+          </a:fillRef>
+          <a:effectRef idx="2">
+            <a:schemeClr val="accent1"/>
+          </a:effectRef>
+          <a:fontRef idx="minor">
+            <a:schemeClr val="lt1"/>
+          </a:fontRef>
+        </p:style>
+        <p:txBody>
+          <a:bodyPr rtlCol="0" anchor="ctr"/>
+          <a:lstStyle/>
+          <a:p>
+            <a:pPr algn="ctr"/>
+          </a:p>
+        </p:txBody>
+      </p:sp>
+      <p:sp>
+        <p:nvSpPr>
+          <p:cNvPr id="29" name="TextBox 28"/>
+          <p:cNvSpPr txBox="1"/>
+          <p:nvPr/>
+        </p:nvSpPr>
+        <p:spPr>
+          <a:xfrm>
+            <a:off x="8321040" y="1965960"/>
+            <a:ext cx="1371600" cy="457200"/>
+          </a:xfrm>
+          <a:prstGeom prst="rect">
+            <a:avLst/>
+          </a:prstGeom>
+          <a:noFill/>
+        </p:spPr>
+        <p:txBody>
+          <a:bodyPr wrap="none">
+            <a:spAutoFit/>
+          </a:bodyPr>
+          <a:lstStyle/>
+          <a:p/>
+          <a:p>
+            <a:pPr algn="ctr"/>
+            <a:r>
+              <a:rPr sz="1200" b="1" i="0">
+                <a:solidFill>
+                  <a:srgbClr val="00C8FF"/>
+                </a:solidFill>
+              </a:rPr>
+              <a:t>1913</a:t>
+            </a:r>
+          </a:p>
+        </p:txBody>
+      </p:sp>
+      <p:sp>
+        <p:nvSpPr>
+          <p:cNvPr id="30" name="TextBox 29"/>
+          <p:cNvSpPr txBox="1"/>
+          <p:nvPr/>
+        </p:nvSpPr>
+        <p:spPr>
+          <a:xfrm>
+            <a:off x="8229600" y="2880360"/>
+            <a:ext cx="1463040" cy="502920"/>
+          </a:xfrm>
+          <a:prstGeom prst="rect">
+            <a:avLst/>
+          </a:prstGeom>
+          <a:noFill/>
+        </p:spPr>
+        <p:txBody>
+          <a:bodyPr wrap="none">
+            <a:spAutoFit/>
+          </a:bodyPr>
+          <a:lstStyle/>
+          <a:p/>
+          <a:p>
+            <a:pPr algn="ctr"/>
+            <a:r>
+              <a:rPr sz="1000" b="1" i="0">
+                <a:solidFill>
+                  <a:srgbClr val="FFFFFF"/>
+                </a:solidFill>
+              </a:rPr>
+              <a:t>Bohr</a:t>
+            </a:r>
+          </a:p>
+        </p:txBody>
+      </p:sp>
+      <p:sp>
+        <p:nvSpPr>
+          <p:cNvPr id="31" name="TextBox 30"/>
+          <p:cNvSpPr txBox="1"/>
+          <p:nvPr/>
+        </p:nvSpPr>
+        <p:spPr>
+          <a:xfrm>
+            <a:off x="8183880" y="3383280"/>
+            <a:ext cx="1554480" cy="640080"/>
+          </a:xfrm>
+          <a:prstGeom prst="rect">
+            <a:avLst/>
+          </a:prstGeom>
+          <a:noFill/>
+        </p:spPr>
+        <p:txBody>
+          <a:bodyPr wrap="none">
+            <a:spAutoFit/>
+          </a:bodyPr>
+          <a:lstStyle/>
+          <a:p/>
+          <a:p>
+            <a:pPr algn="ctr"/>
+            <a:r>
+              <a:rPr sz="900" b="0" i="0">
+                <a:solidFill>
+                  <a:srgbClr val="AAAABB"/>
+                </a:solidFill>
+              </a:rPr>
+              <a:t>L = nℏ
+E_n = -13.6/n²</a:t>
+            </a:r>
+          </a:p>
+        </p:txBody>
+      </p:sp>
+      <p:sp>
+        <p:nvSpPr>
+          <p:cNvPr id="32" name="Rectangle 31"/>
+          <p:cNvSpPr/>
+          <p:nvPr/>
+        </p:nvSpPr>
+        <p:spPr>
+          <a:xfrm>
+            <a:off x="10149840" y="2496312"/>
+            <a:ext cx="201168" cy="256032"/>
+          </a:xfrm>
+          <a:prstGeom prst="rect">
+            <a:avLst/>
+          </a:prstGeom>
+          <a:solidFill>
+            <a:srgbClr val="C084FC"/>
+          </a:solidFill>
+          <a:ln>
+            <a:noFill/>
+          </a:ln>
+        </p:spPr>
+        <p:style>
+          <a:lnRef idx="1">
+            <a:schemeClr val="accent1"/>
+          </a:lnRef>
+          <a:fillRef idx="3">
+            <a:schemeClr val="accent1"/>
+          </a:fillRef>
+          <a:effectRef idx="2">
+            <a:schemeClr val="accent1"/>
+          </a:effectRef>
+          <a:fontRef idx="minor">
+            <a:schemeClr val="lt1"/>
+          </a:fontRef>
+        </p:style>
+        <p:txBody>
+          <a:bodyPr rtlCol="0" anchor="ctr"/>
+          <a:lstStyle/>
+          <a:p>
+            <a:pPr algn="ctr"/>
+          </a:p>
+        </p:txBody>
+      </p:sp>
+      <p:sp>
+        <p:nvSpPr>
+          <p:cNvPr id="33" name="TextBox 32"/>
+          <p:cNvSpPr txBox="1"/>
+          <p:nvPr/>
+        </p:nvSpPr>
+        <p:spPr>
+          <a:xfrm>
+            <a:off x="9966960" y="1965960"/>
+            <a:ext cx="1371600" cy="457200"/>
+          </a:xfrm>
+          <a:prstGeom prst="rect">
+            <a:avLst/>
+          </a:prstGeom>
+          <a:noFill/>
+        </p:spPr>
+        <p:txBody>
+          <a:bodyPr wrap="none">
+            <a:spAutoFit/>
+          </a:bodyPr>
+          <a:lstStyle/>
+          <a:p/>
+          <a:p>
+            <a:pPr algn="ctr"/>
+            <a:r>
+              <a:rPr sz="1200" b="1" i="0">
+                <a:solidFill>
+                  <a:srgbClr val="C084FC"/>
+                </a:solidFill>
+              </a:rPr>
+              <a:t>1925-26</a:t>
+            </a:r>
+          </a:p>
+        </p:txBody>
+      </p:sp>
+      <p:sp>
+        <p:nvSpPr>
+          <p:cNvPr id="34" name="TextBox 33"/>
+          <p:cNvSpPr txBox="1"/>
+          <p:nvPr/>
+        </p:nvSpPr>
+        <p:spPr>
+          <a:xfrm>
+            <a:off x="9875520" y="2880360"/>
+            <a:ext cx="1463040" cy="502920"/>
+          </a:xfrm>
+          <a:prstGeom prst="rect">
+            <a:avLst/>
+          </a:prstGeom>
+          <a:noFill/>
+        </p:spPr>
+        <p:txBody>
+          <a:bodyPr wrap="none">
+            <a:spAutoFit/>
+          </a:bodyPr>
+          <a:lstStyle/>
+          <a:p/>
+          <a:p>
+            <a:pPr algn="ctr"/>
+            <a:r>
+              <a:rPr sz="1000" b="1" i="0">
+                <a:solidFill>
+                  <a:srgbClr val="FFFFFF"/>
+                </a:solidFill>
+              </a:rPr>
+              <a:t>Heisenberg
+Schrödinger</a:t>
+            </a:r>
+          </a:p>
+        </p:txBody>
+      </p:sp>
+      <p:sp>
+        <p:nvSpPr>
+          <p:cNvPr id="35" name="TextBox 34"/>
+          <p:cNvSpPr txBox="1"/>
+          <p:nvPr/>
+        </p:nvSpPr>
+        <p:spPr>
+          <a:xfrm>
+            <a:off x="9829800" y="3383280"/>
+            <a:ext cx="1554480" cy="640080"/>
+          </a:xfrm>
+          <a:prstGeom prst="rect">
+            <a:avLst/>
+          </a:prstGeom>
+          <a:noFill/>
+        </p:spPr>
+        <p:txBody>
+          <a:bodyPr wrap="none">
+            <a:spAutoFit/>
+          </a:bodyPr>
+          <a:lstStyle/>
+          <a:p/>
+          <a:p>
+            <a:pPr algn="ctr"/>
+            <a:r>
+              <a:rPr sz="900" b="0" i="0">
+                <a:solidFill>
+                  <a:srgbClr val="AAAABB"/>
+                </a:solidFill>
+              </a:rPr>
+              <a:t>ĤΨ = EΨ</a:t>
+            </a:r>
+          </a:p>
+        </p:txBody>
+      </p:sp>
+      <p:sp>
+        <p:nvSpPr>
+          <p:cNvPr id="36" name="Rectangle 35"/>
+          <p:cNvSpPr/>
+          <p:nvPr/>
+        </p:nvSpPr>
+        <p:spPr>
+          <a:xfrm>
+            <a:off x="365760" y="4251960"/>
+            <a:ext cx="11430000" cy="27432"/>
+          </a:xfrm>
+          <a:prstGeom prst="rect">
+            <a:avLst/>
+          </a:prstGeom>
+          <a:solidFill>
+            <a:srgbClr val="FFE066"/>
+          </a:solidFill>
+          <a:ln>
+            <a:noFill/>
+          </a:ln>
+        </p:spPr>
+        <p:style>
+          <a:lnRef idx="1">
+            <a:schemeClr val="accent1"/>
+          </a:lnRef>
+          <a:fillRef idx="3">
+            <a:schemeClr val="accent1"/>
+          </a:fillRef>
+          <a:effectRef idx="2">
+            <a:schemeClr val="accent1"/>
+          </a:effectRef>
+          <a:fontRef idx="minor">
+            <a:schemeClr val="lt1"/>
+          </a:fontRef>
+        </p:style>
+        <p:txBody>
+          <a:bodyPr rtlCol="0" anchor="ctr"/>
+          <a:lstStyle/>
+          <a:p>
+            <a:pPr algn="ctr"/>
+          </a:p>
+        </p:txBody>
+      </p:sp>
+      <p:sp>
+        <p:nvSpPr>
+          <p:cNvPr id="37" name="TextBox 36"/>
+          <p:cNvSpPr txBox="1"/>
+          <p:nvPr/>
+        </p:nvSpPr>
+        <p:spPr>
+          <a:xfrm>
+            <a:off x="365760" y="4389120"/>
+            <a:ext cx="11430000" cy="365760"/>
+          </a:xfrm>
+          <a:prstGeom prst="rect">
+            <a:avLst/>
+          </a:prstGeom>
+          <a:noFill/>
+        </p:spPr>
+        <p:txBody>
+          <a:bodyPr wrap="none">
+            <a:spAutoFit/>
+          </a:bodyPr>
+          <a:lstStyle/>
+          <a:p/>
+          <a:p>
+            <a:pPr algn="l"/>
+            <a:r>
+              <a:rPr sz="1400" b="1" i="0">
+                <a:solidFill>
+                  <a:srgbClr val="FFE066"/>
+                </a:solidFill>
+              </a:rPr>
+              <a:t>Impacto en la Ciencia y Tecnología Moderna</a:t>
+            </a:r>
+          </a:p>
+        </p:txBody>
+      </p:sp>
+      <p:sp>
+        <p:nvSpPr>
+          <p:cNvPr id="38" name="Rectangle 37"/>
+          <p:cNvSpPr/>
+          <p:nvPr/>
+        </p:nvSpPr>
+        <p:spPr>
+          <a:xfrm>
+            <a:off x="365760" y="4846320"/>
+            <a:ext cx="3474720" cy="1051560"/>
+          </a:xfrm>
+          <a:prstGeom prst="rect">
+            <a:avLst/>
+          </a:prstGeom>
+          <a:solidFill>
+            <a:srgbClr val="122033"/>
+          </a:solidFill>
+          <a:ln>
+            <a:noFill/>
+          </a:ln>
+        </p:spPr>
+        <p:style>
+          <a:lnRef idx="1">
+            <a:schemeClr val="accent1"/>
+          </a:lnRef>
+          <a:fillRef idx="3">
+            <a:schemeClr val="accent1"/>
+          </a:fillRef>
+          <a:effectRef idx="2">
+            <a:schemeClr val="accent1"/>
+          </a:effectRef>
+          <a:fontRef idx="minor">
+            <a:schemeClr val="lt1"/>
+          </a:fontRef>
+        </p:style>
+        <p:txBody>
+          <a:bodyPr rtlCol="0" anchor="ctr"/>
+          <a:lstStyle/>
+          <a:p>
+            <a:pPr algn="ctr"/>
+          </a:p>
+        </p:txBody>
+      </p:sp>
+      <p:sp>
+        <p:nvSpPr>
+          <p:cNvPr id="39" name="TextBox 38"/>
+          <p:cNvSpPr txBox="1"/>
+          <p:nvPr/>
+        </p:nvSpPr>
+        <p:spPr>
+          <a:xfrm>
+            <a:off x="457200" y="4892040"/>
+            <a:ext cx="3291840" cy="960120"/>
           </a:xfrm>
           <a:prstGeom prst="rect">
             <a:avLst/>
@@ -5480,42 +6654,286 @@
             <a:spAutoFit/>
           </a:bodyPr>
           <a:lstStyle/>
-          <a:p>
-            <a:pPr>
-              <a:spcAft>
-                <a:spcPts val="800"/>
-              </a:spcAft>
-              <a:defRPr sz="1600" b="1">
-                <a:solidFill>
-                  <a:srgbClr val="38BDF8"/>
-                </a:solidFill>
-              </a:defRPr>
-            </a:pPr>
-            <a:r>
-              <a:t>Impacto en la Ciencia y Tecnología Moderna</a:t>
-            </a:r>
-          </a:p>
-          <a:p>
-            <a:pPr>
-              <a:lnSpc>
-                <a:spcPct val="130000"/>
-              </a:lnSpc>
-              <a:defRPr sz="1200">
-                <a:solidFill>
-                  <a:srgbClr val="F8FAFC"/>
-                </a:solidFill>
-              </a:defRPr>
-            </a:pPr>
-            <a:r>
-              <a:t>• De la Desesperación a la Revolución: Planck calificó su hipótesis como 'un acto de desesperación'. Sin embargo, inauguró el cambio de paradigma más drástico de la historia de la física.</a:t>
-            </a:r>
-            <a:br/>
-            <a:r>
-              <a:t>• Fundamento Tecnológico Actual: La cuantización de la energía sustenta el desarrollo de semiconductores, láseres, sensores CMOS/CCD de cámaras satelitales y espectrometría de masa.</a:t>
-            </a:r>
-            <a:br/>
-            <a:r>
-              <a:t>• Cierre Epistemológico: La catástrofe ultravioleta no fue una falla menor, sino la grieta por donde nació la física del siglo XX.</a:t>
+          <a:p/>
+          <a:p>
+            <a:pPr algn="l"/>
+            <a:r>
+              <a:rPr sz="1200" b="1" i="0">
+                <a:solidFill>
+                  <a:srgbClr val="7BFFC4"/>
+                </a:solidFill>
+              </a:rPr>
+              <a:t>💡 Semiconductores</a:t>
+            </a:r>
+          </a:p>
+          <a:p>
+            <a:pPr algn="l"/>
+            <a:r>
+              <a:rPr sz="1000" b="0" i="0">
+                <a:solidFill>
+                  <a:srgbClr val="FFFFFF"/>
+                </a:solidFill>
+              </a:rPr>
+              <a:t>La banda prohibida es
+un efecto de cuantización</a:t>
+            </a:r>
+          </a:p>
+        </p:txBody>
+      </p:sp>
+      <p:sp>
+        <p:nvSpPr>
+          <p:cNvPr id="40" name="Rectangle 39"/>
+          <p:cNvSpPr/>
+          <p:nvPr/>
+        </p:nvSpPr>
+        <p:spPr>
+          <a:xfrm>
+            <a:off x="4206240" y="4846320"/>
+            <a:ext cx="3474720" cy="1051560"/>
+          </a:xfrm>
+          <a:prstGeom prst="rect">
+            <a:avLst/>
+          </a:prstGeom>
+          <a:solidFill>
+            <a:srgbClr val="122033"/>
+          </a:solidFill>
+          <a:ln>
+            <a:noFill/>
+          </a:ln>
+        </p:spPr>
+        <p:style>
+          <a:lnRef idx="1">
+            <a:schemeClr val="accent1"/>
+          </a:lnRef>
+          <a:fillRef idx="3">
+            <a:schemeClr val="accent1"/>
+          </a:fillRef>
+          <a:effectRef idx="2">
+            <a:schemeClr val="accent1"/>
+          </a:effectRef>
+          <a:fontRef idx="minor">
+            <a:schemeClr val="lt1"/>
+          </a:fontRef>
+        </p:style>
+        <p:txBody>
+          <a:bodyPr rtlCol="0" anchor="ctr"/>
+          <a:lstStyle/>
+          <a:p>
+            <a:pPr algn="ctr"/>
+          </a:p>
+        </p:txBody>
+      </p:sp>
+      <p:sp>
+        <p:nvSpPr>
+          <p:cNvPr id="41" name="TextBox 40"/>
+          <p:cNvSpPr txBox="1"/>
+          <p:nvPr/>
+        </p:nvSpPr>
+        <p:spPr>
+          <a:xfrm>
+            <a:off x="4297679" y="4892040"/>
+            <a:ext cx="3291840" cy="960120"/>
+          </a:xfrm>
+          <a:prstGeom prst="rect">
+            <a:avLst/>
+          </a:prstGeom>
+          <a:noFill/>
+        </p:spPr>
+        <p:txBody>
+          <a:bodyPr wrap="square">
+            <a:spAutoFit/>
+          </a:bodyPr>
+          <a:lstStyle/>
+          <a:p/>
+          <a:p>
+            <a:pPr algn="l"/>
+            <a:r>
+              <a:rPr sz="1200" b="1" i="0">
+                <a:solidFill>
+                  <a:srgbClr val="7BFFC4"/>
+                </a:solidFill>
+              </a:rPr>
+              <a:t>📡 Sensores CMOS/CCD</a:t>
+            </a:r>
+          </a:p>
+          <a:p>
+            <a:pPr algn="l"/>
+            <a:r>
+              <a:rPr sz="1000" b="0" i="0">
+                <a:solidFill>
+                  <a:srgbClr val="FFFFFF"/>
+                </a:solidFill>
+              </a:rPr>
+              <a:t>Cámaras satelitales
+detectan fotones individuales</a:t>
+            </a:r>
+          </a:p>
+        </p:txBody>
+      </p:sp>
+      <p:sp>
+        <p:nvSpPr>
+          <p:cNvPr id="42" name="Rectangle 41"/>
+          <p:cNvSpPr/>
+          <p:nvPr/>
+        </p:nvSpPr>
+        <p:spPr>
+          <a:xfrm>
+            <a:off x="8046720" y="4846320"/>
+            <a:ext cx="3474720" cy="1051560"/>
+          </a:xfrm>
+          <a:prstGeom prst="rect">
+            <a:avLst/>
+          </a:prstGeom>
+          <a:solidFill>
+            <a:srgbClr val="122033"/>
+          </a:solidFill>
+          <a:ln>
+            <a:noFill/>
+          </a:ln>
+        </p:spPr>
+        <p:style>
+          <a:lnRef idx="1">
+            <a:schemeClr val="accent1"/>
+          </a:lnRef>
+          <a:fillRef idx="3">
+            <a:schemeClr val="accent1"/>
+          </a:fillRef>
+          <a:effectRef idx="2">
+            <a:schemeClr val="accent1"/>
+          </a:effectRef>
+          <a:fontRef idx="minor">
+            <a:schemeClr val="lt1"/>
+          </a:fontRef>
+        </p:style>
+        <p:txBody>
+          <a:bodyPr rtlCol="0" anchor="ctr"/>
+          <a:lstStyle/>
+          <a:p>
+            <a:pPr algn="ctr"/>
+          </a:p>
+        </p:txBody>
+      </p:sp>
+      <p:sp>
+        <p:nvSpPr>
+          <p:cNvPr id="43" name="TextBox 42"/>
+          <p:cNvSpPr txBox="1"/>
+          <p:nvPr/>
+        </p:nvSpPr>
+        <p:spPr>
+          <a:xfrm>
+            <a:off x="8138160" y="4892040"/>
+            <a:ext cx="3291840" cy="960120"/>
+          </a:xfrm>
+          <a:prstGeom prst="rect">
+            <a:avLst/>
+          </a:prstGeom>
+          <a:noFill/>
+        </p:spPr>
+        <p:txBody>
+          <a:bodyPr wrap="square">
+            <a:spAutoFit/>
+          </a:bodyPr>
+          <a:lstStyle/>
+          <a:p/>
+          <a:p>
+            <a:pPr algn="l"/>
+            <a:r>
+              <a:rPr sz="1200" b="1" i="0">
+                <a:solidFill>
+                  <a:srgbClr val="7BFFC4"/>
+                </a:solidFill>
+              </a:rPr>
+              <a:t>🔬 Láseres / LiDAR</a:t>
+            </a:r>
+          </a:p>
+          <a:p>
+            <a:pPr algn="l"/>
+            <a:r>
+              <a:rPr sz="1000" b="0" i="0">
+                <a:solidFill>
+                  <a:srgbClr val="FFFFFF"/>
+                </a:solidFill>
+              </a:rPr>
+              <a:t>Espectrometría: emisi
+ón cuántica pura</a:t>
+            </a:r>
+          </a:p>
+        </p:txBody>
+      </p:sp>
+      <p:sp>
+        <p:nvSpPr>
+          <p:cNvPr id="44" name="Rectangle 43"/>
+          <p:cNvSpPr/>
+          <p:nvPr/>
+        </p:nvSpPr>
+        <p:spPr>
+          <a:xfrm>
+            <a:off x="914400" y="6035040"/>
+            <a:ext cx="10332720" cy="36576"/>
+          </a:xfrm>
+          <a:prstGeom prst="rect">
+            <a:avLst/>
+          </a:prstGeom>
+          <a:solidFill>
+            <a:srgbClr val="FFE066"/>
+          </a:solidFill>
+          <a:ln>
+            <a:noFill/>
+          </a:ln>
+        </p:spPr>
+        <p:style>
+          <a:lnRef idx="1">
+            <a:schemeClr val="accent1"/>
+          </a:lnRef>
+          <a:fillRef idx="3">
+            <a:schemeClr val="accent1"/>
+          </a:fillRef>
+          <a:effectRef idx="2">
+            <a:schemeClr val="accent1"/>
+          </a:effectRef>
+          <a:fontRef idx="minor">
+            <a:schemeClr val="lt1"/>
+          </a:fontRef>
+        </p:style>
+        <p:txBody>
+          <a:bodyPr rtlCol="0" anchor="ctr"/>
+          <a:lstStyle/>
+          <a:p>
+            <a:pPr algn="ctr"/>
+          </a:p>
+        </p:txBody>
+      </p:sp>
+      <p:sp>
+        <p:nvSpPr>
+          <p:cNvPr id="45" name="TextBox 44"/>
+          <p:cNvSpPr txBox="1"/>
+          <p:nvPr/>
+        </p:nvSpPr>
+        <p:spPr>
+          <a:xfrm>
+            <a:off x="914400" y="6144768"/>
+            <a:ext cx="10332720" cy="548640"/>
+          </a:xfrm>
+          <a:prstGeom prst="rect">
+            <a:avLst/>
+          </a:prstGeom>
+          <a:noFill/>
+        </p:spPr>
+        <p:txBody>
+          <a:bodyPr wrap="square">
+            <a:spAutoFit/>
+          </a:bodyPr>
+          <a:lstStyle/>
+          <a:p/>
+          <a:p>
+            <a:pPr algn="ctr"/>
+            <a:r>
+              <a:rPr sz="1400" b="0" i="1">
+                <a:solidFill>
+                  <a:srgbClr val="FFE066"/>
+                </a:solidFill>
+              </a:rPr>
+              <a:t>"La catástrofe ultravioleta no fue una falla menor — fue la grieta por donde entró toda la física cuántica."</a:t>
             </a:r>
           </a:p>
         </p:txBody>
@@ -5846,324 +7264,4 @@
   </a:objectDefaults>
   <a:extraClrSchemeLst/>
 </a:theme>
-</file>
-
-<file path=ppt/theme/theme2.xml><?xml version="1.0" encoding="utf-8"?>
-<a:theme xmlns:a="http://schemas.openxmlformats.org/drawingml/2006/main" name="Office Theme">
-  <a:themeElements>
-    <a:clrScheme name="Office">
-      <a:dk1>
-        <a:sysClr val="windowText" lastClr="000000"/>
-      </a:dk1>
-      <a:lt1>
-        <a:sysClr val="window" lastClr="FFFFFF"/>
-      </a:lt1>
-      <a:dk2>
-        <a:srgbClr val="1F497D"/>
-      </a:dk2>
-      <a:lt2>
-        <a:srgbClr val="EEECE1"/>
-      </a:lt2>
-      <a:accent1>
-        <a:srgbClr val="4F81BD"/>
-      </a:accent1>
-      <a:accent2>
-        <a:srgbClr val="C0504D"/>
-      </a:accent2>
-      <a:accent3>
-        <a:srgbClr val="9BBB59"/>
-      </a:accent3>
-      <a:accent4>
-        <a:srgbClr val="8064A2"/>
-      </a:accent4>
-      <a:accent5>
-        <a:srgbClr val="4BACC6"/>
-      </a:accent5>
-      <a:accent6>
-        <a:srgbClr val="F79646"/>
-      </a:accent6>
-      <a:hlink>
-        <a:srgbClr val="0000FF"/>
-      </a:hlink>
-      <a:folHlink>
-        <a:srgbClr val="800080"/>
-      </a:folHlink>
-    </a:clrScheme>
-    <a:fontScheme name="Office">
-      <a:majorFont>
-        <a:latin typeface="Calibri"/>
-        <a:ea typeface=""/>
-        <a:cs typeface=""/>
-        <a:font script="Jpan" typeface="ＭＳ Ｐゴシック"/>
-        <a:font script="Hang" typeface="맑은 고딕"/>
-        <a:font script="Hans" typeface="宋体"/>
-        <a:font script="Hant" typeface="新細明體"/>
-        <a:font script="Arab" typeface="Times New Roman"/>
-        <a:font script="Hebr" typeface="Times New Roman"/>
-        <a:font script="Thai" typeface="Angsana New"/>
-        <a:font script="Ethi" typeface="Nyala"/>
-        <a:font script="Beng" typeface="Vrinda"/>
-        <a:font script="Gujr" typeface="Shruti"/>
-        <a:font script="Khmr" typeface="MoolBoran"/>
-        <a:font script="Knda" typeface="Tunga"/>
-        <a:font script="Guru" typeface="Raavi"/>
-        <a:font script="Cans" typeface="Euphemia"/>
-        <a:font script="Cher" typeface="Plantagenet Cherokee"/>
-        <a:font script="Yiii" typeface="Microsoft Yi Baiti"/>
-        <a:font script="Tibt" typeface="Microsoft Himalaya"/>
-        <a:font script="Thaa" typeface="MV Boli"/>
-        <a:font script="Deva" typeface="Mangal"/>
-        <a:font script="Telu" typeface="Gautami"/>
-        <a:font script="Taml" typeface="Latha"/>
-        <a:font script="Syrc" typeface="Estrangelo Edessa"/>
-        <a:font script="Orya" typeface="Kalinga"/>
-        <a:font script="Mlym" typeface="Kartika"/>
-        <a:font script="Laoo" typeface="DokChampa"/>
-        <a:font script="Sinh" typeface="Iskoola Pota"/>
-        <a:font script="Mong" typeface="Mongolian Baiti"/>
-        <a:font script="Viet" typeface="Times New Roman"/>
-        <a:font script="Uigh" typeface="Microsoft Uighur"/>
-        <a:font script="Geor" typeface="Sylfaen"/>
-      </a:majorFont>
-      <a:minorFont>
-        <a:latin typeface="Calibri"/>
-        <a:ea typeface=""/>
-        <a:cs typeface=""/>
-        <a:font script="Jpan" typeface="ＭＳ Ｐゴシック"/>
-        <a:font script="Hang" typeface="맑은 고딕"/>
-        <a:font script="Hans" typeface="宋体"/>
-        <a:font script="Hant" typeface="新細明體"/>
-        <a:font script="Arab" typeface="Arial"/>
-        <a:font script="Hebr" typeface="Arial"/>
-        <a:font script="Thai" typeface="Cordia New"/>
-        <a:font script="Ethi" typeface="Nyala"/>
-        <a:font script="Beng" typeface="Vrinda"/>
-        <a:font script="Gujr" typeface="Shruti"/>
-        <a:font script="Khmr" typeface="DaunPenh"/>
-        <a:font script="Knda" typeface="Tunga"/>
-        <a:font script="Guru" typeface="Raavi"/>
-        <a:font script="Cans" typeface="Euphemia"/>
-        <a:font script="Cher" typeface="Plantagenet Cherokee"/>
-        <a:font script="Yiii" typeface="Microsoft Yi Baiti"/>
-        <a:font script="Tibt" typeface="Microsoft Himalaya"/>
-        <a:font script="Thaa" typeface="MV Boli"/>
-        <a:font script="Deva" typeface="Mangal"/>
-        <a:font script="Telu" typeface="Gautami"/>
-        <a:font script="Taml" typeface="Latha"/>
-        <a:font script="Syrc" typeface="Estrangelo Edessa"/>
-        <a:font script="Orya" typeface="Kalinga"/>
-        <a:font script="Mlym" typeface="Kartika"/>
-        <a:font script="Laoo" typeface="DokChampa"/>
-        <a:font script="Sinh" typeface="Iskoola Pota"/>
-        <a:font script="Mong" typeface="Mongolian Baiti"/>
-        <a:font script="Viet" typeface="Arial"/>
-        <a:font script="Uigh" typeface="Microsoft Uighur"/>
-        <a:font script="Geor" typeface="Sylfaen"/>
-      </a:minorFont>
-    </a:fontScheme>
-    <a:fmtScheme name="Office">
-      <a:fillStyleLst>
-        <a:solidFill>
-          <a:schemeClr val="phClr"/>
-        </a:solidFill>
-        <a:gradFill rotWithShape="1">
-          <a:gsLst>
-            <a:gs pos="0">
-              <a:schemeClr val="phClr">
-                <a:tint val="50000"/>
-                <a:satMod val="300000"/>
-              </a:schemeClr>
-            </a:gs>
-            <a:gs pos="35000">
-              <a:schemeClr val="phClr">
-                <a:tint val="37000"/>
-                <a:satMod val="300000"/>
-              </a:schemeClr>
-            </a:gs>
-            <a:gs pos="100000">
-              <a:schemeClr val="phClr">
-                <a:tint val="15000"/>
-                <a:satMod val="350000"/>
-              </a:schemeClr>
-            </a:gs>
-          </a:gsLst>
-          <a:lin ang="16200000" scaled="1"/>
-        </a:gradFill>
-        <a:gradFill rotWithShape="1">
-          <a:gsLst>
-            <a:gs pos="0">
-              <a:schemeClr val="phClr">
-                <a:tint val="100000"/>
-                <a:shade val="100000"/>
-                <a:satMod val="130000"/>
-              </a:schemeClr>
-            </a:gs>
-            <a:gs pos="100000">
-              <a:schemeClr val="phClr">
-                <a:tint val="50000"/>
-                <a:shade val="100000"/>
-                <a:satMod val="350000"/>
-              </a:schemeClr>
-            </a:gs>
-          </a:gsLst>
-          <a:lin ang="16200000" scaled="0"/>
-        </a:gradFill>
-      </a:fillStyleLst>
-      <a:lnStyleLst>
-        <a:ln w="9525" cap="flat" cmpd="sng" algn="ctr">
-          <a:solidFill>
-            <a:schemeClr val="phClr">
-              <a:shade val="95000"/>
-              <a:satMod val="105000"/>
-            </a:schemeClr>
-          </a:solidFill>
-          <a:prstDash val="solid"/>
-        </a:ln>
-        <a:ln w="25400" cap="flat" cmpd="sng" algn="ctr">
-          <a:solidFill>
-            <a:schemeClr val="phClr"/>
-          </a:solidFill>
-          <a:prstDash val="solid"/>
-        </a:ln>
-        <a:ln w="38100" cap="flat" cmpd="sng" algn="ctr">
-          <a:solidFill>
-            <a:schemeClr val="phClr"/>
-          </a:solidFill>
-          <a:prstDash val="solid"/>
-        </a:ln>
-      </a:lnStyleLst>
-      <a:effectStyleLst>
-        <a:effectStyle>
-          <a:effectLst>
-            <a:outerShdw blurRad="40000" dist="20000" dir="5400000" rotWithShape="0">
-              <a:srgbClr val="000000">
-                <a:alpha val="38000"/>
-              </a:srgbClr>
-            </a:outerShdw>
-          </a:effectLst>
-        </a:effectStyle>
-        <a:effectStyle>
-          <a:effectLst>
-            <a:outerShdw blurRad="40000" dist="23000" dir="5400000" rotWithShape="0">
-              <a:srgbClr val="000000">
-                <a:alpha val="35000"/>
-              </a:srgbClr>
-            </a:outerShdw>
-          </a:effectLst>
-        </a:effectStyle>
-        <a:effectStyle>
-          <a:effectLst>
-            <a:outerShdw blurRad="40000" dist="23000" dir="5400000" rotWithShape="0">
-              <a:srgbClr val="000000">
-                <a:alpha val="35000"/>
-              </a:srgbClr>
-            </a:outerShdw>
-          </a:effectLst>
-          <a:scene3d>
-            <a:camera prst="orthographicFront">
-              <a:rot lat="0" lon="0" rev="0"/>
-            </a:camera>
-            <a:lightRig rig="threePt" dir="t">
-              <a:rot lat="0" lon="0" rev="1200000"/>
-            </a:lightRig>
-          </a:scene3d>
-          <a:sp3d>
-            <a:bevelT w="63500" h="25400"/>
-          </a:sp3d>
-        </a:effectStyle>
-      </a:effectStyleLst>
-      <a:bgFillStyleLst>
-        <a:solidFill>
-          <a:schemeClr val="phClr"/>
-        </a:solidFill>
-        <a:gradFill rotWithShape="1">
-          <a:gsLst>
-            <a:gs pos="0">
-              <a:schemeClr val="phClr">
-                <a:tint val="40000"/>
-                <a:satMod val="350000"/>
-              </a:schemeClr>
-            </a:gs>
-            <a:gs pos="40000">
-              <a:schemeClr val="phClr">
-                <a:tint val="45000"/>
-                <a:shade val="99000"/>
-                <a:satMod val="350000"/>
-              </a:schemeClr>
-            </a:gs>
-            <a:gs pos="100000">
-              <a:schemeClr val="phClr">
-                <a:shade val="20000"/>
-                <a:satMod val="255000"/>
-              </a:schemeClr>
-            </a:gs>
-          </a:gsLst>
-          <a:path path="circle">
-            <a:fillToRect l="50000" t="-80000" r="50000" b="180000"/>
-          </a:path>
-        </a:gradFill>
-        <a:gradFill rotWithShape="1">
-          <a:gsLst>
-            <a:gs pos="0">
-              <a:schemeClr val="phClr">
-                <a:tint val="80000"/>
-                <a:satMod val="300000"/>
-              </a:schemeClr>
-            </a:gs>
-            <a:gs pos="100000">
-              <a:schemeClr val="phClr">
-                <a:shade val="30000"/>
-                <a:satMod val="200000"/>
-              </a:schemeClr>
-            </a:gs>
-          </a:gsLst>
-          <a:path path="circle">
-            <a:fillToRect l="50000" t="50000" r="50000" b="50000"/>
-          </a:path>
-        </a:gradFill>
-      </a:bgFillStyleLst>
-    </a:fmtScheme>
-  </a:themeElements>
-  <a:objectDefaults>
-    <a:spDef>
-      <a:spPr/>
-      <a:bodyPr/>
-      <a:lstStyle/>
-      <a:style>
-        <a:lnRef idx="1">
-          <a:schemeClr val="accent1"/>
-        </a:lnRef>
-        <a:fillRef idx="3">
-          <a:schemeClr val="accent1"/>
-        </a:fillRef>
-        <a:effectRef idx="2">
-          <a:schemeClr val="accent1"/>
-        </a:effectRef>
-        <a:fontRef idx="minor">
-          <a:schemeClr val="lt1"/>
-        </a:fontRef>
-      </a:style>
-    </a:spDef>
-    <a:lnDef>
-      <a:spPr/>
-      <a:bodyPr/>
-      <a:lstStyle/>
-      <a:style>
-        <a:lnRef idx="2">
-          <a:schemeClr val="accent1"/>
-        </a:lnRef>
-        <a:fillRef idx="0">
-          <a:schemeClr val="accent1"/>
-        </a:fillRef>
-        <a:effectRef idx="1">
-          <a:schemeClr val="accent1"/>
-        </a:effectRef>
-        <a:fontRef idx="minor">
-          <a:schemeClr val="tx1"/>
-        </a:fontRef>
-      </a:style>
-    </a:lnDef>
-  </a:objectDefaults>
-  <a:extraClrSchemeLst/>
-</a:theme>
 </file>
--- a/02_TeoriaCuanticaTemprana/Evaluacion/Evaluacion_1_Presentacion.pptx
+++ b/02_TeoriaCuanticaTemprana/Evaluacion/Evaluacion_1_Presentacion.pptx
@@ -3159,8 +3159,8 @@
         </p:blipFill>
         <p:spPr>
           <a:xfrm>
-            <a:off x="6217920" y="914400"/>
-            <a:ext cx="5669280" cy="3291840"/>
+            <a:off x="6035040" y="731520"/>
+            <a:ext cx="5943600" cy="3657600"/>
           </a:xfrm>
           <a:prstGeom prst="rect">
             <a:avLst/>
@@ -3175,7 +3175,7 @@
         </p:nvSpPr>
         <p:spPr>
           <a:xfrm>
-            <a:off x="457200" y="914400"/>
+            <a:off x="457200" y="822960"/>
             <a:ext cx="5669280" cy="1097280"/>
           </a:xfrm>
           <a:prstGeom prst="rect">
@@ -3192,7 +3192,7 @@
           <a:p>
             <a:pPr algn="l"/>
             <a:r>
-              <a:rPr sz="3800" b="1" i="0">
+              <a:rPr sz="4000" b="1" i="0">
                 <a:solidFill>
                   <a:srgbClr val="00C8FF"/>
                 </a:solidFill>
@@ -3210,7 +3210,7 @@
         </p:nvSpPr>
         <p:spPr>
           <a:xfrm>
-            <a:off x="457200" y="1965960"/>
+            <a:off x="457200" y="1920240"/>
             <a:ext cx="5669280" cy="731520"/>
           </a:xfrm>
           <a:prstGeom prst="rect">
@@ -3227,7 +3227,7 @@
           <a:p>
             <a:pPr algn="l"/>
             <a:r>
-              <a:rPr sz="2800" b="1" i="0">
+              <a:rPr sz="3000" b="1" i="0">
                 <a:solidFill>
                   <a:srgbClr val="FFFFFF"/>
                 </a:solidFill>
@@ -3262,7 +3262,7 @@
           <a:p>
             <a:pPr algn="l"/>
             <a:r>
-              <a:rPr sz="1400" b="0" i="1">
+              <a:rPr sz="1500" b="0" i="1">
                 <a:solidFill>
                   <a:srgbClr val="AAAABB"/>
                 </a:solidFill>
@@ -3282,7 +3282,7 @@
         <p:spPr>
           <a:xfrm>
             <a:off x="457200" y="3657600"/>
-            <a:ext cx="4114800" cy="27432"/>
+            <a:ext cx="4572000" cy="27432"/>
           </a:xfrm>
           <a:prstGeom prst="rect">
             <a:avLst/>
@@ -3324,8 +3324,8 @@
         </p:nvSpPr>
         <p:spPr>
           <a:xfrm>
-            <a:off x="457200" y="3886200"/>
-            <a:ext cx="5029200" cy="1828800"/>
+            <a:off x="457200" y="3840480"/>
+            <a:ext cx="5303520" cy="2194560"/>
           </a:xfrm>
           <a:prstGeom prst="rect">
             <a:avLst/>
@@ -3367,8 +3367,8 @@
         </p:nvSpPr>
         <p:spPr>
           <a:xfrm>
-            <a:off x="640080" y="3977639"/>
-            <a:ext cx="4663440" cy="1645920"/>
+            <a:off x="640080" y="3931920"/>
+            <a:ext cx="4937760" cy="2011680"/>
           </a:xfrm>
           <a:prstGeom prst="rect">
             <a:avLst/>
@@ -3384,34 +3384,100 @@
           <a:p>
             <a:pPr algn="l"/>
             <a:r>
+              <a:rPr sz="1000" b="1" i="0">
+                <a:solidFill>
+                  <a:srgbClr val="00C8FF"/>
+                </a:solidFill>
+              </a:rPr>
+              <a:t>Formato</a:t>
+            </a:r>
+          </a:p>
+          <a:p>
+            <a:pPr algn="l"/>
+            <a:r>
               <a:rPr sz="1100" b="0" i="0">
                 <a:solidFill>
                   <a:srgbClr val="FFFFFF"/>
                 </a:solidFill>
               </a:rPr>
-              <a:t>• Formato: Exposición oral en video (5 minutos max.)</a:t>
+              <a:t>Exposición oral en video (5 minutos máx.)</a:t>
             </a:r>
           </a:p>
           <a:p>
             <a:pPr algn="l"/>
             <a:r>
+              <a:rPr sz="300" b="0" i="0">
+                <a:solidFill>
+                  <a:srgbClr val="FFFFFF"/>
+                </a:solidFill>
+              </a:rPr>
+              <a:t/>
+            </a:r>
+          </a:p>
+          <a:p>
+            <a:pPr algn="l"/>
+            <a:r>
+              <a:rPr sz="1000" b="1" i="0">
+                <a:solidFill>
+                  <a:srgbClr val="00C8FF"/>
+                </a:solidFill>
+              </a:rPr>
+              <a:t>Enfoque pedagógico</a:t>
+            </a:r>
+          </a:p>
+          <a:p>
+            <a:pPr algn="l"/>
+            <a:r>
               <a:rPr sz="1100" b="0" i="0">
                 <a:solidFill>
                   <a:srgbClr val="FFFFFF"/>
                 </a:solidFill>
               </a:rPr>
-              <a:t>• Enfoque pedagógico: Analogías en Geomática</a:t>
+              <a:t>Transposición didáctica con analogías en</a:t>
             </a:r>
           </a:p>
           <a:p>
             <a:pPr algn="l"/>
             <a:r>
+              <a:rPr sz="1100" b="1" i="0">
+                <a:solidFill>
+                  <a:srgbClr val="7BFFC4"/>
+                </a:solidFill>
+              </a:rPr>
+              <a:t>Geomática y Teledetección</a:t>
+            </a:r>
+          </a:p>
+          <a:p>
+            <a:pPr algn="l"/>
+            <a:r>
+              <a:rPr sz="300" b="0" i="0">
+                <a:solidFill>
+                  <a:srgbClr val="FFFFFF"/>
+                </a:solidFill>
+              </a:rPr>
+              <a:t/>
+            </a:r>
+          </a:p>
+          <a:p>
+            <a:pPr algn="l"/>
+            <a:r>
+              <a:rPr sz="1000" b="1" i="0">
+                <a:solidFill>
+                  <a:srgbClr val="00C8FF"/>
+                </a:solidFill>
+              </a:rPr>
+              <a:t>Tópicos obligatorios</a:t>
+            </a:r>
+          </a:p>
+          <a:p>
+            <a:pPr algn="l"/>
+            <a:r>
               <a:rPr sz="1100" b="0" i="0">
                 <a:solidFill>
-                  <a:srgbClr val="7BFFC4"/>
-                </a:solidFill>
-              </a:rPr>
-              <a:t>  y Teledetección</a:t>
+                  <a:srgbClr val="FFFFFF"/>
+                </a:solidFill>
+              </a:rPr>
+              <a:t>1. Radiación Térmica del Cuerpo Negro</a:t>
             </a:r>
           </a:p>
           <a:p>
@@ -3422,7 +3488,7 @@
                   <a:srgbClr val="FFFFFF"/>
                 </a:solidFill>
               </a:rPr>
-              <a:t>• Tópicos: Radiación Térmica | Catástrofe UV</a:t>
+              <a:t>2. Catástrofe Ultravioleta</a:t>
             </a:r>
           </a:p>
           <a:p>
@@ -3433,13 +3499,13 @@
                   <a:srgbClr val="FFFFFF"/>
                 </a:solidFill>
               </a:rPr>
-              <a:t>  | Cuantización de Planck</a:t>
+              <a:t>3. Cuantización de Planck</a:t>
             </a:r>
           </a:p>
           <a:p>
             <a:pPr algn="l"/>
             <a:r>
-              <a:rPr sz="400" b="0" i="0">
+              <a:rPr sz="300" b="0" i="0">
                 <a:solidFill>
                   <a:srgbClr val="FFFFFF"/>
                 </a:solidFill>
@@ -3755,8 +3821,8 @@
         </p:blipFill>
         <p:spPr>
           <a:xfrm>
-            <a:off x="6035040" y="1051560"/>
-            <a:ext cx="5852160" cy="3291840"/>
+            <a:off x="5852160" y="1051560"/>
+            <a:ext cx="6035040" cy="3474720"/>
           </a:xfrm>
           <a:prstGeom prst="rect">
             <a:avLst/>
@@ -3772,7 +3838,7 @@
         <p:spPr>
           <a:xfrm>
             <a:off x="365760" y="1051560"/>
-            <a:ext cx="5486400" cy="2926080"/>
+            <a:ext cx="5486400" cy="1463040"/>
           </a:xfrm>
           <a:prstGeom prst="rect">
             <a:avLst/>
@@ -3804,7 +3870,7 @@
                   <a:srgbClr val="FFFFFF"/>
                 </a:solidFill>
               </a:rPr>
-              <a:t>• Cuerpo Negro Ideal: Absorbe el 100% de la radiación</a:t>
+              <a:t>• Cuerpo Negro Ideal: Absorbe el 100% de la</a:t>
             </a:r>
           </a:p>
           <a:p>
@@ -3815,7 +3881,7 @@
                   <a:srgbClr val="FFFFFF"/>
                 </a:solidFill>
               </a:rPr>
-              <a:t>  incidente y emite únicamente en función de T (ε = 1).</a:t>
+              <a:t>  radiación incidente y emite solo según T  (ε = 1).</a:t>
             </a:r>
           </a:p>
           <a:p>
@@ -3826,12 +3892,23 @@
                   <a:srgbClr val="FFFFFF"/>
                 </a:solidFill>
               </a:rPr>
-              <a:t>• Modelo Experimental: Cavidad con orificio de salida.</a:t>
+              <a:t>• Modelo Experimental: Cavidad cerrada con</a:t>
             </a:r>
           </a:p>
           <a:p>
             <a:pPr algn="l"/>
             <a:r>
+              <a:rPr sz="1200" b="0" i="0">
+                <a:solidFill>
+                  <a:srgbClr val="FFFFFF"/>
+                </a:solidFill>
+              </a:rPr>
+              <a:t>  un pequeño orificio de salida.</a:t>
+            </a:r>
+          </a:p>
+          <a:p>
+            <a:pPr algn="l"/>
+            <a:r>
               <a:rPr sz="400" b="0" i="0">
                 <a:solidFill>
                   <a:srgbClr val="FFFFFF"/>
@@ -3840,6 +3917,30 @@
               <a:t/>
             </a:r>
           </a:p>
+        </p:txBody>
+      </p:sp>
+      <p:sp>
+        <p:nvSpPr>
+          <p:cNvPr id="9" name="TextBox 8"/>
+          <p:cNvSpPr txBox="1"/>
+          <p:nvPr/>
+        </p:nvSpPr>
+        <p:spPr>
+          <a:xfrm>
+            <a:off x="365760" y="2651760"/>
+            <a:ext cx="5486400" cy="274320"/>
+          </a:xfrm>
+          <a:prstGeom prst="rect">
+            <a:avLst/>
+          </a:prstGeom>
+          <a:noFill/>
+        </p:spPr>
+        <p:txBody>
+          <a:bodyPr wrap="none">
+            <a:spAutoFit/>
+          </a:bodyPr>
+          <a:lstStyle/>
+          <a:p/>
           <a:p>
             <a:pPr algn="l"/>
             <a:r>
@@ -3851,75 +3952,197 @@
               <a:t>Leyes empíricas establecidas</a:t>
             </a:r>
           </a:p>
+        </p:txBody>
+      </p:sp>
+      <p:pic>
+        <p:nvPicPr>
+          <p:cNvPr id="10" name="Picture 9" descr="stefan.png"/>
+          <p:cNvPicPr>
+            <a:picLocks noChangeAspect="1"/>
+          </p:cNvPicPr>
+          <p:nvPr/>
+        </p:nvPicPr>
+        <p:blipFill>
+          <a:blip r:embed="rId3"/>
+          <a:stretch>
+            <a:fillRect/>
+          </a:stretch>
+        </p:blipFill>
+        <p:spPr>
+          <a:xfrm>
+            <a:off x="548640" y="3017520"/>
+            <a:ext cx="2194560" cy="365760"/>
+          </a:xfrm>
+          <a:prstGeom prst="rect">
+            <a:avLst/>
+          </a:prstGeom>
+        </p:spPr>
+      </p:pic>
+      <p:sp>
+        <p:nvSpPr>
+          <p:cNvPr id="11" name="TextBox 10"/>
+          <p:cNvSpPr txBox="1"/>
+          <p:nvPr/>
+        </p:nvSpPr>
+        <p:spPr>
+          <a:xfrm>
+            <a:off x="457200" y="2971800"/>
+            <a:ext cx="1828800" cy="274320"/>
+          </a:xfrm>
+          <a:prstGeom prst="rect">
+            <a:avLst/>
+          </a:prstGeom>
+          <a:noFill/>
+        </p:spPr>
+        <p:txBody>
+          <a:bodyPr wrap="none">
+            <a:spAutoFit/>
+          </a:bodyPr>
+          <a:lstStyle/>
+          <a:p/>
           <a:p>
             <a:pPr algn="l"/>
             <a:r>
-              <a:rPr sz="1300" b="1" i="0">
-                <a:solidFill>
-                  <a:srgbClr val="FFE066"/>
-                </a:solidFill>
-              </a:rPr>
-              <a:t>  Stefan-Boltzmann (1879):   R = σT⁴</a:t>
-            </a:r>
-          </a:p>
+              <a:rPr sz="1000" b="0" i="0">
+                <a:solidFill>
+                  <a:srgbClr val="AAAABB"/>
+                </a:solidFill>
+              </a:rPr>
+              <a:t>Stefan-Boltzmann (1879):</a:t>
+            </a:r>
+          </a:p>
+        </p:txBody>
+      </p:sp>
+      <p:pic>
+        <p:nvPicPr>
+          <p:cNvPr id="12" name="Picture 11" descr="sigma_val.png"/>
+          <p:cNvPicPr>
+            <a:picLocks noChangeAspect="1"/>
+          </p:cNvPicPr>
+          <p:nvPr/>
+        </p:nvPicPr>
+        <p:blipFill>
+          <a:blip r:embed="rId4"/>
+          <a:stretch>
+            <a:fillRect/>
+          </a:stretch>
+        </p:blipFill>
+        <p:spPr>
+          <a:xfrm>
+            <a:off x="2834640" y="3063240"/>
+            <a:ext cx="3291840" cy="274320"/>
+          </a:xfrm>
+          <a:prstGeom prst="rect">
+            <a:avLst/>
+          </a:prstGeom>
+        </p:spPr>
+      </p:pic>
+      <p:sp>
+        <p:nvSpPr>
+          <p:cNvPr id="13" name="TextBox 12"/>
+          <p:cNvSpPr txBox="1"/>
+          <p:nvPr/>
+        </p:nvSpPr>
+        <p:spPr>
+          <a:xfrm>
+            <a:off x="457200" y="3429000"/>
+            <a:ext cx="1828800" cy="274320"/>
+          </a:xfrm>
+          <a:prstGeom prst="rect">
+            <a:avLst/>
+          </a:prstGeom>
+          <a:noFill/>
+        </p:spPr>
+        <p:txBody>
+          <a:bodyPr wrap="none">
+            <a:spAutoFit/>
+          </a:bodyPr>
+          <a:lstStyle/>
+          <a:p/>
           <a:p>
             <a:pPr algn="l"/>
             <a:r>
-              <a:rPr sz="1100" b="0" i="0">
+              <a:rPr sz="1000" b="0" i="0">
                 <a:solidFill>
                   <a:srgbClr val="AAAABB"/>
                 </a:solidFill>
               </a:rPr>
-              <a:t>  σ = 5.67×10⁻⁸ W m⁻² K⁻⁴</a:t>
-            </a:r>
-          </a:p>
+              <a:t>Wien (1893):</a:t>
+            </a:r>
+          </a:p>
+        </p:txBody>
+      </p:sp>
+      <p:pic>
+        <p:nvPicPr>
+          <p:cNvPr id="14" name="Picture 13" descr="wien.png"/>
+          <p:cNvPicPr>
+            <a:picLocks noChangeAspect="1"/>
+          </p:cNvPicPr>
+          <p:nvPr/>
+        </p:nvPicPr>
+        <p:blipFill>
+          <a:blip r:embed="rId5"/>
+          <a:stretch>
+            <a:fillRect/>
+          </a:stretch>
+        </p:blipFill>
+        <p:spPr>
+          <a:xfrm>
+            <a:off x="548640" y="3611880"/>
+            <a:ext cx="3931920" cy="320040"/>
+          </a:xfrm>
+          <a:prstGeom prst="rect">
+            <a:avLst/>
+          </a:prstGeom>
+        </p:spPr>
+      </p:pic>
+      <p:sp>
+        <p:nvSpPr>
+          <p:cNvPr id="15" name="TextBox 14"/>
+          <p:cNvSpPr txBox="1"/>
+          <p:nvPr/>
+        </p:nvSpPr>
+        <p:spPr>
+          <a:xfrm>
+            <a:off x="365760" y="4069080"/>
+            <a:ext cx="5486400" cy="548640"/>
+          </a:xfrm>
+          <a:prstGeom prst="rect">
+            <a:avLst/>
+          </a:prstGeom>
+          <a:noFill/>
+        </p:spPr>
+        <p:txBody>
+          <a:bodyPr wrap="square">
+            <a:spAutoFit/>
+          </a:bodyPr>
+          <a:lstStyle/>
+          <a:p/>
           <a:p>
             <a:pPr algn="l"/>
             <a:r>
-              <a:rPr sz="1300" b="1" i="0">
-                <a:solidFill>
-                  <a:srgbClr val="FFE066"/>
-                </a:solidFill>
-              </a:rPr>
-              <a:t>  Wien (1893):   λ_max · T = 2.898×10⁻³ m·K</a:t>
+              <a:rPr sz="1400" b="1" i="0">
+                <a:solidFill>
+                  <a:srgbClr val="7BFFC4"/>
+                </a:solidFill>
+              </a:rPr>
+              <a:t>El desafío</a:t>
             </a:r>
           </a:p>
           <a:p>
             <a:pPr algn="l"/>
             <a:r>
-              <a:rPr sz="400" b="0" i="0">
+              <a:rPr sz="1200" b="0" i="0">
                 <a:solidFill>
                   <a:srgbClr val="FFFFFF"/>
                 </a:solidFill>
               </a:rPr>
-              <a:t/>
+              <a:t>La curva experimental era precisa y medible.</a:t>
             </a:r>
           </a:p>
           <a:p>
             <a:pPr algn="l"/>
             <a:r>
-              <a:rPr sz="1400" b="1" i="0">
-                <a:solidFill>
-                  <a:srgbClr val="7BFFC4"/>
-                </a:solidFill>
-              </a:rPr>
-              <a:t>El desafío</a:t>
-            </a:r>
-          </a:p>
-          <a:p>
-            <a:pPr algn="l"/>
-            <a:r>
-              <a:rPr sz="1200" b="0" i="0">
-                <a:solidFill>
-                  <a:srgbClr val="FFFFFF"/>
-                </a:solidFill>
-              </a:rPr>
-              <a:t>La curva experimental era precisa y medible.</a:t>
-            </a:r>
-          </a:p>
-          <a:p>
-            <a:pPr algn="l"/>
-            <a:r>
               <a:rPr sz="1200" b="1" i="0">
                 <a:solidFill>
                   <a:srgbClr val="FF6B35"/>
@@ -3932,13 +4155,13 @@
       </p:sp>
       <p:sp>
         <p:nvSpPr>
-          <p:cNvPr id="9" name="Rectangle 8"/>
+          <p:cNvPr id="16" name="Rectangle 15"/>
           <p:cNvSpPr/>
           <p:nvPr/>
         </p:nvSpPr>
         <p:spPr>
           <a:xfrm>
-            <a:off x="365760" y="4572000"/>
+            <a:off x="365760" y="4754880"/>
             <a:ext cx="11430000" cy="27432"/>
           </a:xfrm>
           <a:prstGeom prst="rect">
@@ -3975,14 +4198,14 @@
       </p:sp>
       <p:sp>
         <p:nvSpPr>
-          <p:cNvPr id="10" name="Rectangle 9"/>
+          <p:cNvPr id="17" name="Rectangle 16"/>
           <p:cNvSpPr/>
           <p:nvPr/>
         </p:nvSpPr>
         <p:spPr>
           <a:xfrm>
-            <a:off x="365760" y="4709160"/>
-            <a:ext cx="11430000" cy="1828800"/>
+            <a:off x="365760" y="4892040"/>
+            <a:ext cx="11430000" cy="1645920"/>
           </a:xfrm>
           <a:prstGeom prst="rect">
             <a:avLst/>
@@ -4018,14 +4241,14 @@
       </p:sp>
       <p:sp>
         <p:nvSpPr>
-          <p:cNvPr id="11" name="TextBox 10"/>
+          <p:cNvPr id="18" name="TextBox 17"/>
           <p:cNvSpPr txBox="1"/>
           <p:nvPr/>
         </p:nvSpPr>
         <p:spPr>
           <a:xfrm>
-            <a:off x="502920" y="4754880"/>
-            <a:ext cx="11155680" cy="1737360"/>
+            <a:off x="502920" y="4937760"/>
+            <a:ext cx="11155680" cy="1554480"/>
           </a:xfrm>
           <a:prstGeom prst="rect">
             <a:avLst/>
@@ -4057,7 +4280,7 @@
                   <a:srgbClr val="FFFFFF"/>
                 </a:solidFill>
               </a:rPr>
-              <a:t>"Un sensor multiespectral (Landsat / Sentinel-2) mide la radiancia espectral.</a:t>
+              <a:t>"Un sensor multiespectral (Landsat / Sentinel-2) mide la radiancia espectral de la superficie.</a:t>
             </a:r>
           </a:p>
           <a:p>
@@ -4068,7 +4291,7 @@
                   <a:srgbClr val="FFFFFF"/>
                 </a:solidFill>
               </a:rPr>
-              <a:t>Si la teoría clásica fuera cierta, cada banda hacia el UV sumaría energía infinita.</a:t>
+              <a:t>Si la teoría clásica fuera cierta, cada banda espectral hacia el UV sumaría energía infinita.</a:t>
             </a:r>
           </a:p>
           <a:p>
@@ -4079,18 +4302,7 @@
                   <a:srgbClr val="FFFFFF"/>
                 </a:solidFill>
               </a:rPr>
-              <a:t>Sin embargo, los sensores muestran que la radiancia decae en el UV,</a:t>
-            </a:r>
-          </a:p>
-          <a:p>
-            <a:pPr algn="l"/>
-            <a:r>
-              <a:rPr sz="1100" b="0" i="1">
-                <a:solidFill>
-                  <a:srgbClr val="FFFFFF"/>
-                </a:solidFill>
-              </a:rPr>
-              <a:t>tal como mide un radiómetro de campo."</a:t>
+              <a:t>Sin embargo, cualquier radiómetro real muestra que la señal decae en el UV — exactamente como predice Planck."</a:t>
             </a:r>
           </a:p>
         </p:txBody>
@@ -4336,8 +4548,8 @@
         </p:blipFill>
         <p:spPr>
           <a:xfrm>
-            <a:off x="6035040" y="1051560"/>
-            <a:ext cx="5852160" cy="3291840"/>
+            <a:off x="5852160" y="1051560"/>
+            <a:ext cx="6035040" cy="3474720"/>
           </a:xfrm>
           <a:prstGeom prst="rect">
             <a:avLst/>
@@ -4353,7 +4565,7 @@
         <p:spPr>
           <a:xfrm>
             <a:off x="365760" y="1051560"/>
-            <a:ext cx="5486400" cy="4389120"/>
+            <a:ext cx="5486400" cy="914400"/>
           </a:xfrm>
           <a:prstGeom prst="rect">
             <a:avLst/>
@@ -4374,7 +4586,7 @@
                   <a:srgbClr val="FF6B35"/>
                 </a:solidFill>
               </a:rPr>
-              <a:t>La Ley de Rayleigh-Jeans y la Crisis</a:t>
+              <a:t>La Ley de Rayleigh-Jeans (1900–05)</a:t>
             </a:r>
           </a:p>
           <a:p>
@@ -4385,9 +4597,57 @@
                   <a:srgbClr val="FFFFFF"/>
                 </a:solidFill>
               </a:rPr>
-              <a:t>• Teorema de Equipartición: Asigna ⟨E⟩ = k_B·T</a:t>
-            </a:r>
-          </a:p>
+              <a:t>• Equipartición: cada modo recibe</a:t>
+            </a:r>
+          </a:p>
+        </p:txBody>
+      </p:sp>
+      <p:pic>
+        <p:nvPicPr>
+          <p:cNvPr id="9" name="Picture 8" descr="equip.png"/>
+          <p:cNvPicPr>
+            <a:picLocks noChangeAspect="1"/>
+          </p:cNvPicPr>
+          <p:nvPr/>
+        </p:nvPicPr>
+        <p:blipFill>
+          <a:blip r:embed="rId3"/>
+          <a:stretch>
+            <a:fillRect/>
+          </a:stretch>
+        </p:blipFill>
+        <p:spPr>
+          <a:xfrm>
+            <a:off x="548640" y="1645920"/>
+            <a:ext cx="3200400" cy="320040"/>
+          </a:xfrm>
+          <a:prstGeom prst="rect">
+            <a:avLst/>
+          </a:prstGeom>
+        </p:spPr>
+      </p:pic>
+      <p:sp>
+        <p:nvSpPr>
+          <p:cNvPr id="10" name="TextBox 9"/>
+          <p:cNvSpPr txBox="1"/>
+          <p:nvPr/>
+        </p:nvSpPr>
+        <p:spPr>
+          <a:xfrm>
+            <a:off x="365760" y="2011680"/>
+            <a:ext cx="5486400" cy="274320"/>
+          </a:xfrm>
+          <a:prstGeom prst="rect">
+            <a:avLst/>
+          </a:prstGeom>
+          <a:noFill/>
+        </p:spPr>
+        <p:txBody>
+          <a:bodyPr wrap="none">
+            <a:spAutoFit/>
+          </a:bodyPr>
+          <a:lstStyle/>
+          <a:p/>
           <a:p>
             <a:pPr algn="l"/>
             <a:r>
@@ -4396,18 +4656,136 @@
                   <a:srgbClr val="FFFFFF"/>
                 </a:solidFill>
               </a:rPr>
-              <a:t>  a cada modo de oscilación EM en la cavidad.</a:t>
-            </a:r>
-          </a:p>
+              <a:t>• Densidad de modos:</a:t>
+            </a:r>
+          </a:p>
+        </p:txBody>
+      </p:sp>
+      <p:pic>
+        <p:nvPicPr>
+          <p:cNvPr id="11" name="Picture 10" descr="modes.png"/>
+          <p:cNvPicPr>
+            <a:picLocks noChangeAspect="1"/>
+          </p:cNvPicPr>
+          <p:nvPr/>
+        </p:nvPicPr>
+        <p:blipFill>
+          <a:blip r:embed="rId4"/>
+          <a:stretch>
+            <a:fillRect/>
+          </a:stretch>
+        </p:blipFill>
+        <p:spPr>
+          <a:xfrm>
+            <a:off x="548640" y="2240280"/>
+            <a:ext cx="2194560" cy="457200"/>
+          </a:xfrm>
+          <a:prstGeom prst="rect">
+            <a:avLst/>
+          </a:prstGeom>
+        </p:spPr>
+      </p:pic>
+      <p:sp>
+        <p:nvSpPr>
+          <p:cNvPr id="12" name="TextBox 11"/>
+          <p:cNvSpPr txBox="1"/>
+          <p:nvPr/>
+        </p:nvSpPr>
+        <p:spPr>
+          <a:xfrm>
+            <a:off x="365760" y="2788920"/>
+            <a:ext cx="5486400" cy="274320"/>
+          </a:xfrm>
+          <a:prstGeom prst="rect">
+            <a:avLst/>
+          </a:prstGeom>
+          <a:noFill/>
+        </p:spPr>
+        <p:txBody>
+          <a:bodyPr wrap="none">
+            <a:spAutoFit/>
+          </a:bodyPr>
+          <a:lstStyle/>
+          <a:p/>
           <a:p>
             <a:pPr algn="l"/>
             <a:r>
+              <a:rPr sz="1300" b="1" i="0">
+                <a:solidFill>
+                  <a:srgbClr val="FF6B35"/>
+                </a:solidFill>
+              </a:rPr>
+              <a:t>Ecuación Clásica de Rayleigh-Jeans:</a:t>
+            </a:r>
+          </a:p>
+        </p:txBody>
+      </p:sp>
+      <p:pic>
+        <p:nvPicPr>
+          <p:cNvPr id="13" name="Picture 12" descr="rj.png"/>
+          <p:cNvPicPr>
+            <a:picLocks noChangeAspect="1"/>
+          </p:cNvPicPr>
+          <p:nvPr/>
+        </p:nvPicPr>
+        <p:blipFill>
+          <a:blip r:embed="rId5"/>
+          <a:stretch>
+            <a:fillRect/>
+          </a:stretch>
+        </p:blipFill>
+        <p:spPr>
+          <a:xfrm>
+            <a:off x="457200" y="3063240"/>
+            <a:ext cx="3657600" cy="457200"/>
+          </a:xfrm>
+          <a:prstGeom prst="rect">
+            <a:avLst/>
+          </a:prstGeom>
+        </p:spPr>
+      </p:pic>
+      <p:sp>
+        <p:nvSpPr>
+          <p:cNvPr id="14" name="TextBox 13"/>
+          <p:cNvSpPr txBox="1"/>
+          <p:nvPr/>
+        </p:nvSpPr>
+        <p:spPr>
+          <a:xfrm>
+            <a:off x="365760" y="3657600"/>
+            <a:ext cx="5486400" cy="1828800"/>
+          </a:xfrm>
+          <a:prstGeom prst="rect">
+            <a:avLst/>
+          </a:prstGeom>
+          <a:noFill/>
+        </p:spPr>
+        <p:txBody>
+          <a:bodyPr wrap="square">
+            <a:spAutoFit/>
+          </a:bodyPr>
+          <a:lstStyle/>
+          <a:p/>
+          <a:p>
+            <a:pPr algn="l"/>
+            <a:r>
+              <a:rPr sz="1300" b="1" i="0">
+                <a:solidFill>
+                  <a:srgbClr val="FF6B35"/>
+                </a:solidFill>
+              </a:rPr>
+              <a:t>La Crisis (Ehrenfest, 1911):</a:t>
+            </a:r>
+          </a:p>
+          <a:p>
+            <a:pPr algn="l"/>
+            <a:r>
               <a:rPr sz="1200" b="0" i="0">
                 <a:solidFill>
                   <a:srgbClr val="FFFFFF"/>
                 </a:solidFill>
               </a:rPr>
-              <a:t>• Densidad de Modos: Crece cuadráticamente</a:t>
+              <a:t>No es un error de cálculo.</a:t>
             </a:r>
           </a:p>
           <a:p>
@@ -4418,150 +4796,77 @@
                   <a:srgbClr val="FFFFFF"/>
                 </a:solidFill>
               </a:rPr>
-              <a:t>  con la frecuencia:  g(f) = 8πf²/c³</a:t>
+              <a:t>Es consecuencia inevitable de combinar</a:t>
             </a:r>
           </a:p>
           <a:p>
             <a:pPr algn="l"/>
             <a:r>
-              <a:rPr sz="400" b="0" i="0">
+              <a:rPr sz="1200" b="0" i="0">
                 <a:solidFill>
                   <a:srgbClr val="FFFFFF"/>
                 </a:solidFill>
               </a:rPr>
-              <a:t/>
-            </a:r>
-          </a:p>
+              <a:t>termodinámica + electromagnetismo clásicos.</a:t>
+            </a:r>
+          </a:p>
+        </p:txBody>
+      </p:sp>
+      <p:pic>
+        <p:nvPicPr>
+          <p:cNvPr id="15" name="Picture 14" descr="diverge.png"/>
+          <p:cNvPicPr>
+            <a:picLocks noChangeAspect="1"/>
+          </p:cNvPicPr>
+          <p:nvPr/>
+        </p:nvPicPr>
+        <p:blipFill>
+          <a:blip r:embed="rId6"/>
+          <a:stretch>
+            <a:fillRect/>
+          </a:stretch>
+        </p:blipFill>
+        <p:spPr>
+          <a:xfrm>
+            <a:off x="548640" y="4754880"/>
+            <a:ext cx="3291840" cy="411480"/>
+          </a:xfrm>
+          <a:prstGeom prst="rect">
+            <a:avLst/>
+          </a:prstGeom>
+        </p:spPr>
+      </p:pic>
+      <p:sp>
+        <p:nvSpPr>
+          <p:cNvPr id="16" name="TextBox 15"/>
+          <p:cNvSpPr txBox="1"/>
+          <p:nvPr/>
+        </p:nvSpPr>
+        <p:spPr>
+          <a:xfrm>
+            <a:off x="365760" y="5257800"/>
+            <a:ext cx="5486400" cy="457200"/>
+          </a:xfrm>
+          <a:prstGeom prst="rect">
+            <a:avLst/>
+          </a:prstGeom>
+          <a:noFill/>
+        </p:spPr>
+        <p:txBody>
+          <a:bodyPr wrap="none">
+            <a:spAutoFit/>
+          </a:bodyPr>
+          <a:lstStyle/>
+          <a:p/>
           <a:p>
             <a:pPr algn="l"/>
             <a:r>
-              <a:rPr sz="1300" b="1" i="0">
+              <a:rPr sz="1400" b="1" i="0">
                 <a:solidFill>
                   <a:srgbClr val="FF6B35"/>
                 </a:solidFill>
               </a:rPr>
-              <a:t>Ecuación Clásica de Rayleigh-Jeans:</a:t>
-            </a:r>
-          </a:p>
-          <a:p>
-            <a:pPr algn="l"/>
-            <a:r>
-              <a:rPr sz="1400" b="1" i="0">
-                <a:solidFill>
-                  <a:srgbClr val="FFE066"/>
-                </a:solidFill>
-              </a:rPr>
-              <a:t>  W(f, T) = (8π f² / c³) · k_B T</a:t>
-            </a:r>
-          </a:p>
-          <a:p>
-            <a:pPr algn="l"/>
-            <a:r>
-              <a:rPr sz="400" b="0" i="0">
-                <a:solidFill>
-                  <a:srgbClr val="FFFFFF"/>
-                </a:solidFill>
-              </a:rPr>
-              <a:t/>
-            </a:r>
-          </a:p>
-          <a:p>
-            <a:pPr algn="l"/>
-            <a:r>
-              <a:rPr sz="1300" b="1" i="0">
-                <a:solidFill>
-                  <a:srgbClr val="FF6B35"/>
-                </a:solidFill>
-              </a:rPr>
-              <a:t>La Crisis (Paul Ehrenfest, 1911):</a:t>
-            </a:r>
-          </a:p>
-          <a:p>
-            <a:pPr algn="l"/>
-            <a:r>
-              <a:rPr sz="1200" b="0" i="0">
-                <a:solidFill>
-                  <a:srgbClr val="FFFFFF"/>
-                </a:solidFill>
-              </a:rPr>
-              <a:t>Cuando λ → 0 (f → ∞), la integral de energía</a:t>
-            </a:r>
-          </a:p>
-          <a:p>
-            <a:pPr algn="l"/>
-            <a:r>
-              <a:rPr sz="1200" b="1" i="0">
-                <a:solidFill>
-                  <a:srgbClr val="FF6B35"/>
-                </a:solidFill>
-              </a:rPr>
-              <a:t>diverge a INFINITO.</a:t>
-            </a:r>
-          </a:p>
-          <a:p>
-            <a:pPr algn="l"/>
-            <a:r>
-              <a:rPr sz="300" b="0" i="0">
-                <a:solidFill>
-                  <a:srgbClr val="FFFFFF"/>
-                </a:solidFill>
-              </a:rPr>
-              <a:t/>
-            </a:r>
-          </a:p>
-          <a:p>
-            <a:pPr algn="l"/>
-            <a:r>
-              <a:rPr sz="1200" b="0" i="0">
-                <a:solidFill>
-                  <a:srgbClr val="FFFFFF"/>
-                </a:solidFill>
-              </a:rPr>
-              <a:t>No es un error de cálculo.</a:t>
-            </a:r>
-          </a:p>
-          <a:p>
-            <a:pPr algn="l"/>
-            <a:r>
-              <a:rPr sz="1200" b="0" i="0">
-                <a:solidFill>
-                  <a:srgbClr val="FFFFFF"/>
-                </a:solidFill>
-              </a:rPr>
-              <a:t>Es consecuencia inevitable de combinar</a:t>
-            </a:r>
-          </a:p>
-          <a:p>
-            <a:pPr algn="l"/>
-            <a:r>
-              <a:rPr sz="1200" b="0" i="0">
-                <a:solidFill>
-                  <a:srgbClr val="FFFFFF"/>
-                </a:solidFill>
-              </a:rPr>
-              <a:t>termodinámica + electromagnetismo clásicos.</a:t>
-            </a:r>
-          </a:p>
-          <a:p>
-            <a:pPr algn="l"/>
-            <a:r>
-              <a:rPr sz="300" b="0" i="0">
-                <a:solidFill>
-                  <a:srgbClr val="FFFFFF"/>
-                </a:solidFill>
-              </a:rPr>
-              <a:t/>
-            </a:r>
-          </a:p>
-          <a:p>
-            <a:pPr algn="l"/>
-            <a:r>
-              <a:rPr sz="1300" b="1" i="0">
-                <a:solidFill>
-                  <a:srgbClr val="FF6B35"/>
-                </a:solidFill>
-              </a:rPr>
-              <a:t>Infinitos modos × energía fija = ∞</a:t>
+              <a:t>∞ modos × energía constante = ∞</a:t>
             </a:r>
           </a:p>
         </p:txBody>
@@ -4800,7 +5105,7 @@
         <p:spPr>
           <a:xfrm>
             <a:off x="365760" y="1051560"/>
-            <a:ext cx="5577840" cy="3200400"/>
+            <a:ext cx="5486400" cy="457200"/>
           </a:xfrm>
           <a:prstGeom prst="rect">
             <a:avLst/>
@@ -4808,7 +5113,7 @@
           <a:noFill/>
         </p:spPr>
         <p:txBody>
-          <a:bodyPr wrap="square">
+          <a:bodyPr wrap="none">
             <a:spAutoFit/>
           </a:bodyPr>
           <a:lstStyle/>
@@ -4827,7 +5132,7 @@
           <a:p>
             <a:pPr algn="l"/>
             <a:r>
-              <a:rPr sz="1200" b="0" i="0">
+              <a:rPr sz="1100" b="0" i="0">
                 <a:solidFill>
                   <a:srgbClr val="FFFFFF"/>
                 </a:solidFill>
@@ -4838,151 +5143,19 @@
           <a:p>
             <a:pPr algn="l"/>
             <a:r>
-              <a:rPr sz="1200" b="0" i="0">
+              <a:rPr sz="1100" b="0" i="0">
                 <a:solidFill>
                   <a:srgbClr val="FFFFFF"/>
                 </a:solidFill>
               </a:rPr>
-              <a:t>únicamente en Paquetes Discretos (cuantos):</a:t>
-            </a:r>
-          </a:p>
-          <a:p>
-            <a:pPr algn="l"/>
-            <a:r>
-              <a:rPr sz="1500" b="1" i="0">
-                <a:solidFill>
-                  <a:srgbClr val="FFE066"/>
-                </a:solidFill>
-              </a:rPr>
-              <a:t>  E_n = n · h f    (n = 0, 1, 2, 3...)</a:t>
-            </a:r>
-          </a:p>
-          <a:p>
-            <a:pPr algn="l"/>
-            <a:r>
-              <a:rPr sz="1200" b="0" i="0">
-                <a:solidFill>
-                  <a:srgbClr val="AAAABB"/>
-                </a:solidFill>
-              </a:rPr>
-              <a:t>  h = 6.626 × 10⁻³⁴ J·s</a:t>
-            </a:r>
-          </a:p>
-          <a:p>
-            <a:pPr algn="l"/>
-            <a:r>
-              <a:rPr sz="400" b="0" i="0">
-                <a:solidFill>
-                  <a:srgbClr val="FFFFFF"/>
-                </a:solidFill>
-              </a:rPr>
-              <a:t/>
-            </a:r>
-          </a:p>
-          <a:p>
-            <a:pPr algn="l"/>
-            <a:r>
-              <a:rPr sz="1300" b="1" i="0">
-                <a:solidFill>
-                  <a:srgbClr val="7BFFC4"/>
-                </a:solidFill>
-              </a:rPr>
-              <a:t>Distribución Cuántica de Planck:</a:t>
-            </a:r>
-          </a:p>
-          <a:p>
-            <a:pPr algn="l"/>
-            <a:r>
-              <a:rPr sz="1300" b="1" i="0">
-                <a:solidFill>
-                  <a:srgbClr val="FFE066"/>
-                </a:solidFill>
-              </a:rPr>
-              <a:t>  W(f,T) = (8πhf³/c³) · 1/(e^(hf/k_BT) - 1)</a:t>
-            </a:r>
-          </a:p>
-          <a:p>
-            <a:pPr algn="l"/>
-            <a:r>
-              <a:rPr sz="400" b="0" i="0">
-                <a:solidFill>
-                  <a:srgbClr val="FFFFFF"/>
-                </a:solidFill>
-              </a:rPr>
-              <a:t/>
-            </a:r>
-          </a:p>
-          <a:p>
-            <a:pPr algn="l"/>
-            <a:r>
-              <a:rPr sz="1300" b="1" i="0">
-                <a:solidFill>
-                  <a:srgbClr val="7BFFC4"/>
-                </a:solidFill>
-              </a:rPr>
-              <a:t>Supresión Exponencial:</a:t>
-            </a:r>
-          </a:p>
-          <a:p>
-            <a:pPr algn="l"/>
-            <a:r>
-              <a:rPr sz="1200" b="0" i="0">
-                <a:solidFill>
-                  <a:srgbClr val="FFFFFF"/>
-                </a:solidFill>
-              </a:rPr>
-              <a:t>A alta frecuencia: hf &gt;&gt; k_BT</a:t>
-            </a:r>
-          </a:p>
-          <a:p>
-            <a:pPr algn="l"/>
-            <a:r>
-              <a:rPr sz="1200" b="0" i="0">
-                <a:solidFill>
-                  <a:srgbClr val="FFFFFF"/>
-                </a:solidFill>
-              </a:rPr>
-              <a:t>→ El "precio de entrada" mínimo (hf) supera</a:t>
-            </a:r>
-          </a:p>
-          <a:p>
-            <a:pPr algn="l"/>
-            <a:r>
-              <a:rPr sz="1200" b="0" i="0">
-                <a:solidFill>
-                  <a:srgbClr val="FFFFFF"/>
-                </a:solidFill>
-              </a:rPr>
-              <a:t>  la energía térmica disponible (k_BT).</a:t>
-            </a:r>
-          </a:p>
-          <a:p>
-            <a:pPr algn="l"/>
-            <a:r>
-              <a:rPr sz="1200" b="1" i="0">
-                <a:solidFill>
-                  <a:srgbClr val="7BFFC4"/>
-                </a:solidFill>
-              </a:rPr>
-              <a:t>→ Los modos UV quedan "congelados".</a:t>
-            </a:r>
-          </a:p>
-          <a:p>
-            <a:pPr algn="l"/>
-            <a:r>
-              <a:rPr sz="1200" b="1" i="0">
-                <a:solidFill>
-                  <a:srgbClr val="7BFFC4"/>
-                </a:solidFill>
-              </a:rPr>
-              <a:t>→ W(f) → 0 naturalmente. ¡Sin catástrofe!</a:t>
+              <a:t>únicamente en paquetes discretos (cuantos):</a:t>
             </a:r>
           </a:p>
         </p:txBody>
       </p:sp>
       <p:pic>
         <p:nvPicPr>
-          <p:cNvPr id="8" name="Picture 7" descr="chart_rj_planck.png"/>
+          <p:cNvPr id="8" name="Picture 7" descr="quant.png"/>
           <p:cNvPicPr>
             <a:picLocks noChangeAspect="1"/>
           </p:cNvPicPr>
@@ -4996,24 +5169,214 @@
         </p:blipFill>
         <p:spPr>
           <a:xfrm>
-            <a:off x="6035040" y="1051560"/>
-            <a:ext cx="5852160" cy="2743200"/>
+            <a:off x="457200" y="1874519"/>
+            <a:ext cx="4572000" cy="411480"/>
           </a:xfrm>
           <a:prstGeom prst="rect">
             <a:avLst/>
           </a:prstGeom>
         </p:spPr>
       </p:pic>
-      <p:sp>
-        <p:nvSpPr>
-          <p:cNvPr id="9" name="TextBox 8"/>
+      <p:pic>
+        <p:nvPicPr>
+          <p:cNvPr id="9" name="Picture 8" descr="h_val.png"/>
+          <p:cNvPicPr>
+            <a:picLocks noChangeAspect="1"/>
+          </p:cNvPicPr>
+          <p:nvPr/>
+        </p:nvPicPr>
+        <p:blipFill>
+          <a:blip r:embed="rId3"/>
+          <a:stretch>
+            <a:fillRect/>
+          </a:stretch>
+        </p:blipFill>
+        <p:spPr>
+          <a:xfrm>
+            <a:off x="548640" y="2286000"/>
+            <a:ext cx="2926080" cy="256032"/>
+          </a:xfrm>
+          <a:prstGeom prst="rect">
+            <a:avLst/>
+          </a:prstGeom>
+        </p:spPr>
+      </p:pic>
+      <p:sp>
+        <p:nvSpPr>
+          <p:cNvPr id="10" name="TextBox 9"/>
           <p:cNvSpPr txBox="1"/>
           <p:nvPr/>
         </p:nvSpPr>
         <p:spPr>
           <a:xfrm>
-            <a:off x="6035040" y="3886200"/>
-            <a:ext cx="5760720" cy="548640"/>
+            <a:off x="365760" y="2651760"/>
+            <a:ext cx="5486400" cy="274320"/>
+          </a:xfrm>
+          <a:prstGeom prst="rect">
+            <a:avLst/>
+          </a:prstGeom>
+          <a:noFill/>
+        </p:spPr>
+        <p:txBody>
+          <a:bodyPr wrap="none">
+            <a:spAutoFit/>
+          </a:bodyPr>
+          <a:lstStyle/>
+          <a:p/>
+          <a:p>
+            <a:pPr algn="l"/>
+            <a:r>
+              <a:rPr sz="1300" b="1" i="0">
+                <a:solidFill>
+                  <a:srgbClr val="7BFFC4"/>
+                </a:solidFill>
+              </a:rPr>
+              <a:t>Distribución Cuántica de Planck:</a:t>
+            </a:r>
+          </a:p>
+        </p:txBody>
+      </p:sp>
+      <p:pic>
+        <p:nvPicPr>
+          <p:cNvPr id="11" name="Picture 10" descr="planck.png"/>
+          <p:cNvPicPr>
+            <a:picLocks noChangeAspect="1"/>
+          </p:cNvPicPr>
+          <p:nvPr/>
+        </p:nvPicPr>
+        <p:blipFill>
+          <a:blip r:embed="rId4"/>
+          <a:stretch>
+            <a:fillRect/>
+          </a:stretch>
+        </p:blipFill>
+        <p:spPr>
+          <a:xfrm>
+            <a:off x="365760" y="2926080"/>
+            <a:ext cx="5029200" cy="502920"/>
+          </a:xfrm>
+          <a:prstGeom prst="rect">
+            <a:avLst/>
+          </a:prstGeom>
+        </p:spPr>
+      </p:pic>
+      <p:sp>
+        <p:nvSpPr>
+          <p:cNvPr id="12" name="TextBox 11"/>
+          <p:cNvSpPr txBox="1"/>
+          <p:nvPr/>
+        </p:nvSpPr>
+        <p:spPr>
+          <a:xfrm>
+            <a:off x="365760" y="3566160"/>
+            <a:ext cx="5486400" cy="274320"/>
+          </a:xfrm>
+          <a:prstGeom prst="rect">
+            <a:avLst/>
+          </a:prstGeom>
+          <a:noFill/>
+        </p:spPr>
+        <p:txBody>
+          <a:bodyPr wrap="none">
+            <a:spAutoFit/>
+          </a:bodyPr>
+          <a:lstStyle/>
+          <a:p/>
+          <a:p>
+            <a:pPr algn="l"/>
+            <a:r>
+              <a:rPr sz="1300" b="1" i="0">
+                <a:solidFill>
+                  <a:srgbClr val="7BFFC4"/>
+                </a:solidFill>
+              </a:rPr>
+              <a:t>Supresión Exponencial:</a:t>
+            </a:r>
+          </a:p>
+        </p:txBody>
+      </p:sp>
+      <p:pic>
+        <p:nvPicPr>
+          <p:cNvPr id="13" name="Picture 12" descr="low_freq.png"/>
+          <p:cNvPicPr>
+            <a:picLocks noChangeAspect="1"/>
+          </p:cNvPicPr>
+          <p:nvPr/>
+        </p:nvPicPr>
+        <p:blipFill>
+          <a:blip r:embed="rId5"/>
+          <a:stretch>
+            <a:fillRect/>
+          </a:stretch>
+        </p:blipFill>
+        <p:spPr>
+          <a:xfrm>
+            <a:off x="457200" y="3840480"/>
+            <a:ext cx="4389120" cy="274320"/>
+          </a:xfrm>
+          <a:prstGeom prst="rect">
+            <a:avLst/>
+          </a:prstGeom>
+        </p:spPr>
+      </p:pic>
+      <p:pic>
+        <p:nvPicPr>
+          <p:cNvPr id="14" name="Picture 13" descr="high_freq.png"/>
+          <p:cNvPicPr>
+            <a:picLocks noChangeAspect="1"/>
+          </p:cNvPicPr>
+          <p:nvPr/>
+        </p:nvPicPr>
+        <p:blipFill>
+          <a:blip r:embed="rId6"/>
+          <a:stretch>
+            <a:fillRect/>
+          </a:stretch>
+        </p:blipFill>
+        <p:spPr>
+          <a:xfrm>
+            <a:off x="457200" y="4160520"/>
+            <a:ext cx="4389120" cy="274320"/>
+          </a:xfrm>
+          <a:prstGeom prst="rect">
+            <a:avLst/>
+          </a:prstGeom>
+        </p:spPr>
+      </p:pic>
+      <p:pic>
+        <p:nvPicPr>
+          <p:cNvPr id="15" name="Picture 14" descr="chart_rj_planck.png"/>
+          <p:cNvPicPr>
+            <a:picLocks noChangeAspect="1"/>
+          </p:cNvPicPr>
+          <p:nvPr/>
+        </p:nvPicPr>
+        <p:blipFill>
+          <a:blip r:embed="rId7"/>
+          <a:stretch>
+            <a:fillRect/>
+          </a:stretch>
+        </p:blipFill>
+        <p:spPr>
+          <a:xfrm>
+            <a:off x="5852160" y="1051560"/>
+            <a:ext cx="6035040" cy="2926080"/>
+          </a:xfrm>
+          <a:prstGeom prst="rect">
+            <a:avLst/>
+          </a:prstGeom>
+        </p:spPr>
+      </p:pic>
+      <p:sp>
+        <p:nvSpPr>
+          <p:cNvPr id="16" name="TextBox 15"/>
+          <p:cNvSpPr txBox="1"/>
+          <p:nvPr/>
+        </p:nvSpPr>
+        <p:spPr>
+          <a:xfrm>
+            <a:off x="5943600" y="4069080"/>
+            <a:ext cx="5943600" cy="822960"/>
           </a:xfrm>
           <a:prstGeom prst="rect">
             <a:avLst/>
@@ -5027,9 +5390,42 @@
           <a:lstStyle/>
           <a:p/>
           <a:p>
-            <a:pPr algn="ctr"/>
-            <a:r>
-              <a:rPr sz="1200" b="0" i="1">
+            <a:pPr algn="l"/>
+            <a:r>
+              <a:rPr sz="1100" b="0" i="0">
+                <a:solidFill>
+                  <a:srgbClr val="FFFFFF"/>
+                </a:solidFill>
+              </a:rPr>
+              <a:t>El "precio de entrada" mínimo (hν) supera</a:t>
+            </a:r>
+          </a:p>
+          <a:p>
+            <a:pPr algn="l"/>
+            <a:r>
+              <a:rPr sz="1100" b="0" i="0">
+                <a:solidFill>
+                  <a:srgbClr val="FFFFFF"/>
+                </a:solidFill>
+              </a:rPr>
+              <a:t>la energía térmica disponible (k_BT).</a:t>
+            </a:r>
+          </a:p>
+          <a:p>
+            <a:pPr algn="l"/>
+            <a:r>
+              <a:rPr sz="1100" b="1" i="0">
+                <a:solidFill>
+                  <a:srgbClr val="7BFFC4"/>
+                </a:solidFill>
+              </a:rPr>
+              <a:t>→ Los modos UV quedan "congelados".</a:t>
+            </a:r>
+          </a:p>
+          <a:p>
+            <a:pPr algn="l"/>
+            <a:r>
+              <a:rPr sz="1000" b="0" i="1">
                 <a:solidFill>
                   <a:srgbClr val="AAAABB"/>
                 </a:solidFill>
@@ -5041,13 +5437,13 @@
       </p:sp>
       <p:sp>
         <p:nvSpPr>
-          <p:cNvPr id="10" name="Rectangle 9"/>
+          <p:cNvPr id="17" name="Rectangle 16"/>
           <p:cNvSpPr/>
           <p:nvPr/>
         </p:nvSpPr>
         <p:spPr>
           <a:xfrm>
-            <a:off x="365760" y="4572000"/>
+            <a:off x="365760" y="4754880"/>
             <a:ext cx="11430000" cy="27432"/>
           </a:xfrm>
           <a:prstGeom prst="rect">
@@ -5084,14 +5480,14 @@
       </p:sp>
       <p:sp>
         <p:nvSpPr>
-          <p:cNvPr id="11" name="Rectangle 10"/>
+          <p:cNvPr id="18" name="Rectangle 17"/>
           <p:cNvSpPr/>
           <p:nvPr/>
         </p:nvSpPr>
         <p:spPr>
           <a:xfrm>
-            <a:off x="365760" y="4709160"/>
-            <a:ext cx="11430000" cy="1828800"/>
+            <a:off x="365760" y="4892040"/>
+            <a:ext cx="11430000" cy="1645920"/>
           </a:xfrm>
           <a:prstGeom prst="rect">
             <a:avLst/>
@@ -5127,14 +5523,14 @@
       </p:sp>
       <p:sp>
         <p:nvSpPr>
-          <p:cNvPr id="12" name="TextBox 11"/>
+          <p:cNvPr id="19" name="TextBox 18"/>
           <p:cNvSpPr txBox="1"/>
           <p:nvPr/>
         </p:nvSpPr>
         <p:spPr>
           <a:xfrm>
-            <a:off x="502920" y="4754880"/>
-            <a:ext cx="11155680" cy="1737360"/>
+            <a:off x="502920" y="4937760"/>
+            <a:ext cx="11155680" cy="1554480"/>
           </a:xfrm>
           <a:prstGeom prst="rect">
             <a:avLst/>
@@ -5166,7 +5562,7 @@
                   <a:srgbClr val="FFFFFF"/>
                 </a:solidFill>
               </a:rPr>
-              <a:t>En sensores de Teledetección (Sentinel-2, LiDAR), la radiancia analógica</a:t>
+              <a:t>En sensores de Teledetección (Sentinel-2, LiDAR), la radiancia analógica se muestrea en</a:t>
             </a:r>
           </a:p>
           <a:p>
@@ -5177,7 +5573,7 @@
                   <a:srgbClr val="FFFFFF"/>
                 </a:solidFill>
               </a:rPr>
-              <a:t>se muestrea en Valores Digitales Discretos (DN). No existe el DN 127.5,</a:t>
+              <a:t>Valores Digitales Discretos (DN). No existe el DN 127.5, solo 127 o 128.</a:t>
             </a:r>
           </a:p>
           <a:p>
@@ -5188,7 +5584,7 @@
                   <a:srgbClr val="FFFFFF"/>
                 </a:solidFill>
               </a:rPr>
-              <a:t>solo 127 o 128. Planck aplicó exactamente esta discretización a la energía:</a:t>
+              <a:t>Planck aplicó exactamente esta discretización a la energía: si k_BT no alcanza para</a:t>
             </a:r>
           </a:p>
           <a:p>
@@ -5199,7 +5595,7 @@
                   <a:srgbClr val="7BFFC4"/>
                 </a:solidFill>
               </a:rPr>
-              <a:t>si k_BT no alcanza para subir al primer peldaño (hf), el modo queda desierto.</a:t>
+              <a:t>subir al primer peldaño (hν), el modo queda desierto.</a:t>
             </a:r>
           </a:p>
         </p:txBody>
@@ -5841,7 +6237,7 @@
                   <a:srgbClr val="FF6B35"/>
                 </a:solidFill>
               </a:rPr>
-              <a:t>1900-05</a:t>
+              <a:t>1900–05</a:t>
             </a:r>
           </a:p>
         </p:txBody>
@@ -5876,8 +6272,8 @@
                   <a:srgbClr val="FFFFFF"/>
                 </a:solidFill>
               </a:rPr>
-              <a:t>Rayleigh-
-Jeans</a:t>
+              <a:t>Rayleigh
+&amp; Jeans</a:t>
             </a:r>
           </a:p>
         </p:txBody>
@@ -6060,7 +6456,7 @@
                   <a:srgbClr val="AAAABB"/>
                 </a:solidFill>
               </a:rPr>
-              <a:t>E = nhf</a:t>
+              <a:t>E = nhν</a:t>
             </a:r>
           </a:p>
         </p:txBody>
@@ -6209,7 +6605,7 @@
                 </a:solidFill>
               </a:rPr>
               <a:t>Fotones
-E = hf</a:t>
+E = hν</a:t>
             </a:r>
           </a:p>
         </p:txBody>
@@ -6358,7 +6754,7 @@
                 </a:solidFill>
               </a:rPr>
               <a:t>L = nℏ
-E_n = -13.6/n²</a:t>
+Eₙ = −13.6/n²</a:t>
             </a:r>
           </a:p>
         </p:txBody>
@@ -6436,7 +6832,7 @@
                   <a:srgbClr val="C084FC"/>
                 </a:solidFill>
               </a:rPr>
-              <a:t>1925-26</a:t>
+              <a:t>1925–26</a:t>
             </a:r>
           </a:p>
         </p:txBody>
@@ -6585,7 +6981,7 @@
                   <a:srgbClr val="FFE066"/>
                 </a:solidFill>
               </a:rPr>
-              <a:t>Impacto en la Ciencia y Tecnología Moderna</a:t>
+              <a:t>⚡ Impacto en la Ciencia y Tecnología Moderna</a:t>
             </a:r>
           </a:p>
         </p:txBody>
@@ -6641,8 +7037,8 @@
         </p:nvSpPr>
         <p:spPr>
           <a:xfrm>
-            <a:off x="457200" y="4892040"/>
-            <a:ext cx="3291840" cy="960120"/>
+            <a:off x="502920" y="4892040"/>
+            <a:ext cx="3200400" cy="960120"/>
           </a:xfrm>
           <a:prstGeom prst="rect">
             <a:avLst/>
@@ -6674,8 +7070,9 @@
                   <a:srgbClr val="FFFFFF"/>
                 </a:solidFill>
               </a:rPr>
-              <a:t>La banda prohibida es
-un efecto de cuantización</a:t>
+              <a:t>La banda prohibida es un
+efecto directo de la
+cuantización de la energía.</a:t>
             </a:r>
           </a:p>
         </p:txBody>
@@ -6731,8 +7128,8 @@
         </p:nvSpPr>
         <p:spPr>
           <a:xfrm>
-            <a:off x="4297679" y="4892040"/>
-            <a:ext cx="3291840" cy="960120"/>
+            <a:off x="4343400" y="4892040"/>
+            <a:ext cx="3200400" cy="960120"/>
           </a:xfrm>
           <a:prstGeom prst="rect">
             <a:avLst/>
@@ -6764,8 +7161,9 @@
                   <a:srgbClr val="FFFFFF"/>
                 </a:solidFill>
               </a:rPr>
-              <a:t>Cámaras satelitales
-detectan fotones individuales</a:t>
+              <a:t>Cámaras satelitales (Sentinel,
+Landsat) detectan fotones
+individuales.</a:t>
             </a:r>
           </a:p>
         </p:txBody>
@@ -6821,8 +7219,8 @@
         </p:nvSpPr>
         <p:spPr>
           <a:xfrm>
-            <a:off x="8138160" y="4892040"/>
-            <a:ext cx="3291840" cy="960120"/>
+            <a:off x="8183880" y="4892040"/>
+            <a:ext cx="3200400" cy="960120"/>
           </a:xfrm>
           <a:prstGeom prst="rect">
             <a:avLst/>
@@ -6854,8 +7252,9 @@
                   <a:srgbClr val="FFFFFF"/>
                 </a:solidFill>
               </a:rPr>
-              <a:t>Espectrometría: emisi
-ón cuántica pura</a:t>
+              <a:t>LiDAR, Raman, fluorescencia:
+todas las técnicas espectrales
+dependen de emisión cuántica.</a:t>
             </a:r>
           </a:p>
         </p:txBody>
@@ -6868,8 +7267,8 @@
         </p:nvSpPr>
         <p:spPr>
           <a:xfrm>
-            <a:off x="914400" y="6035040"/>
-            <a:ext cx="10332720" cy="36576"/>
+            <a:off x="731520" y="5989320"/>
+            <a:ext cx="10698480" cy="36576"/>
           </a:xfrm>
           <a:prstGeom prst="rect">
             <a:avLst/>
@@ -6911,8 +7310,8 @@
         </p:nvSpPr>
         <p:spPr>
           <a:xfrm>
-            <a:off x="914400" y="6144768"/>
-            <a:ext cx="10332720" cy="548640"/>
+            <a:off x="731520" y="6080760"/>
+            <a:ext cx="10698480" cy="548640"/>
           </a:xfrm>
           <a:prstGeom prst="rect">
             <a:avLst/>
